--- a/Storage e Interfaces/Slides_Armazenamento_SBD.pptx
+++ b/Storage e Interfaces/Slides_Armazenamento_SBD.pptx
@@ -440,9 +440,10 @@
       <c:valAx>
         <c:axId val="2094734552"/>
         <c:scaling>
+          <c:logBase val="10"/>
           <c:orientation val="minMax"/>
           <c:max val="100000"/>
-          <c:min val="0"/>
+          <c:min val="10"/>
         </c:scaling>
         <c:delete val="0"/>
         <c:axPos val="b"/>
@@ -478,7 +479,7 @@
                     </a:solidFill>
                     <a:latin typeface="Calibri"/>
                   </a:rPr>
-                  <a:t>MB/s (escala linear)</a:t>
+                  <a:t>MB/s (escala logarítmica)</a:t>
                 </a:r>
               </a:p>
             </c:rich>
@@ -1045,7 +1046,7 @@
           <a:p>
             <a:r>
               <a:rPr lang="en-US" dirty="0"/>
-              <a:t>Provocação para o debate: a fita, tratada como resíduo nos livros, é a categoria com roadmap mais longo.</a:t>
+              <a:t>Os dois livros tratam a fita como o resíduo da hierarquia, e ela é a categoria com o roadmap publicado mais longo de todas as que estão na tabela. Os três motivos do cartão da direita são a resposta se perguntarem por que ela sobrevive, e o número da esquerda é o que explica o resto: a razão de preço por KB entre o topo e a base da hierarquia é de seis ordens de grandeza, enquanto a razão de latência é bem menor. Vale dizer também que a biblioteca de fita entra aqui por corresponder ao tape jukebox do livro, e que ela não tem preço público, então ficou fora da comparação de custo.</a:t>
             </a:r>
             <a:endParaRPr lang="en-US" dirty="0"/>
           </a:p>
@@ -1133,7 +1134,7 @@
           <a:p>
             <a:r>
               <a:rPr lang="en-US" dirty="0"/>
-              <a:t>Eixo logarítmico. O par leitura/escrita quase idêntico em DRAM, HDD e fita mostra que a assimetria é característica do flash, não do armazenamento em geral.</a:t>
+              <a:t>O eixo é logarítmico, e sem isso as barras do óptico e da fita desapareceriam ao lado da DRAM. O par leitura/escrita é quase idêntico na DRAM, no disco e na fita, e só diverge no flash, o que mostra que a assimetria entre ler e escrever é característica da memória flash e vem do apagamento por bloco, não do armazenamento em geral. Se perguntarem por que a fita aparece acima do disco, a resposta é que a comparação é de taxa sequencial, e nela a fita não paga posicionamento de braço entre blocos consecutivos.</a:t>
             </a:r>
             <a:endParaRPr lang="en-US" dirty="0"/>
           </a:p>
@@ -1221,7 +1222,7 @@
           <a:p>
             <a:r>
               <a:rPr lang="en-US" dirty="0"/>
-              <a:t>A última linha é a que mais contraria a expectativa da literatura didática.</a:t>
+              <a:t>A última linha é a que mais contraria a expectativa da literatura didática, que esperava convergência de preço entre SSD e HDD por volta de 2026 a 2028. O grupo não fixou autor e data de nenhuma dessas projeções, então ela entra como contexto e não como fonte. O que está documentado é o desfecho: a demanda de IA consumiu capacidade fabril de NAND, parte dos compradores voltou para HDD, e isso pressionou também o preço do disco. A razão é volátil, oscilou de 7× a 23× em quatro trimestres, e por isso só faz sentido apresentada com data. Uma versão anterior deste trabalho citava aproximadamente 16× sem carimbo de trimestre, erro registrado como E15 na Seção 9.4. Uma ressalva de proveniência que vale dizer se perguntarem pela tabela do relatório: a célula de 16,3× do 2T26 vem de divulgação trimestral anterior do mesmo índice, e o grupo não fixou o comunicado específico, de modo que quem reapresentar aquela tabela deve fechar essa referência antes.</a:t>
             </a:r>
             <a:endParaRPr lang="en-US" dirty="0"/>
           </a:p>
@@ -1309,7 +1310,7 @@
           <a:p>
             <a:r>
               <a:rPr lang="en-US" dirty="0"/>
-              <a:t>Sem estas três reduções, qualquer comparativo de interface publicado na web está errado por um fator de 8 a 10.</a:t>
+              <a:t>Estas três reduções são o que separa a taxa de marketing da taxa de dados, e é por elas que os comparativos de interface publicados sem cuidado erram por um fator de oito a dez. A citação do Silberschatz vale a pena ler em voz alta: ele escreve que o SATA-3 suporta nominalmente seis gigabytes por segundo, quando são gigabits, e a frase seguinte já cita os 600 MB/s corretos e usa gigabits para o SAS versão 3. Isso mostra que é lapso de digitação e não convenção do texto. O caso do SAS-4 é o mais curioso da segunda linha: 24G é nome comercial, a taxa real é 22,5 Gb/s, e a codificação 128b/150b já embute o FEC, o que explica os 17,2% de overhead.</a:t>
             </a:r>
             <a:endParaRPr lang="en-US" dirty="0"/>
           </a:p>
@@ -1397,7 +1398,7 @@
           <a:p>
             <a:r>
               <a:rPr lang="en-US" dirty="0"/>
-              <a:t>Extrato. Chamar atenção para a única linha 'Paralela' — o SCSI — e para a coluna de latência, que é onde a história está.</a:t>
+              <a:t>Duas coisas para apontar aqui. A primeira é a única linha marcada como paralela, o Ultra-320 SCSI, que morreu por um problema físico e não de protocolo: em barramento paralelo, o skew entre as vias e a diafonia crescem com a frequência, e foi isso que fez toda a indústria migrar para serial. A segunda é a coluna de latência, que é onde a história realmente está. A taxa útil do PCIe 5.0 é 26 vezes a do SATA 3.0, mas o que importa para OLTP é que a latência cai de 100–200 µs para 20–70 µs. E repare que iSCSI e NVMe/TCP correm sobre a mesma rede IP e têm latências de ordens diferentes, o que é argumento de protocolo, não de fio. As taxas de FC estão por direção; citar 128GFC sem dizer qual das duas escalas erra por um fator de dois.</a:t>
             </a:r>
             <a:endParaRPr lang="en-US" dirty="0"/>
           </a:p>
@@ -2189,7 +2190,7 @@
           <a:p>
             <a:r>
               <a:rPr lang="en-US" dirty="0"/>
-              <a:t>Abrir para perguntas. As cinco questões estão na Seção 7 do documento, junto com mais duas.</a:t>
+              <a:t>Q1 e Q2 são as que mais interessam ao professor, porque atacam o modelo de custo ensinado na disciplina. Q3 e Q4 são sobre a lacuna da hierarquia, e valem como fecho da parte da tabela. Q6 tem número atrás dela: a degradação de 4,6× vem de medição da Ubicloud sobre a própria plataforma, comparando NVMe local com Aurora e RDS, e é medição de fornecedor, o que convém dizer se alguém perguntar. Q7 é a única que fala do processo e não do conteúdo, e a resposta que o grupo daria é que documentar a correção com a fonte do T10 ao lado é mais útil que reproduzir o erro em silêncio.</a:t>
             </a:r>
             <a:endParaRPr lang="en-US" dirty="0"/>
           </a:p>
@@ -2365,7 +2366,7 @@
           <a:p>
             <a:r>
               <a:rPr lang="en-US" dirty="0"/>
-              <a:t>Use este slide se perguntarem de onde vem qualquer número da tabela.</a:t>
+              <a:t>Este slide existe para responder de onde vem qualquer número da tabela. A regra que o grupo adotou é que cada célula pertence a uma destas cinco categorias, e que a quinta, a lacuna declarada, é uma resposta legítima. Foi essa disciplina que impediu duas invenções de aparecerem no trabalho, e as duas estão registradas no Post-Mortem. Se perguntarem pelo preço do 9100 PRO, vale dizer que é MSRP de lançamento e que sozinho ele não atende ao requisito de preço corrente do enunciado.</a:t>
             </a:r>
             <a:endParaRPr lang="en-US" dirty="0"/>
           </a:p>
@@ -2453,7 +2454,7 @@
           <a:p>
             <a:r>
               <a:rPr lang="en-US" dirty="0"/>
-              <a:t>Se pedirem uma conta, está aqui. Todas foram verificadas em script.</a:t>
+              <a:t>Se pedirem uma conta, está aqui. Vale marcar as duas linhas que são derivação nossa e não especificação publicada: a latência de L3 do Zen 5, em que a contagem de ciclos vem de medição de terceiro e só a frequência é oficial, e o limite de commits, que é ilustrativo e ignora group commit. O caso do SAS-4 é o que costuma gerar pergunta, porque 24G sugere 24 Gb/s e a taxa de sinalização real é 22,5 Gb/s.</a:t>
             </a:r>
             <a:endParaRPr lang="en-US" dirty="0"/>
           </a:p>
@@ -4275,7 +4276,7 @@
                 <a:ea typeface="Calibri" pitchFamily="34" charset="-122"/>
                 <a:cs typeface="Calibri" pitchFamily="34" charset="-120"/>
               </a:rPr>
-              <a:t>2. TABELA 16.1 · SETEMBRO DE 2026</a:t>
+              <a:t>2. TABELA 16.1 · CONSULTA DE 05/09/2026</a:t>
             </a:r>
             <a:endParaRPr lang="en-US" sz="1100" dirty="0"/>
           </a:p>
@@ -4314,7 +4315,7 @@
                 <a:ea typeface="Cambria" pitchFamily="34" charset="-122"/>
                 <a:cs typeface="Cambria" pitchFamily="34" charset="-120"/>
               </a:rPr>
-              <a:t>Tabela 16.1 atualizada — terciário, e a coluna de preço por KB</a:t>
+              <a:t>O estrato terciário e a coluna de preço por kilobyte</a:t>
             </a:r>
             <a:endParaRPr lang="en-US" sz="3000" dirty="0"/>
           </a:p>
@@ -6998,12 +6999,12 @@
         </p:nvSpPr>
         <p:spPr>
           <a:xfrm>
-            <a:off x="658368" y="3520440"/>
-            <a:ext cx="5349240" cy="2377440"/>
+            <a:off x="658368" y="3456432"/>
+            <a:ext cx="5349240" cy="2304288"/>
           </a:xfrm>
           <a:prstGeom prst="roundRect">
             <a:avLst>
-              <a:gd name="adj" fmla="val 2308"/>
+              <a:gd name="adj" fmla="val 2381"/>
             </a:avLst>
           </a:prstGeom>
           <a:solidFill>
@@ -7025,7 +7026,7 @@
         </p:nvSpPr>
         <p:spPr>
           <a:xfrm>
-            <a:off x="978408" y="3703320"/>
+            <a:off x="978408" y="3621024"/>
             <a:ext cx="4754880" cy="274320"/>
           </a:xfrm>
           <a:prstGeom prst="rect">
@@ -7050,7 +7051,7 @@
                 <a:ea typeface="Calibri" pitchFamily="34" charset="-122"/>
                 <a:cs typeface="Calibri" pitchFamily="34" charset="-120"/>
               </a:rPr>
-              <a:t>A razão que sustenta a hierarquia</a:t>
+              <a:t>A razão de custo que sustenta a hierarquia</a:t>
             </a:r>
             <a:endParaRPr lang="en-US" sz="1150" dirty="0"/>
           </a:p>
@@ -7064,8 +7065,8 @@
         </p:nvSpPr>
         <p:spPr>
           <a:xfrm>
-            <a:off x="978408" y="4023360"/>
-            <a:ext cx="4754880" cy="658368"/>
+            <a:off x="978408" y="3913632"/>
+            <a:ext cx="4754880" cy="640080"/>
           </a:xfrm>
           <a:prstGeom prst="rect">
             <a:avLst/>
@@ -7103,8 +7104,8 @@
         </p:nvSpPr>
         <p:spPr>
           <a:xfrm>
-            <a:off x="978408" y="4718304"/>
-            <a:ext cx="4754880" cy="960120"/>
+            <a:off x="978408" y="4590288"/>
+            <a:ext cx="4754880" cy="1097280"/>
           </a:xfrm>
           <a:prstGeom prst="rect">
             <a:avLst/>
@@ -7118,12 +7119,12 @@
           <a:p>
             <a:pPr indent="0" marL="0">
               <a:lnSpc>
-                <a:spcPts val="1800"/>
+                <a:spcPts val="1700"/>
               </a:lnSpc>
               <a:buNone/>
             </a:pPr>
             <a:r>
-              <a:rPr lang="en-US" sz="1250" dirty="0">
+              <a:rPr lang="en-US" sz="1200" dirty="0">
                 <a:solidFill>
                   <a:srgbClr val="C3CAD4"/>
                 </a:solidFill>
@@ -7131,9 +7132,9 @@
                 <a:ea typeface="Calibri" pitchFamily="34" charset="-122"/>
                 <a:cs typeface="Calibri" pitchFamily="34" charset="-120"/>
               </a:rPr>
-              <a:t>separam o preço por KB da SRAM do da fita LTO-9:  (US$ 199 ÷ 67.108,864 KB) ÷ (US$ 87,99 ÷ 1,8×10¹⁰ KB) = 2,97×10⁻³ ÷ 4,89×10⁻⁹.  Não é o desempenho que sustenta o tiering: é essa razão de custo.</a:t>
+              <a:t>separam o preço por KB da SRAM do preço por KB do cartucho LTO-9. A conta é (US$ 199 ÷ 67.108,864 KB) ÷ (US$ 87,99 ÷ 1,8×10¹⁰ KB), ou seja, 2,97×10⁻³ contra 4,89×10⁻⁹. É essa razão que justifica manter uma hierarquia em vez de comprar tudo do meio mais rápido.</a:t>
             </a:r>
-            <a:endParaRPr lang="en-US" sz="1250" dirty="0"/>
+            <a:endParaRPr lang="en-US" sz="1200" dirty="0"/>
           </a:p>
         </p:txBody>
       </p:sp>
@@ -7145,12 +7146,12 @@
         </p:nvSpPr>
         <p:spPr>
           <a:xfrm>
-            <a:off x="6263640" y="3520440"/>
-            <a:ext cx="5276088" cy="2377440"/>
+            <a:off x="6263640" y="3456432"/>
+            <a:ext cx="5276088" cy="2304288"/>
           </a:xfrm>
           <a:prstGeom prst="roundRect">
             <a:avLst>
-              <a:gd name="adj" fmla="val 2308"/>
+              <a:gd name="adj" fmla="val 2381"/>
             </a:avLst>
           </a:prstGeom>
           <a:solidFill>
@@ -7172,7 +7173,7 @@
         </p:nvSpPr>
         <p:spPr>
           <a:xfrm>
-            <a:off x="6583680" y="3703320"/>
+            <a:off x="6583680" y="3621024"/>
             <a:ext cx="4663440" cy="274320"/>
           </a:xfrm>
           <a:prstGeom prst="rect">
@@ -7197,7 +7198,7 @@
                 <a:ea typeface="Calibri" pitchFamily="34" charset="-122"/>
                 <a:cs typeface="Calibri" pitchFamily="34" charset="-120"/>
               </a:rPr>
-              <a:t>Por que a fita não morreu</a:t>
+              <a:t>Por que a fita continua em produção</a:t>
             </a:r>
             <a:endParaRPr lang="en-US" sz="1150" dirty="0"/>
           </a:p>
@@ -7211,8 +7212,8 @@
         </p:nvSpPr>
         <p:spPr>
           <a:xfrm>
-            <a:off x="6583680" y="4041648"/>
-            <a:ext cx="4663440" cy="1691640"/>
+            <a:off x="6583680" y="3931920"/>
+            <a:ext cx="4663440" cy="1737360"/>
           </a:xfrm>
           <a:prstGeom prst="rect">
             <a:avLst/>
@@ -7224,18 +7225,14 @@
           <a:bodyPr wrap="square" lIns="0" tIns="0" rIns="0" bIns="0" rtlCol="0" anchor="ctr"/>
           <a:lstStyle/>
           <a:p>
-            <a:pPr marL="342900" indent="-342900">
+            <a:pPr indent="0" marL="0">
               <a:lnSpc>
-                <a:spcPts val="1700"/>
+                <a:spcPts val="1600"/>
               </a:lnSpc>
-              <a:spcAft>
-                <a:spcPts val="800"/>
-              </a:spcAft>
-              <a:buSzPct val="100000"/>
-              <a:buChar char="•"/>
+              <a:buNone/>
             </a:pPr>
             <a:r>
-              <a:rPr lang="en-US" sz="1250" dirty="0">
+              <a:rPr lang="en-US" sz="1200" dirty="0">
                 <a:solidFill>
                   <a:srgbClr val="14181F"/>
                 </a:solidFill>
@@ -7243,23 +7240,28 @@
                 <a:ea typeface="Calibri" pitchFamily="34" charset="-122"/>
                 <a:cs typeface="Calibri" pitchFamily="34" charset="-120"/>
               </a:rPr>
-              <a:t>Drive e mídia são precificados à parte, assim como no armazenamento óptico.</a:t>
+              <a:t>→ O drive e a mídia são precificados à parte, como também acontece no armazenamento óptico, de modo que o preço por TB do cartucho não inclui o leitor.</a:t>
             </a:r>
-            <a:endParaRPr lang="en-US" sz="1250" dirty="0"/>
+            <a:endParaRPr lang="en-US" sz="1200" dirty="0"/>
           </a:p>
           <a:p>
-            <a:pPr marL="342900" indent="-342900">
+            <a:pPr indent="0" marL="0">
               <a:lnSpc>
-                <a:spcPts val="1700"/>
+                <a:spcPts val="1600"/>
               </a:lnSpc>
-              <a:spcAft>
-                <a:spcPts val="800"/>
-              </a:spcAft>
-              <a:buSzPct val="100000"/>
-              <a:buChar char="•"/>
+              <a:buNone/>
+            </a:pPr>
+            <a:endParaRPr lang="en-US" sz="1200" dirty="0"/>
+          </a:p>
+          <a:p>
+            <a:pPr indent="0" marL="0">
+              <a:lnSpc>
+                <a:spcPts val="1600"/>
+              </a:lnSpc>
+              <a:buNone/>
             </a:pPr>
             <a:r>
-              <a:rPr lang="en-US" sz="1250" dirty="0">
+              <a:rPr lang="en-US" sz="1200" dirty="0">
                 <a:solidFill>
                   <a:srgbClr val="14181F"/>
                 </a:solidFill>
@@ -7267,23 +7269,28 @@
                 <a:ea typeface="Calibri" pitchFamily="34" charset="-122"/>
                 <a:cs typeface="Calibri" pitchFamily="34" charset="-120"/>
               </a:rPr>
-              <a:t>Roadmap (revisado em nov/2025) até 365 TB nativos no LTO-14 — a maior vitalidade da hierarquia.</a:t>
+              <a:t>→ O roadmap do consórcio LTO, revisado em novembro de 2025, chega a 365 TB nativos no LTO-14, o horizonte publicado mais longo entre os meios desta tabela.</a:t>
             </a:r>
-            <a:endParaRPr lang="en-US" sz="1250" dirty="0"/>
+            <a:endParaRPr lang="en-US" sz="1200" dirty="0"/>
           </a:p>
           <a:p>
-            <a:pPr marL="342900" indent="-342900">
+            <a:pPr indent="0" marL="0">
               <a:lnSpc>
-                <a:spcPts val="1700"/>
+                <a:spcPts val="1600"/>
               </a:lnSpc>
-              <a:spcAft>
-                <a:spcPts val="800"/>
-              </a:spcAft>
-              <a:buSzPct val="100000"/>
-              <a:buChar char="•"/>
+              <a:buNone/>
+            </a:pPr>
+            <a:endParaRPr lang="en-US" sz="1200" dirty="0"/>
+          </a:p>
+          <a:p>
+            <a:pPr indent="0" marL="0">
+              <a:lnSpc>
+                <a:spcPts val="1600"/>
+              </a:lnSpc>
+              <a:buNone/>
             </a:pPr>
             <a:r>
-              <a:rPr lang="en-US" sz="1250" dirty="0">
+              <a:rPr lang="en-US" sz="1200" dirty="0">
                 <a:solidFill>
                   <a:srgbClr val="14181F"/>
                 </a:solidFill>
@@ -7291,15 +7298,57 @@
                 <a:ea typeface="Calibri" pitchFamily="34" charset="-122"/>
                 <a:cs typeface="Calibri" pitchFamily="34" charset="-120"/>
               </a:rPr>
-              <a:t>Consumo zero na estante, air gap físico contra ransomware, retenção declarada de 30 anos.</a:t>
+              <a:t>→ O cartucho não consome energia parado na estante, oferece um air gap físico contra ransomware e tem retenção declarada de 30 anos.</a:t>
             </a:r>
-            <a:endParaRPr lang="en-US" sz="1250" dirty="0"/>
+            <a:endParaRPr lang="en-US" sz="1200" dirty="0"/>
           </a:p>
         </p:txBody>
       </p:sp>
       <p:sp>
         <p:nvSpPr>
           <p:cNvPr id="12" name="Text 9"/>
+          <p:cNvSpPr txBox="1"/>
+          <p:nvPr/>
+        </p:nvSpPr>
+        <p:spPr>
+          <a:xfrm>
+            <a:off x="658368" y="5870448"/>
+            <a:ext cx="10874959" cy="310896"/>
+          </a:xfrm>
+          <a:prstGeom prst="rect">
+            <a:avLst/>
+          </a:prstGeom>
+          <a:noFill/>
+          <a:ln/>
+        </p:spPr>
+        <p:txBody>
+          <a:bodyPr wrap="square" lIns="0" tIns="0" rIns="0" bIns="0" rtlCol="0" anchor="ctr"/>
+          <a:lstStyle/>
+          <a:p>
+            <a:pPr indent="0" marL="0">
+              <a:lnSpc>
+                <a:spcPts val="1200"/>
+              </a:lnSpc>
+              <a:buNone/>
+            </a:pPr>
+            <a:r>
+              <a:rPr lang="en-US" sz="950" i="1" dirty="0">
+                <a:solidFill>
+                  <a:srgbClr val="55606E"/>
+                </a:solidFill>
+                <a:latin typeface="Calibri" pitchFamily="34" charset="0"/>
+                <a:ea typeface="Calibri" pitchFamily="34" charset="-122"/>
+                <a:cs typeface="Calibri" pitchFamily="34" charset="-120"/>
+              </a:rPr>
+              <a:t>Fonte: tabela integral e notas de rodapé na Seção 3.2 do relatório. Capacidades e taxas vêm de datasheet de fabricante; a capacidade da library e os 51,2 GB/s são derivação nossa, com a conta explicitada na nota da tabela.</a:t>
+            </a:r>
+            <a:endParaRPr lang="en-US" sz="950" dirty="0"/>
+          </a:p>
+        </p:txBody>
+      </p:sp>
+      <p:sp>
+        <p:nvSpPr>
+          <p:cNvPr id="13" name="Text 10"/>
           <p:cNvSpPr txBox="1"/>
           <p:nvPr/>
         </p:nvSpPr>
@@ -7440,7 +7489,7 @@
                 <a:ea typeface="Cambria" pitchFamily="34" charset="-122"/>
                 <a:cs typeface="Cambria" pitchFamily="34" charset="-120"/>
               </a:rPr>
-              <a:t>A largura de banda foi o que realmente explodiu</a:t>
+              <a:t>A largura de banda foi o que mais avançou entre 2014 e 2026</a:t>
             </a:r>
             <a:endParaRPr lang="en-US" sz="3000" dirty="0"/>
           </a:p>
@@ -7454,7 +7503,7 @@
         </p:nvGraphicFramePr>
         <p:xfrm>
           <a:off x="658368" y="1536192"/>
-          <a:ext cx="7315200" cy="4343400"/>
+          <a:ext cx="7315200" cy="4160520"/>
         </p:xfrm>
         <a:graphic xmlns:a="http://schemas.openxmlformats.org/drawingml/2006/main">
           <a:graphicData uri="http://schemas.openxmlformats.org/drawingml/2006/chart">
@@ -7471,7 +7520,7 @@
         <p:spPr>
           <a:xfrm>
             <a:off x="8183880" y="1536192"/>
-            <a:ext cx="3346704" cy="4343400"/>
+            <a:ext cx="3346704" cy="4160520"/>
           </a:xfrm>
           <a:prstGeom prst="roundRect">
             <a:avLst>
@@ -7497,7 +7546,7 @@
         </p:nvSpPr>
         <p:spPr>
           <a:xfrm>
-            <a:off x="8503920" y="1737360"/>
+            <a:off x="8503920" y="1719072"/>
             <a:ext cx="2743200" cy="274320"/>
           </a:xfrm>
           <a:prstGeom prst="rect">
@@ -7536,8 +7585,8 @@
         </p:nvSpPr>
         <p:spPr>
           <a:xfrm>
-            <a:off x="8503920" y="2103120"/>
-            <a:ext cx="2743200" cy="457200"/>
+            <a:off x="8503920" y="2011680"/>
+            <a:ext cx="2743200" cy="438912"/>
           </a:xfrm>
           <a:prstGeom prst="rect">
             <a:avLst/>
@@ -7553,7 +7602,7 @@
               <a:buNone/>
             </a:pPr>
             <a:r>
-              <a:rPr lang="en-US" sz="2400" b="1" dirty="0">
+              <a:rPr lang="en-US" sz="2300" b="1" dirty="0">
                 <a:solidFill>
                   <a:srgbClr val="14181F"/>
                 </a:solidFill>
@@ -7563,7 +7612,7 @@
               </a:rPr>
               <a:t>20×</a:t>
             </a:r>
-            <a:endParaRPr lang="en-US" sz="2400" dirty="0"/>
+            <a:endParaRPr lang="en-US" sz="2300" dirty="0"/>
           </a:p>
         </p:txBody>
       </p:sp>
@@ -7575,8 +7624,8 @@
         </p:nvSpPr>
         <p:spPr>
           <a:xfrm>
-            <a:off x="8503920" y="2560320"/>
-            <a:ext cx="2743200" cy="731520"/>
+            <a:off x="8503920" y="2450592"/>
+            <a:ext cx="2743200" cy="786384"/>
           </a:xfrm>
           <a:prstGeom prst="rect">
             <a:avLst/>
@@ -7590,12 +7639,12 @@
           <a:p>
             <a:pPr indent="0" marL="0">
               <a:lnSpc>
-                <a:spcPts val="1600"/>
+                <a:spcPts val="1500"/>
               </a:lnSpc>
               <a:buNone/>
             </a:pPr>
             <a:r>
-              <a:rPr lang="en-US" sz="1200" dirty="0">
+              <a:rPr lang="en-US" sz="1150" dirty="0">
                 <a:solidFill>
                   <a:srgbClr val="55606E"/>
                 </a:solidFill>
@@ -7603,9 +7652,9 @@
                 <a:ea typeface="Calibri" pitchFamily="34" charset="-122"/>
                 <a:cs typeface="Calibri" pitchFamily="34" charset="-120"/>
               </a:rPr>
-              <a:t>de banda a mais no SSD, contra a Tabela 16.1 original: de 750 MB/s para 14,7 GB/s.</a:t>
+              <a:t>é o ganho de banda do SSD contra a Tabela 16.1 original, que publica 750 MB/s, enquanto o PCIe 5.0 entrega 14,7 GB/s.</a:t>
             </a:r>
-            <a:endParaRPr lang="en-US" sz="1200" dirty="0"/>
+            <a:endParaRPr lang="en-US" sz="1150" dirty="0"/>
           </a:p>
         </p:txBody>
       </p:sp>
@@ -7617,8 +7666,8 @@
         </p:nvSpPr>
         <p:spPr>
           <a:xfrm>
-            <a:off x="8503920" y="3383280"/>
-            <a:ext cx="2743200" cy="457200"/>
+            <a:off x="8503920" y="3200400"/>
+            <a:ext cx="2743200" cy="438912"/>
           </a:xfrm>
           <a:prstGeom prst="rect">
             <a:avLst/>
@@ -7634,7 +7683,7 @@
               <a:buNone/>
             </a:pPr>
             <a:r>
-              <a:rPr lang="en-US" sz="2400" b="1" dirty="0">
+              <a:rPr lang="en-US" sz="2300" b="1" dirty="0">
                 <a:solidFill>
                   <a:srgbClr val="14181F"/>
                 </a:solidFill>
@@ -7644,7 +7693,7 @@
               </a:rPr>
               <a:t>1,4×</a:t>
             </a:r>
-            <a:endParaRPr lang="en-US" sz="2400" dirty="0"/>
+            <a:endParaRPr lang="en-US" sz="2300" dirty="0"/>
           </a:p>
         </p:txBody>
       </p:sp>
@@ -7656,8 +7705,8 @@
         </p:nvSpPr>
         <p:spPr>
           <a:xfrm>
-            <a:off x="8503920" y="3840480"/>
-            <a:ext cx="2743200" cy="731520"/>
+            <a:off x="8503920" y="3639312"/>
+            <a:ext cx="2743200" cy="786384"/>
           </a:xfrm>
           <a:prstGeom prst="rect">
             <a:avLst/>
@@ -7671,12 +7720,12 @@
           <a:p>
             <a:pPr indent="0" marL="0">
               <a:lnSpc>
-                <a:spcPts val="1600"/>
+                <a:spcPts val="1500"/>
               </a:lnSpc>
               <a:buNone/>
             </a:pPr>
             <a:r>
-              <a:rPr lang="en-US" sz="1200" dirty="0">
+              <a:rPr lang="en-US" sz="1150" dirty="0">
                 <a:solidFill>
                   <a:srgbClr val="55606E"/>
                 </a:solidFill>
@@ -7684,9 +7733,9 @@
                 <a:ea typeface="Calibri" pitchFamily="34" charset="-122"/>
                 <a:cs typeface="Calibri" pitchFamily="34" charset="-120"/>
               </a:rPr>
-              <a:t>foi o avanço do disco magnético no mesmo período: de 200 para 275 MB/s.</a:t>
+              <a:t>foi o avanço do disco magnético no mesmo período, de 200 para 275 MB/s sustentados nas trilhas externas.</a:t>
             </a:r>
-            <a:endParaRPr lang="en-US" sz="1200" dirty="0"/>
+            <a:endParaRPr lang="en-US" sz="1150" dirty="0"/>
           </a:p>
         </p:txBody>
       </p:sp>
@@ -7698,8 +7747,8 @@
         </p:nvSpPr>
         <p:spPr>
           <a:xfrm>
-            <a:off x="8503920" y="4663440"/>
-            <a:ext cx="2743200" cy="457200"/>
+            <a:off x="8503920" y="4389120"/>
+            <a:ext cx="2743200" cy="438912"/>
           </a:xfrm>
           <a:prstGeom prst="rect">
             <a:avLst/>
@@ -7715,7 +7764,7 @@
               <a:buNone/>
             </a:pPr>
             <a:r>
-              <a:rPr lang="en-US" sz="2400" b="1" dirty="0">
+              <a:rPr lang="en-US" sz="2300" b="1" dirty="0">
                 <a:solidFill>
                   <a:srgbClr val="14181F"/>
                 </a:solidFill>
@@ -7725,7 +7774,7 @@
               </a:rPr>
               <a:t>LTO &gt; HDD</a:t>
             </a:r>
-            <a:endParaRPr lang="en-US" sz="2400" dirty="0"/>
+            <a:endParaRPr lang="en-US" sz="2300" dirty="0"/>
           </a:p>
         </p:txBody>
       </p:sp>
@@ -7737,8 +7786,8 @@
         </p:nvSpPr>
         <p:spPr>
           <a:xfrm>
-            <a:off x="8503920" y="5120640"/>
-            <a:ext cx="2743200" cy="731520"/>
+            <a:off x="8503920" y="4828032"/>
+            <a:ext cx="2743200" cy="786384"/>
           </a:xfrm>
           <a:prstGeom prst="rect">
             <a:avLst/>
@@ -7752,12 +7801,12 @@
           <a:p>
             <a:pPr indent="0" marL="0">
               <a:lnSpc>
-                <a:spcPts val="1600"/>
+                <a:spcPts val="1500"/>
               </a:lnSpc>
               <a:buNone/>
             </a:pPr>
             <a:r>
-              <a:rPr lang="en-US" sz="1200" dirty="0">
+              <a:rPr lang="en-US" sz="1150" dirty="0">
                 <a:solidFill>
                   <a:srgbClr val="55606E"/>
                 </a:solidFill>
@@ -7765,15 +7814,57 @@
                 <a:ea typeface="Calibri" pitchFamily="34" charset="-122"/>
                 <a:cs typeface="Calibri" pitchFamily="34" charset="-120"/>
               </a:rPr>
-              <a:t>a fita supera o disco em taxa sequencial — não precisa posicionar braço entre blocos.</a:t>
+              <a:t>a fita supera o disco em taxa sequencial, porque não precisa posicionar um braço entre blocos consecutivos.</a:t>
             </a:r>
-            <a:endParaRPr lang="en-US" sz="1200" dirty="0"/>
+            <a:endParaRPr lang="en-US" sz="1150" dirty="0"/>
           </a:p>
         </p:txBody>
       </p:sp>
       <p:sp>
         <p:nvSpPr>
           <p:cNvPr id="13" name="Text 10"/>
+          <p:cNvSpPr txBox="1"/>
+          <p:nvPr/>
+        </p:nvSpPr>
+        <p:spPr>
+          <a:xfrm>
+            <a:off x="658368" y="5797296"/>
+            <a:ext cx="10874959" cy="310896"/>
+          </a:xfrm>
+          <a:prstGeom prst="rect">
+            <a:avLst/>
+          </a:prstGeom>
+          <a:noFill/>
+          <a:ln/>
+        </p:spPr>
+        <p:txBody>
+          <a:bodyPr wrap="square" lIns="0" tIns="0" rIns="0" bIns="0" rtlCol="0" anchor="ctr"/>
+          <a:lstStyle/>
+          <a:p>
+            <a:pPr indent="0" marL="0">
+              <a:lnSpc>
+                <a:spcPts val="1200"/>
+              </a:lnSpc>
+              <a:buNone/>
+            </a:pPr>
+            <a:r>
+              <a:rPr lang="en-US" sz="950" i="1" dirty="0">
+                <a:solidFill>
+                  <a:srgbClr val="55606E"/>
+                </a:solidFill>
+                <a:latin typeface="Calibri" pitchFamily="34" charset="0"/>
+                <a:ea typeface="Calibri" pitchFamily="34" charset="-122"/>
+                <a:cs typeface="Calibri" pitchFamily="34" charset="-120"/>
+              </a:rPr>
+              <a:t>Fonte: Figura 2 e Seção 3.5(b) do relatório; valores de leitura e escrita de datasheet de fabricante. A capacidade e a banda publicadas podem ser comparadas entre 2014 e 2026, mas a latência não, porque os tempos de acesso mantidos do livro não têm medição equivalente de carga, fila e percentil.</a:t>
+            </a:r>
+            <a:endParaRPr lang="en-US" sz="950" dirty="0"/>
+          </a:p>
+        </p:txBody>
+      </p:sp>
+      <p:sp>
+        <p:nvSpPr>
+          <p:cNvPr id="14" name="Text 11"/>
           <p:cNvSpPr txBox="1"/>
           <p:nvPr/>
         </p:nvSpPr>
@@ -8032,7 +8123,7 @@
                           <a:ea typeface="Calibri" pitchFamily="34" charset="-122"/>
                           <a:cs typeface="Calibri" pitchFamily="34" charset="-120"/>
                         </a:rPr>
-                        <a:t>Impacto no projeto de SBD</a:t>
+                        <a:t>Impacto na tabela e no projeto de SBD</a:t>
                       </a:r>
                       <a:endParaRPr lang="en-US" sz="1150" dirty="0">
                         <a:latin typeface="Calibri" charset="0"/>
@@ -8167,7 +8258,7 @@
                           <a:ea typeface="Calibri" pitchFamily="34" charset="-122"/>
                           <a:cs typeface="Calibri" pitchFamily="34" charset="-120"/>
                         </a:rPr>
-                        <a:t>Removeu o degrau de memória persistente; reabriu o vão de 3 ordens de grandeza</a:t>
+                        <a:t>Removeu o degrau de memória persistente e reabriu um vazio de 3 ordens de grandeza entre DRAM e SSD</a:t>
                       </a:r>
                       <a:endParaRPr lang="en-US" sz="1200" dirty="0">
                         <a:latin typeface="Calibri" charset="0"/>
@@ -8234,7 +8325,7 @@
                           <a:ea typeface="Calibri" pitchFamily="34" charset="-122"/>
                           <a:cs typeface="Calibri" pitchFamily="34" charset="-120"/>
                         </a:rPr>
-                        <a:t>CXL preenche o vão parcialmente</a:t>
+                        <a:t>CXL preenche o vazio parcialmente</a:t>
                       </a:r>
                       <a:endParaRPr lang="en-US" sz="1200" dirty="0">
                         <a:latin typeface="Calibri" charset="0"/>
@@ -8299,7 +8390,7 @@
                           <a:ea typeface="Calibri" pitchFamily="34" charset="-122"/>
                           <a:cs typeface="Calibri" pitchFamily="34" charset="-120"/>
                         </a:rPr>
-                        <a:t>Novo nível de memória a 214–271 ns (2–2,5× a DRAM local); buffer pool cresce além dos slots DIMM</a:t>
+                        <a:t>Novo nível de memória a 214–271 ns, de 2 a 2,5× a DRAM local; o buffer pool pode crescer além dos slots DIMM</a:t>
                       </a:r>
                       <a:endParaRPr lang="en-US" sz="1200" dirty="0">
                         <a:latin typeface="Calibri" charset="0"/>
@@ -8366,7 +8457,7 @@
                           <a:ea typeface="Calibri" pitchFamily="34" charset="-122"/>
                           <a:cs typeface="Calibri" pitchFamily="34" charset="-120"/>
                         </a:rPr>
-                        <a:t>Sony ODA encerrado; Pioneer saiu dos leitores</a:t>
+                        <a:t>Sony ODA encerrado; Pioneer saiu dos leitores ópticos</a:t>
                       </a:r>
                       <a:endParaRPr lang="en-US" sz="1200" dirty="0">
                         <a:latin typeface="Calibri" charset="0"/>
@@ -8431,7 +8522,7 @@
                           <a:ea typeface="Calibri" pitchFamily="34" charset="-122"/>
                           <a:cs typeface="Calibri" pitchFamily="34" charset="-120"/>
                         </a:rPr>
-                        <a:t>Óptico virou nicho de arquivamento WORM de longuíssimo prazo</a:t>
+                        <a:t>O óptico virou nicho de arquivamento WORM de longuíssimo prazo e saiu da tabela como linha ativa</a:t>
                       </a:r>
                       <a:endParaRPr lang="en-US" sz="1200" dirty="0">
                         <a:latin typeface="Calibri" charset="0"/>
@@ -8498,7 +8589,7 @@
                           <a:ea typeface="Calibri" pitchFamily="34" charset="-122"/>
                           <a:cs typeface="Calibri" pitchFamily="34" charset="-120"/>
                         </a:rPr>
-                        <a:t>SSD SATA virou legado</a:t>
+                        <a:t>SSD SATA tornou-se legado</a:t>
                       </a:r>
                       <a:endParaRPr lang="en-US" sz="1200" dirty="0">
                         <a:latin typeface="Calibri" charset="0"/>
@@ -8563,7 +8654,7 @@
                           <a:ea typeface="Calibri" pitchFamily="34" charset="-122"/>
                           <a:cs typeface="Calibri" pitchFamily="34" charset="-120"/>
                         </a:rPr>
-                        <a:t>Interface satura em 550 MB/s; mantido apenas por retrofit</a:t>
+                        <a:t>A interface satura em 550 MB/s, e a linha é mantida só por retrofit de parque instalado</a:t>
                       </a:r>
                       <a:endParaRPr lang="en-US" sz="1200" dirty="0">
                         <a:latin typeface="Calibri" charset="0"/>
@@ -8630,7 +8721,7 @@
                           <a:ea typeface="Calibri" pitchFamily="34" charset="-122"/>
                           <a:cs typeface="Calibri" pitchFamily="34" charset="-120"/>
                         </a:rPr>
-                        <a:t>PCIe 5.0 padrão; PCIe 6.0 no datacenter</a:t>
+                        <a:t>PCIe 5.0 é padrão de consumo; PCIe 6.0 chegou ao datacenter</a:t>
                       </a:r>
                       <a:endParaRPr lang="en-US" sz="1200" dirty="0">
                         <a:latin typeface="Calibri" charset="0"/>
@@ -8695,7 +8786,7 @@
                           <a:ea typeface="Calibri" pitchFamily="34" charset="-122"/>
                           <a:cs typeface="Calibri" pitchFamily="34" charset="-120"/>
                         </a:rPr>
-                        <a:t>14,9 GB/s no consumo; 28 GB/s no Micron 9650 (fev/2026)</a:t>
+                        <a:t>14,8 GB/s no consumo e 28 GB/s no Micron 9650, em produção em massa desde fev./2026</a:t>
                       </a:r>
                       <a:endParaRPr lang="en-US" sz="1200" dirty="0">
                         <a:latin typeface="Calibri" charset="0"/>
@@ -8827,7 +8918,7 @@
                           <a:ea typeface="Calibri" pitchFamily="34" charset="-122"/>
                           <a:cs typeface="Calibri" pitchFamily="34" charset="-120"/>
                         </a:rPr>
-                        <a:t>HDD saltou de 24 TB para 32–36 TB; 44 TB anunciado</a:t>
+                        <a:t>O disco magnético saltou de 24 TB para 32–36 TB, com o HAMR já em produção de volume</a:t>
                       </a:r>
                       <a:endParaRPr lang="en-US" sz="1200" dirty="0">
                         <a:latin typeface="Calibri" charset="0"/>
@@ -8959,7 +9050,7 @@
                           <a:ea typeface="Calibri" pitchFamily="34" charset="-122"/>
                           <a:cs typeface="Calibri" pitchFamily="34" charset="-120"/>
                         </a:rPr>
-                        <a:t>Arquivamento a US$ 5–10/TB; roadmap revisado até 365 TB nativos</a:t>
+                        <a:t>Arquivamento a US$ 5–10/TB, com roadmap revisado em nov./2025 até 365 TB nativos no LTO-14</a:t>
                       </a:r>
                       <a:endParaRPr lang="en-US" sz="1200" dirty="0">
                         <a:latin typeface="Calibri" charset="0"/>
@@ -9026,7 +9117,7 @@
                           <a:ea typeface="Calibri" pitchFamily="34" charset="-122"/>
                           <a:cs typeface="Calibri" pitchFamily="34" charset="-120"/>
                         </a:rPr>
-                        <a:t>SSD e HDD divergiram em custo</a:t>
+                        <a:t>SSD e HDD divergiram em custo em vez de convergir</a:t>
                       </a:r>
                       <a:endParaRPr lang="en-US" sz="1200" dirty="0">
                         <a:latin typeface="Calibri" charset="0"/>
@@ -9091,7 +9182,7 @@
                           <a:ea typeface="Calibri" pitchFamily="34" charset="-122"/>
                           <a:cs typeface="Calibri" pitchFamily="34" charset="-120"/>
                         </a:rPr>
-                        <a:t>18,6× por TB em 05/09/2026; observação parcial do 3T26 (era 7× no 3T25)</a:t>
+                        <a:t>Razão de 18,6× por TB em 05/09/2026, 3T26 em curso, contra 7× no 3T25 e pico de 23,2× no 1T26</a:t>
                       </a:r>
                       <a:endParaRPr lang="en-US" sz="1200" dirty="0">
                         <a:latin typeface="Calibri" charset="0"/>
@@ -9147,6 +9238,48 @@
       <p:sp>
         <p:nvSpPr>
           <p:cNvPr id="5" name="Text 2"/>
+          <p:cNvSpPr txBox="1"/>
+          <p:nvPr/>
+        </p:nvSpPr>
+        <p:spPr>
+          <a:xfrm>
+            <a:off x="658368" y="5541264"/>
+            <a:ext cx="10874959" cy="310896"/>
+          </a:xfrm>
+          <a:prstGeom prst="rect">
+            <a:avLst/>
+          </a:prstGeom>
+          <a:noFill/>
+          <a:ln/>
+        </p:spPr>
+        <p:txBody>
+          <a:bodyPr wrap="square" lIns="0" tIns="0" rIns="0" bIns="0" rtlCol="0" anchor="ctr"/>
+          <a:lstStyle/>
+          <a:p>
+            <a:pPr indent="0" marL="0">
+              <a:lnSpc>
+                <a:spcPts val="1200"/>
+              </a:lnSpc>
+              <a:buNone/>
+            </a:pPr>
+            <a:r>
+              <a:rPr lang="en-US" sz="950" i="1" dirty="0">
+                <a:solidFill>
+                  <a:srgbClr val="55606E"/>
+                </a:solidFill>
+                <a:latin typeface="Calibri" pitchFamily="34" charset="0"/>
+                <a:ea typeface="Calibri" pitchFamily="34" charset="-122"/>
+                <a:cs typeface="Calibri" pitchFamily="34" charset="-120"/>
+              </a:rPr>
+              <a:t>Fontes: razão SSD/HDD e preços de US$ 22.600 (SSD TLC de 30 TB) e US$ 1.216 (HDD de 30 TB) no Flash Volatility Index da VDURA, 11/ago./2026 (https://www.vdura.com/2026/08/11/ssd-prices-settle-into-a-costly-new-normal-at-6-5x-year-ago-levels-reshaping-the-economics-of-ai-factories-vdura-flash-volatility-index-shows/); capacidade de 36 TB no comunicado da Seagate de 20/jan./2025; demais linhas nas Seções 3.4 e 3.5 do relatório.</a:t>
+            </a:r>
+            <a:endParaRPr lang="en-US" sz="950" dirty="0"/>
+          </a:p>
+        </p:txBody>
+      </p:sp>
+      <p:sp>
+        <p:nvSpPr>
+          <p:cNvPr id="6" name="Text 3"/>
           <p:cNvSpPr txBox="1"/>
           <p:nvPr/>
         </p:nvSpPr>
@@ -9287,7 +9420,7 @@
                 <a:ea typeface="Cambria" pitchFamily="34" charset="-122"/>
                 <a:cs typeface="Cambria" pitchFamily="34" charset="-120"/>
               </a:rPr>
-              <a:t>Antes de comparar interfaces: três reduções separam marketing de realidade</a:t>
+              <a:t>Da taxa anunciada à taxa real: três reduções sucessivas</a:t>
             </a:r>
             <a:endParaRPr lang="en-US" sz="3000" dirty="0"/>
           </a:p>
@@ -9431,8 +9564,8 @@
         </p:nvSpPr>
         <p:spPr>
           <a:xfrm>
-            <a:off x="4133088" y="1792224"/>
-            <a:ext cx="4206240" cy="685800"/>
+            <a:off x="4133088" y="1773936"/>
+            <a:ext cx="4206240" cy="777240"/>
           </a:xfrm>
           <a:prstGeom prst="rect">
             <a:avLst/>
@@ -9446,12 +9579,12 @@
           <a:p>
             <a:pPr indent="0" marL="0">
               <a:lnSpc>
-                <a:spcPts val="1700"/>
+                <a:spcPts val="1500"/>
               </a:lnSpc>
               <a:buNone/>
             </a:pPr>
             <a:r>
-              <a:rPr lang="en-US" sz="1250" dirty="0">
+              <a:rPr lang="en-US" sz="1200" dirty="0">
                 <a:solidFill>
                   <a:srgbClr val="55606E"/>
                 </a:solidFill>
@@ -9459,9 +9592,9 @@
                 <a:ea typeface="Calibri" pitchFamily="34" charset="-122"/>
                 <a:cs typeface="Calibri" pitchFamily="34" charset="-120"/>
               </a:rPr>
-              <a:t>1 GB/s = 8 Gb/s. Uma interface de 6 Gb/s nunca entrega 6 GB/s.</a:t>
+              <a:t>1 GB/s equivale a 8 Gb/s, de modo que uma interface de 6 Gb/s nunca entrega 6 GB/s.</a:t>
             </a:r>
-            <a:endParaRPr lang="en-US" sz="1250" dirty="0"/>
+            <a:endParaRPr lang="en-US" sz="1200" dirty="0"/>
           </a:p>
         </p:txBody>
       </p:sp>
@@ -9473,8 +9606,8 @@
         </p:nvSpPr>
         <p:spPr>
           <a:xfrm>
-            <a:off x="8522208" y="1792224"/>
-            <a:ext cx="2926080" cy="685800"/>
+            <a:off x="8522208" y="1773936"/>
+            <a:ext cx="2926080" cy="777240"/>
           </a:xfrm>
           <a:prstGeom prst="rect">
             <a:avLst/>
@@ -9488,12 +9621,12 @@
           <a:p>
             <a:pPr indent="0" marL="0">
               <a:lnSpc>
-                <a:spcPts val="1700"/>
+                <a:spcPts val="1500"/>
               </a:lnSpc>
               <a:buNone/>
             </a:pPr>
             <a:r>
-              <a:rPr lang="en-US" sz="1250" i="1" dirty="0">
+              <a:rPr lang="en-US" sz="1150" i="1" dirty="0">
                 <a:solidFill>
                   <a:srgbClr val="2A78D6"/>
                 </a:solidFill>
@@ -9501,9 +9634,9 @@
                 <a:ea typeface="Calibri" pitchFamily="34" charset="-122"/>
                 <a:cs typeface="Calibri" pitchFamily="34" charset="-120"/>
               </a:rPr>
-              <a:t>O próprio Silberschatz escorrega aqui (§12.2).</a:t>
+              <a:t>O próprio Silberschatz escorrega na §12.2, e a frase seguinte do livro usa a unidade certa para o SAS-3.</a:t>
             </a:r>
-            <a:endParaRPr lang="en-US" sz="1250" dirty="0"/>
+            <a:endParaRPr lang="en-US" sz="1150" dirty="0"/>
           </a:p>
         </p:txBody>
       </p:sp>
@@ -9645,8 +9778,8 @@
         </p:nvSpPr>
         <p:spPr>
           <a:xfrm>
-            <a:off x="4133088" y="2962656"/>
-            <a:ext cx="4206240" cy="685800"/>
+            <a:off x="4133088" y="2944368"/>
+            <a:ext cx="4206240" cy="777240"/>
           </a:xfrm>
           <a:prstGeom prst="rect">
             <a:avLst/>
@@ -9660,12 +9793,12 @@
           <a:p>
             <a:pPr indent="0" marL="0">
               <a:lnSpc>
-                <a:spcPts val="1700"/>
+                <a:spcPts val="1500"/>
               </a:lnSpc>
               <a:buNone/>
             </a:pPr>
             <a:r>
-              <a:rPr lang="en-US" sz="1250" dirty="0">
+              <a:rPr lang="en-US" sz="1200" dirty="0">
                 <a:solidFill>
                   <a:srgbClr val="55606E"/>
                 </a:solidFill>
@@ -9673,9 +9806,9 @@
                 <a:ea typeface="Calibri" pitchFamily="34" charset="-122"/>
                 <a:cs typeface="Calibri" pitchFamily="34" charset="-120"/>
               </a:rPr>
-              <a:t>Bits de controle para balanceamento DC e recuperação de clock.</a:t>
+              <a:t>Todo enlace serial insere bits de controle para manter o balanceamento DC e recuperar o relógio do próprio fluxo.</a:t>
             </a:r>
-            <a:endParaRPr lang="en-US" sz="1250" dirty="0"/>
+            <a:endParaRPr lang="en-US" sz="1200" dirty="0"/>
           </a:p>
         </p:txBody>
       </p:sp>
@@ -9687,8 +9820,8 @@
         </p:nvSpPr>
         <p:spPr>
           <a:xfrm>
-            <a:off x="8522208" y="2962656"/>
-            <a:ext cx="2926080" cy="685800"/>
+            <a:off x="8522208" y="2944368"/>
+            <a:ext cx="2926080" cy="777240"/>
           </a:xfrm>
           <a:prstGeom prst="rect">
             <a:avLst/>
@@ -9702,12 +9835,12 @@
           <a:p>
             <a:pPr indent="0" marL="0">
               <a:lnSpc>
-                <a:spcPts val="1700"/>
+                <a:spcPts val="1500"/>
               </a:lnSpc>
               <a:buNone/>
             </a:pPr>
             <a:r>
-              <a:rPr lang="en-US" sz="1250" i="1" dirty="0">
+              <a:rPr lang="en-US" sz="1150" i="1" dirty="0">
                 <a:solidFill>
                   <a:srgbClr val="2A78D6"/>
                 </a:solidFill>
@@ -9715,9 +9848,9 @@
                 <a:ea typeface="Calibri" pitchFamily="34" charset="-122"/>
                 <a:cs typeface="Calibri" pitchFamily="34" charset="-120"/>
               </a:rPr>
-              <a:t>8b/10b custa 25%; 128b/130b custa 1,6%.</a:t>
+              <a:t>O 8b/10b custa 25% de overhead, o 128b/130b custa 1,6% e o SAS-4 custa 17,2%.</a:t>
             </a:r>
-            <a:endParaRPr lang="en-US" sz="1250" dirty="0"/>
+            <a:endParaRPr lang="en-US" sz="1150" dirty="0"/>
           </a:p>
         </p:txBody>
       </p:sp>
@@ -9859,8 +9992,8 @@
         </p:nvSpPr>
         <p:spPr>
           <a:xfrm>
-            <a:off x="4133088" y="4133088"/>
-            <a:ext cx="4206240" cy="685800"/>
+            <a:off x="4133088" y="4114800"/>
+            <a:ext cx="4206240" cy="777240"/>
           </a:xfrm>
           <a:prstGeom prst="rect">
             <a:avLst/>
@@ -9874,12 +10007,12 @@
           <a:p>
             <a:pPr indent="0" marL="0">
               <a:lnSpc>
-                <a:spcPts val="1700"/>
+                <a:spcPts val="1500"/>
               </a:lnSpc>
               <a:buNone/>
             </a:pPr>
             <a:r>
-              <a:rPr lang="en-US" sz="1250" dirty="0">
+              <a:rPr lang="en-US" sz="1200" dirty="0">
                 <a:solidFill>
                   <a:srgbClr val="55606E"/>
                 </a:solidFill>
@@ -9887,9 +10020,9 @@
                 <a:ea typeface="Calibri" pitchFamily="34" charset="-122"/>
                 <a:cs typeface="Calibri" pitchFamily="34" charset="-120"/>
               </a:rPr>
-              <a:t>NRZ = 1 bit/símbolo. PAM4 = 2 bits/símbolo, com FEC obrigatório.</a:t>
+              <a:t>O NRZ transmite 1 bit por símbolo e o PAM4 transmite 2, ao custo de reduzir a margem de ruído a um terço e exigir FEC.</a:t>
             </a:r>
-            <a:endParaRPr lang="en-US" sz="1250" dirty="0"/>
+            <a:endParaRPr lang="en-US" sz="1200" dirty="0"/>
           </a:p>
         </p:txBody>
       </p:sp>
@@ -9901,8 +10034,8 @@
         </p:nvSpPr>
         <p:spPr>
           <a:xfrm>
-            <a:off x="8522208" y="4133088"/>
-            <a:ext cx="2926080" cy="685800"/>
+            <a:off x="8522208" y="4114800"/>
+            <a:ext cx="2926080" cy="777240"/>
           </a:xfrm>
           <a:prstGeom prst="rect">
             <a:avLst/>
@@ -9916,12 +10049,12 @@
           <a:p>
             <a:pPr indent="0" marL="0">
               <a:lnSpc>
-                <a:spcPts val="1700"/>
+                <a:spcPts val="1500"/>
               </a:lnSpc>
               <a:buNone/>
             </a:pPr>
             <a:r>
-              <a:rPr lang="en-US" sz="1250" i="1" dirty="0">
+              <a:rPr lang="en-US" sz="1150" i="1" dirty="0">
                 <a:solidFill>
                   <a:srgbClr val="2A78D6"/>
                 </a:solidFill>
@@ -9929,9 +10062,9 @@
                 <a:ea typeface="Calibri" pitchFamily="34" charset="-122"/>
                 <a:cs typeface="Calibri" pitchFamily="34" charset="-120"/>
               </a:rPr>
-              <a:t>PAM4 está em FC 64G, IB HDR+, PCIe 6.0.</a:t>
+              <a:t>O PAM4 está em FC 64/128GFC, InfiniBand HDR/NDR/XDR e PCIe 6.0/7.0; o USB4 v2.0 usa PAM3.</a:t>
             </a:r>
-            <a:endParaRPr lang="en-US" sz="1250" dirty="0"/>
+            <a:endParaRPr lang="en-US" sz="1150" dirty="0"/>
           </a:p>
         </p:txBody>
       </p:sp>
@@ -9943,12 +10076,12 @@
         </p:nvSpPr>
         <p:spPr>
           <a:xfrm>
-            <a:off x="658368" y="5230368"/>
-            <a:ext cx="10874959" cy="960120"/>
+            <a:off x="658368" y="5138928"/>
+            <a:ext cx="10874959" cy="749808"/>
           </a:xfrm>
           <a:prstGeom prst="roundRect">
             <a:avLst>
-              <a:gd name="adj" fmla="val 5714"/>
+              <a:gd name="adj" fmla="val 7317"/>
             </a:avLst>
           </a:prstGeom>
           <a:solidFill>
@@ -9970,8 +10103,8 @@
         </p:nvSpPr>
         <p:spPr>
           <a:xfrm>
-            <a:off x="1024128" y="5486400"/>
-            <a:ext cx="10607040" cy="457200"/>
+            <a:off x="1024128" y="5340096"/>
+            <a:ext cx="10607040" cy="365760"/>
           </a:xfrm>
           <a:prstGeom prst="rect">
             <a:avLst/>
@@ -9987,7 +10120,7 @@
               <a:buNone/>
             </a:pPr>
             <a:r>
-              <a:rPr lang="en-US" sz="1300" dirty="0">
+              <a:rPr lang="en-US" sz="1250" dirty="0">
                 <a:solidFill>
                   <a:srgbClr val="FFFFFF"/>
                 </a:solidFill>
@@ -9995,15 +10128,57 @@
                 <a:ea typeface="Courier New" pitchFamily="34" charset="-122"/>
                 <a:cs typeface="Courier New" pitchFamily="34" charset="-120"/>
               </a:rPr>
-              <a:t>SATA 3.0:  6,0 Gb/s bruto × 8/10 = 4,8 Gb/s úteis ÷ 8 = 600 MB/s          ·          PCIe 5.0 ×4:  32 GT/s × 4 lanes × 128/130 ÷ 8 = 15,754 GB/s</a:t>
+              <a:t>SATA 3.0:  6,0 Gb/s × 8/10 ÷ 8 = 600 MB/s            PCIe 5.0 ×4:  32 GT/s × 4 × 128/130 ÷ 8 = 15,754 GB/s</a:t>
             </a:r>
-            <a:endParaRPr lang="en-US" sz="1300" dirty="0"/>
+            <a:endParaRPr lang="en-US" sz="1250" dirty="0"/>
           </a:p>
         </p:txBody>
       </p:sp>
       <p:sp>
         <p:nvSpPr>
           <p:cNvPr id="24" name="Text 22"/>
+          <p:cNvSpPr txBox="1"/>
+          <p:nvPr/>
+        </p:nvSpPr>
+        <p:spPr>
+          <a:xfrm>
+            <a:off x="658368" y="5961888"/>
+            <a:ext cx="10874959" cy="310896"/>
+          </a:xfrm>
+          <a:prstGeom prst="rect">
+            <a:avLst/>
+          </a:prstGeom>
+          <a:noFill/>
+          <a:ln/>
+        </p:spPr>
+        <p:txBody>
+          <a:bodyPr wrap="square" lIns="0" tIns="0" rIns="0" bIns="0" rtlCol="0" anchor="ctr"/>
+          <a:lstStyle/>
+          <a:p>
+            <a:pPr indent="0" marL="0">
+              <a:lnSpc>
+                <a:spcPts val="1200"/>
+              </a:lnSpc>
+              <a:buNone/>
+            </a:pPr>
+            <a:r>
+              <a:rPr lang="en-US" sz="950" i="1" dirty="0">
+                <a:solidFill>
+                  <a:srgbClr val="55606E"/>
+                </a:solidFill>
+                <a:latin typeface="Calibri" pitchFamily="34" charset="0"/>
+                <a:ea typeface="Calibri" pitchFamily="34" charset="-122"/>
+                <a:cs typeface="Calibri" pitchFamily="34" charset="-120"/>
+              </a:rPr>
+              <a:t>Fonte: Seção 4.1 do relatório, que traz a tabela completa das sete codificações com eficiência, overhead e onde cada uma é usada. A base do overhead é bits acrescentados ÷ bits de carga útil, e sobre o quadro total os percentuais seriam menores.</a:t>
+            </a:r>
+            <a:endParaRPr lang="en-US" sz="950" dirty="0"/>
+          </a:p>
+        </p:txBody>
+      </p:sp>
+      <p:sp>
+        <p:nvSpPr>
+          <p:cNvPr id="25" name="Text 23"/>
           <p:cNvSpPr txBox="1"/>
           <p:nvPr/>
         </p:nvSpPr>
@@ -10105,7 +10280,7 @@
                 <a:ea typeface="Calibri" pitchFamily="34" charset="-122"/>
                 <a:cs typeface="Calibri" pitchFamily="34" charset="-120"/>
               </a:rPr>
-              <a:t>3. INTERFACES</a:t>
+              <a:t>3. INTERFACES · EXTRATO DA SEÇÃO 4.2</a:t>
             </a:r>
             <a:endParaRPr lang="en-US" sz="1100" dirty="0"/>
           </a:p>
@@ -10165,7 +10340,7 @@
           </p:nvPr>
         </p:nvGraphicFramePr>
         <p:xfrm>
-          <a:off x="658368" y="1691640"/>
+          <a:off x="658368" y="1627632"/>
           <a:ext cx="10874959" cy="914400"/>
         </p:xfrm>
         <a:graphic>
@@ -10173,13 +10348,14 @@
             <a:tbl>
               <a:tblPr/>
               <a:tblGrid>
-                <a:gridCol w="2377440"/>
-                <a:gridCol w="1874520"/>
-                <a:gridCol w="2286000"/>
-                <a:gridCol w="2103120"/>
-                <a:gridCol w="2233879"/>
+                <a:gridCol w="1874993"/>
+                <a:gridCol w="1476058"/>
+                <a:gridCol w="1755313"/>
+                <a:gridCol w="1635632"/>
+                <a:gridCol w="1476058"/>
+                <a:gridCol w="2656905"/>
               </a:tblGrid>
-              <a:tr h="393192">
+              <a:tr h="329184">
                 <a:tc>
                   <a:txBody>
                     <a:bodyPr/>
@@ -10206,7 +10382,7 @@
                       </a:endParaRPr>
                     </a:p>
                   </a:txBody>
-                  <a:tcPr marL="45720" marR="45720" marT="45720" marB="45720" anchor="ctr">
+                  <a:tcPr marL="36576" marR="36576" marT="36576" marB="36576" anchor="ctr">
                     <a:lnL w="7620" cap="flat" cmpd="sng" algn="ctr">
                       <a:solidFill>
                         <a:srgbClr val="DFE3E8"/>
@@ -10274,7 +10450,7 @@
                       </a:endParaRPr>
                     </a:p>
                   </a:txBody>
-                  <a:tcPr marL="45720" marR="45720" marT="45720" marB="45720" anchor="ctr">
+                  <a:tcPr marL="36576" marR="36576" marT="36576" marB="36576" anchor="ctr">
                     <a:lnL w="7620" cap="flat" cmpd="sng" algn="ctr">
                       <a:solidFill>
                         <a:srgbClr val="DFE3E8"/>
@@ -10342,7 +10518,7 @@
                       </a:endParaRPr>
                     </a:p>
                   </a:txBody>
-                  <a:tcPr marL="45720" marR="45720" marT="45720" marB="45720" anchor="ctr">
+                  <a:tcPr marL="36576" marR="36576" marT="36576" marB="36576" anchor="ctr">
                     <a:lnL w="7620" cap="flat" cmpd="sng" algn="ctr">
                       <a:solidFill>
                         <a:srgbClr val="DFE3E8"/>
@@ -10401,7 +10577,7 @@
                           <a:ea typeface="Calibri" pitchFamily="34" charset="-122"/>
                           <a:cs typeface="Calibri" pitchFamily="34" charset="-120"/>
                         </a:rPr>
-                        <a:t>Alcance / meio</a:t>
+                        <a:t>Latência típica</a:t>
                       </a:r>
                       <a:endParaRPr lang="en-US" sz="1150" dirty="0">
                         <a:latin typeface="Calibri" charset="0"/>
@@ -10410,7 +10586,7 @@
                       </a:endParaRPr>
                     </a:p>
                   </a:txBody>
-                  <a:tcPr marL="45720" marR="45720" marT="45720" marB="45720" anchor="ctr">
+                  <a:tcPr marL="36576" marR="36576" marT="36576" marB="36576" anchor="ctr">
                     <a:lnL w="7620" cap="flat" cmpd="sng" algn="ctr">
                       <a:solidFill>
                         <a:srgbClr val="DFE3E8"/>
@@ -10469,7 +10645,7 @@
                           <a:ea typeface="Calibri" pitchFamily="34" charset="-122"/>
                           <a:cs typeface="Calibri" pitchFamily="34" charset="-120"/>
                         </a:rPr>
-                        <a:t>Uso / limite</a:t>
+                        <a:t>Alcance</a:t>
                       </a:r>
                       <a:endParaRPr lang="en-US" sz="1150" dirty="0">
                         <a:latin typeface="Calibri" charset="0"/>
@@ -10478,7 +10654,7 @@
                       </a:endParaRPr>
                     </a:p>
                   </a:txBody>
-                  <a:tcPr marL="45720" marR="45720" marT="45720" marB="45720" anchor="ctr">
+                  <a:tcPr marL="36576" marR="36576" marT="36576" marB="36576" anchor="ctr">
                     <a:lnL w="7620" cap="flat" cmpd="sng" algn="ctr">
                       <a:solidFill>
                         <a:srgbClr val="DFE3E8"/>
@@ -10520,8 +10696,6 @@
                     </a:solidFill>
                   </a:tcPr>
                 </a:tc>
-              </a:tr>
-              <a:tr h="393192">
                 <a:tc>
                   <a:txBody>
                     <a:bodyPr/>
@@ -10531,7 +10705,77 @@
                         <a:buNone/>
                       </a:pPr>
                       <a:r>
-                        <a:rPr lang="en-US" sz="1200" dirty="0">
+                        <a:rPr lang="en-US" sz="1150" b="1" dirty="0">
+                          <a:solidFill>
+                            <a:srgbClr val="FFFFFF"/>
+                          </a:solidFill>
+                          <a:latin typeface="Calibri" pitchFamily="34" charset="0"/>
+                          <a:ea typeface="Calibri" pitchFamily="34" charset="-122"/>
+                          <a:cs typeface="Calibri" pitchFamily="34" charset="-120"/>
+                        </a:rPr>
+                        <a:t>Uso típico em SBD</a:t>
+                      </a:r>
+                      <a:endParaRPr lang="en-US" sz="1150" dirty="0">
+                        <a:latin typeface="Calibri" charset="0"/>
+                        <a:ea typeface="Calibri" charset="0"/>
+                        <a:cs typeface="Calibri" charset="0"/>
+                      </a:endParaRPr>
+                    </a:p>
+                  </a:txBody>
+                  <a:tcPr marL="36576" marR="36576" marT="36576" marB="36576" anchor="ctr">
+                    <a:lnL w="7620" cap="flat" cmpd="sng" algn="ctr">
+                      <a:solidFill>
+                        <a:srgbClr val="DFE3E8"/>
+                      </a:solidFill>
+                      <a:prstDash val="solid"/>
+                      <a:round/>
+                      <a:headEnd type="none" w="med" len="med"/>
+                      <a:tailEnd type="none" w="med" len="med"/>
+                    </a:lnL>
+                    <a:lnR w="7620" cap="flat" cmpd="sng" algn="ctr">
+                      <a:solidFill>
+                        <a:srgbClr val="DFE3E8"/>
+                      </a:solidFill>
+                      <a:prstDash val="solid"/>
+                      <a:round/>
+                      <a:headEnd type="none" w="med" len="med"/>
+                      <a:tailEnd type="none" w="med" len="med"/>
+                    </a:lnR>
+                    <a:lnT w="7620" cap="flat" cmpd="sng" algn="ctr">
+                      <a:solidFill>
+                        <a:srgbClr val="DFE3E8"/>
+                      </a:solidFill>
+                      <a:prstDash val="solid"/>
+                      <a:round/>
+                      <a:headEnd type="none" w="med" len="med"/>
+                      <a:tailEnd type="none" w="med" len="med"/>
+                    </a:lnT>
+                    <a:lnB w="7620" cap="flat" cmpd="sng" algn="ctr">
+                      <a:solidFill>
+                        <a:srgbClr val="DFE3E8"/>
+                      </a:solidFill>
+                      <a:prstDash val="solid"/>
+                      <a:round/>
+                      <a:headEnd type="none" w="med" len="med"/>
+                      <a:tailEnd type="none" w="med" len="med"/>
+                    </a:lnB>
+                    <a:solidFill>
+                      <a:srgbClr val="232A35"/>
+                    </a:solidFill>
+                  </a:tcPr>
+                </a:tc>
+              </a:tr>
+              <a:tr h="329184">
+                <a:tc>
+                  <a:txBody>
+                    <a:bodyPr/>
+                    <a:lstStyle/>
+                    <a:p>
+                      <a:pPr algn="l" indent="0" marL="0">
+                        <a:buNone/>
+                      </a:pPr>
+                      <a:r>
+                        <a:rPr lang="en-US" sz="1100" dirty="0">
                           <a:solidFill>
                             <a:srgbClr val="14181F"/>
                           </a:solidFill>
@@ -10541,14 +10785,14 @@
                         </a:rPr>
                         <a:t>USB 3.2 Gen 2×2</a:t>
                       </a:r>
-                      <a:endParaRPr lang="en-US" sz="1200" dirty="0">
+                      <a:endParaRPr lang="en-US" sz="1100" dirty="0">
                         <a:latin typeface="Calibri" charset="0"/>
                         <a:ea typeface="Calibri" charset="0"/>
                         <a:cs typeface="Calibri" charset="0"/>
                       </a:endParaRPr>
                     </a:p>
                   </a:txBody>
-                  <a:tcPr marL="45720" marR="45720" marT="45720" marB="45720" anchor="ctr">
+                  <a:tcPr marL="36576" marR="36576" marT="36576" marB="36576" anchor="ctr">
                     <a:lnL w="7620" cap="flat" cmpd="sng" algn="ctr">
                       <a:solidFill>
                         <a:srgbClr val="DFE3E8"/>
@@ -10596,7 +10840,7 @@
                         <a:buNone/>
                       </a:pPr>
                       <a:r>
-                        <a:rPr lang="en-US" sz="1200" dirty="0">
+                        <a:rPr lang="en-US" sz="1100" dirty="0">
                           <a:solidFill>
                             <a:srgbClr val="14181F"/>
                           </a:solidFill>
@@ -10606,14 +10850,14 @@
                         </a:rPr>
                         <a:t>Serial</a:t>
                       </a:r>
-                      <a:endParaRPr lang="en-US" sz="1200" dirty="0">
+                      <a:endParaRPr lang="en-US" sz="1100" dirty="0">
                         <a:latin typeface="Calibri" charset="0"/>
                         <a:ea typeface="Calibri" charset="0"/>
                         <a:cs typeface="Calibri" charset="0"/>
                       </a:endParaRPr>
                     </a:p>
                   </a:txBody>
-                  <a:tcPr marL="45720" marR="45720" marT="45720" marB="45720" anchor="ctr">
+                  <a:tcPr marL="36576" marR="36576" marT="36576" marB="36576" anchor="ctr">
                     <a:lnL w="7620" cap="flat" cmpd="sng" algn="ctr">
                       <a:solidFill>
                         <a:srgbClr val="DFE3E8"/>
@@ -10661,7 +10905,7 @@
                         <a:buNone/>
                       </a:pPr>
                       <a:r>
-                        <a:rPr lang="en-US" sz="1200" dirty="0">
+                        <a:rPr lang="en-US" sz="1100" dirty="0">
                           <a:solidFill>
                             <a:srgbClr val="14181F"/>
                           </a:solidFill>
@@ -10671,14 +10915,14 @@
                         </a:rPr>
                         <a:t>2.424 MB/s</a:t>
                       </a:r>
-                      <a:endParaRPr lang="en-US" sz="1200" dirty="0">
+                      <a:endParaRPr lang="en-US" sz="1100" dirty="0">
                         <a:latin typeface="Calibri" charset="0"/>
                         <a:ea typeface="Calibri" charset="0"/>
                         <a:cs typeface="Calibri" charset="0"/>
                       </a:endParaRPr>
                     </a:p>
                   </a:txBody>
-                  <a:tcPr marL="45720" marR="45720" marT="45720" marB="45720" anchor="ctr">
+                  <a:tcPr marL="36576" marR="36576" marT="36576" marB="36576" anchor="ctr">
                     <a:lnL w="7620" cap="flat" cmpd="sng" algn="ctr">
                       <a:solidFill>
                         <a:srgbClr val="DFE3E8"/>
@@ -10726,7 +10970,7 @@
                         <a:buNone/>
                       </a:pPr>
                       <a:r>
-                        <a:rPr lang="en-US" sz="1200" dirty="0">
+                        <a:rPr lang="en-US" sz="1100" dirty="0">
                           <a:solidFill>
                             <a:srgbClr val="14181F"/>
                           </a:solidFill>
@@ -10734,16 +10978,16 @@
                           <a:ea typeface="Calibri" pitchFamily="34" charset="-122"/>
                           <a:cs typeface="Calibri" pitchFamily="34" charset="-120"/>
                         </a:rPr>
-                        <a:t>Cabo certificado</a:t>
+                        <a:t>≈100 µs ∗</a:t>
                       </a:r>
-                      <a:endParaRPr lang="en-US" sz="1200" dirty="0">
+                      <a:endParaRPr lang="en-US" sz="1100" dirty="0">
                         <a:latin typeface="Calibri" charset="0"/>
                         <a:ea typeface="Calibri" charset="0"/>
                         <a:cs typeface="Calibri" charset="0"/>
                       </a:endParaRPr>
                     </a:p>
                   </a:txBody>
-                  <a:tcPr marL="45720" marR="45720" marT="45720" marB="45720" anchor="ctr">
+                  <a:tcPr marL="36576" marR="36576" marT="36576" marB="36576" anchor="ctr">
                     <a:lnL w="7620" cap="flat" cmpd="sng" algn="ctr">
                       <a:solidFill>
                         <a:srgbClr val="DFE3E8"/>
@@ -10791,7 +11035,7 @@
                         <a:buNone/>
                       </a:pPr>
                       <a:r>
-                        <a:rPr lang="en-US" sz="1200" dirty="0">
+                        <a:rPr lang="en-US" sz="1100" dirty="0">
                           <a:solidFill>
                             <a:srgbClr val="14181F"/>
                           </a:solidFill>
@@ -10799,83 +11043,16 @@
                           <a:ea typeface="Calibri" pitchFamily="34" charset="-122"/>
                           <a:cs typeface="Calibri" pitchFamily="34" charset="-120"/>
                         </a:rPr>
-                        <a:t>Backup externo</a:t>
+                        <a:t>1 m</a:t>
                       </a:r>
-                      <a:endParaRPr lang="en-US" sz="1200" dirty="0">
+                      <a:endParaRPr lang="en-US" sz="1100" dirty="0">
                         <a:latin typeface="Calibri" charset="0"/>
                         <a:ea typeface="Calibri" charset="0"/>
                         <a:cs typeface="Calibri" charset="0"/>
                       </a:endParaRPr>
                     </a:p>
                   </a:txBody>
-                  <a:tcPr marL="45720" marR="45720" marT="45720" marB="45720" anchor="ctr">
-                    <a:lnL w="7620" cap="flat" cmpd="sng" algn="ctr">
-                      <a:solidFill>
-                        <a:srgbClr val="DFE3E8"/>
-                      </a:solidFill>
-                      <a:prstDash val="solid"/>
-                      <a:round/>
-                      <a:headEnd type="none" w="med" len="med"/>
-                      <a:tailEnd type="none" w="med" len="med"/>
-                    </a:lnL>
-                    <a:lnR w="7620" cap="flat" cmpd="sng" algn="ctr">
-                      <a:solidFill>
-                        <a:srgbClr val="DFE3E8"/>
-                      </a:solidFill>
-                      <a:prstDash val="solid"/>
-                      <a:round/>
-                      <a:headEnd type="none" w="med" len="med"/>
-                      <a:tailEnd type="none" w="med" len="med"/>
-                    </a:lnR>
-                    <a:lnT w="7620" cap="flat" cmpd="sng" algn="ctr">
-                      <a:solidFill>
-                        <a:srgbClr val="DFE3E8"/>
-                      </a:solidFill>
-                      <a:prstDash val="solid"/>
-                      <a:round/>
-                      <a:headEnd type="none" w="med" len="med"/>
-                      <a:tailEnd type="none" w="med" len="med"/>
-                    </a:lnT>
-                    <a:lnB w="7620" cap="flat" cmpd="sng" algn="ctr">
-                      <a:solidFill>
-                        <a:srgbClr val="DFE3E8"/>
-                      </a:solidFill>
-                      <a:prstDash val="solid"/>
-                      <a:round/>
-                      <a:headEnd type="none" w="med" len="med"/>
-                      <a:tailEnd type="none" w="med" len="med"/>
-                    </a:lnB>
-                  </a:tcPr>
-                </a:tc>
-              </a:tr>
-              <a:tr h="393192">
-                <a:tc>
-                  <a:txBody>
-                    <a:bodyPr/>
-                    <a:lstStyle/>
-                    <a:p>
-                      <a:pPr algn="l" indent="0" marL="0">
-                        <a:buNone/>
-                      </a:pPr>
-                      <a:r>
-                        <a:rPr lang="en-US" sz="1200" dirty="0">
-                          <a:solidFill>
-                            <a:srgbClr val="14181F"/>
-                          </a:solidFill>
-                          <a:latin typeface="Calibri" pitchFamily="34" charset="0"/>
-                          <a:ea typeface="Calibri" pitchFamily="34" charset="-122"/>
-                          <a:cs typeface="Calibri" pitchFamily="34" charset="-120"/>
-                        </a:rPr>
-                        <a:t>Ultra-320 SCSI</a:t>
-                      </a:r>
-                      <a:endParaRPr lang="en-US" sz="1200" dirty="0">
-                        <a:latin typeface="Calibri" charset="0"/>
-                        <a:ea typeface="Calibri" charset="0"/>
-                        <a:cs typeface="Calibri" charset="0"/>
-                      </a:endParaRPr>
-                    </a:p>
-                  </a:txBody>
-                  <a:tcPr marL="45720" marR="45720" marT="45720" marB="45720" anchor="ctr">
+                  <a:tcPr marL="36576" marR="36576" marT="36576" marB="36576" anchor="ctr">
                     <a:lnL w="7620" cap="flat" cmpd="sng" algn="ctr">
                       <a:solidFill>
                         <a:srgbClr val="DFE3E8"/>
@@ -10923,7 +11100,7 @@
                         <a:buNone/>
                       </a:pPr>
                       <a:r>
-                        <a:rPr lang="en-US" sz="1200" dirty="0">
+                        <a:rPr lang="en-US" sz="1100" dirty="0">
                           <a:solidFill>
                             <a:srgbClr val="14181F"/>
                           </a:solidFill>
@@ -10931,16 +11108,83 @@
                           <a:ea typeface="Calibri" pitchFamily="34" charset="-122"/>
                           <a:cs typeface="Calibri" pitchFamily="34" charset="-120"/>
                         </a:rPr>
-                        <a:t>Paralelo</a:t>
+                        <a:t>Backup externo</a:t>
                       </a:r>
-                      <a:endParaRPr lang="en-US" sz="1200" dirty="0">
+                      <a:endParaRPr lang="en-US" sz="1100" dirty="0">
                         <a:latin typeface="Calibri" charset="0"/>
                         <a:ea typeface="Calibri" charset="0"/>
                         <a:cs typeface="Calibri" charset="0"/>
                       </a:endParaRPr>
                     </a:p>
                   </a:txBody>
-                  <a:tcPr marL="45720" marR="45720" marT="45720" marB="45720" anchor="ctr">
+                  <a:tcPr marL="36576" marR="36576" marT="36576" marB="36576" anchor="ctr">
+                    <a:lnL w="7620" cap="flat" cmpd="sng" algn="ctr">
+                      <a:solidFill>
+                        <a:srgbClr val="DFE3E8"/>
+                      </a:solidFill>
+                      <a:prstDash val="solid"/>
+                      <a:round/>
+                      <a:headEnd type="none" w="med" len="med"/>
+                      <a:tailEnd type="none" w="med" len="med"/>
+                    </a:lnL>
+                    <a:lnR w="7620" cap="flat" cmpd="sng" algn="ctr">
+                      <a:solidFill>
+                        <a:srgbClr val="DFE3E8"/>
+                      </a:solidFill>
+                      <a:prstDash val="solid"/>
+                      <a:round/>
+                      <a:headEnd type="none" w="med" len="med"/>
+                      <a:tailEnd type="none" w="med" len="med"/>
+                    </a:lnR>
+                    <a:lnT w="7620" cap="flat" cmpd="sng" algn="ctr">
+                      <a:solidFill>
+                        <a:srgbClr val="DFE3E8"/>
+                      </a:solidFill>
+                      <a:prstDash val="solid"/>
+                      <a:round/>
+                      <a:headEnd type="none" w="med" len="med"/>
+                      <a:tailEnd type="none" w="med" len="med"/>
+                    </a:lnT>
+                    <a:lnB w="7620" cap="flat" cmpd="sng" algn="ctr">
+                      <a:solidFill>
+                        <a:srgbClr val="DFE3E8"/>
+                      </a:solidFill>
+                      <a:prstDash val="solid"/>
+                      <a:round/>
+                      <a:headEnd type="none" w="med" len="med"/>
+                      <a:tailEnd type="none" w="med" len="med"/>
+                    </a:lnB>
+                  </a:tcPr>
+                </a:tc>
+              </a:tr>
+              <a:tr h="329184">
+                <a:tc>
+                  <a:txBody>
+                    <a:bodyPr/>
+                    <a:lstStyle/>
+                    <a:p>
+                      <a:pPr algn="l" indent="0" marL="0">
+                        <a:buNone/>
+                      </a:pPr>
+                      <a:r>
+                        <a:rPr lang="en-US" sz="1100" dirty="0">
+                          <a:solidFill>
+                            <a:srgbClr val="14181F"/>
+                          </a:solidFill>
+                          <a:latin typeface="Calibri" pitchFamily="34" charset="0"/>
+                          <a:ea typeface="Calibri" pitchFamily="34" charset="-122"/>
+                          <a:cs typeface="Calibri" pitchFamily="34" charset="-120"/>
+                        </a:rPr>
+                        <a:t>Ultra-320 SCSI</a:t>
+                      </a:r>
+                      <a:endParaRPr lang="en-US" sz="1100" dirty="0">
+                        <a:latin typeface="Calibri" charset="0"/>
+                        <a:ea typeface="Calibri" charset="0"/>
+                        <a:cs typeface="Calibri" charset="0"/>
+                      </a:endParaRPr>
+                    </a:p>
+                  </a:txBody>
+                  <a:tcPr marL="36576" marR="36576" marT="36576" marB="36576" anchor="ctr">
                     <a:lnL w="7620" cap="flat" cmpd="sng" algn="ctr">
                       <a:solidFill>
                         <a:srgbClr val="DFE3E8"/>
@@ -10988,7 +11232,7 @@
                         <a:buNone/>
                       </a:pPr>
                       <a:r>
-                        <a:rPr lang="en-US" sz="1200" dirty="0">
+                        <a:rPr lang="en-US" sz="1100" dirty="0">
                           <a:solidFill>
                             <a:srgbClr val="14181F"/>
                           </a:solidFill>
@@ -10996,16 +11240,16 @@
                           <a:ea typeface="Calibri" pitchFamily="34" charset="-122"/>
                           <a:cs typeface="Calibri" pitchFamily="34" charset="-120"/>
                         </a:rPr>
-                        <a:t>320 MB/s</a:t>
+                        <a:t>Paralela</a:t>
                       </a:r>
-                      <a:endParaRPr lang="en-US" sz="1200" dirty="0">
+                      <a:endParaRPr lang="en-US" sz="1100" dirty="0">
                         <a:latin typeface="Calibri" charset="0"/>
                         <a:ea typeface="Calibri" charset="0"/>
                         <a:cs typeface="Calibri" charset="0"/>
                       </a:endParaRPr>
                     </a:p>
                   </a:txBody>
-                  <a:tcPr marL="45720" marR="45720" marT="45720" marB="45720" anchor="ctr">
+                  <a:tcPr marL="36576" marR="36576" marT="36576" marB="36576" anchor="ctr">
                     <a:lnL w="7620" cap="flat" cmpd="sng" algn="ctr">
                       <a:solidFill>
                         <a:srgbClr val="DFE3E8"/>
@@ -11053,7 +11297,7 @@
                         <a:buNone/>
                       </a:pPr>
                       <a:r>
-                        <a:rPr lang="en-US" sz="1200" dirty="0">
+                        <a:rPr lang="en-US" sz="1100" dirty="0">
                           <a:solidFill>
                             <a:srgbClr val="14181F"/>
                           </a:solidFill>
@@ -11061,16 +11305,16 @@
                           <a:ea typeface="Calibri" pitchFamily="34" charset="-122"/>
                           <a:cs typeface="Calibri" pitchFamily="34" charset="-120"/>
                         </a:rPr>
-                        <a:t>12 m LVD</a:t>
+                        <a:t>320 MB/s</a:t>
                       </a:r>
-                      <a:endParaRPr lang="en-US" sz="1200" dirty="0">
+                      <a:endParaRPr lang="en-US" sz="1100" dirty="0">
                         <a:latin typeface="Calibri" charset="0"/>
                         <a:ea typeface="Calibri" charset="0"/>
                         <a:cs typeface="Calibri" charset="0"/>
                       </a:endParaRPr>
                     </a:p>
                   </a:txBody>
-                  <a:tcPr marL="45720" marR="45720" marT="45720" marB="45720" anchor="ctr">
+                  <a:tcPr marL="36576" marR="36576" marT="36576" marB="36576" anchor="ctr">
                     <a:lnL w="7620" cap="flat" cmpd="sng" algn="ctr">
                       <a:solidFill>
                         <a:srgbClr val="DFE3E8"/>
@@ -11118,7 +11362,7 @@
                         <a:buNone/>
                       </a:pPr>
                       <a:r>
-                        <a:rPr lang="en-US" sz="1200" dirty="0">
+                        <a:rPr lang="en-US" sz="1100" dirty="0">
                           <a:solidFill>
                             <a:srgbClr val="14181F"/>
                           </a:solidFill>
@@ -11126,83 +11370,16 @@
                           <a:ea typeface="Calibri" pitchFamily="34" charset="-122"/>
                           <a:cs typeface="Calibri" pitchFamily="34" charset="-120"/>
                         </a:rPr>
-                        <a:t>Legado</a:t>
+                        <a:t>ms ∗</a:t>
                       </a:r>
-                      <a:endParaRPr lang="en-US" sz="1200" dirty="0">
+                      <a:endParaRPr lang="en-US" sz="1100" dirty="0">
                         <a:latin typeface="Calibri" charset="0"/>
                         <a:ea typeface="Calibri" charset="0"/>
                         <a:cs typeface="Calibri" charset="0"/>
                       </a:endParaRPr>
                     </a:p>
                   </a:txBody>
-                  <a:tcPr marL="45720" marR="45720" marT="45720" marB="45720" anchor="ctr">
-                    <a:lnL w="7620" cap="flat" cmpd="sng" algn="ctr">
-                      <a:solidFill>
-                        <a:srgbClr val="DFE3E8"/>
-                      </a:solidFill>
-                      <a:prstDash val="solid"/>
-                      <a:round/>
-                      <a:headEnd type="none" w="med" len="med"/>
-                      <a:tailEnd type="none" w="med" len="med"/>
-                    </a:lnL>
-                    <a:lnR w="7620" cap="flat" cmpd="sng" algn="ctr">
-                      <a:solidFill>
-                        <a:srgbClr val="DFE3E8"/>
-                      </a:solidFill>
-                      <a:prstDash val="solid"/>
-                      <a:round/>
-                      <a:headEnd type="none" w="med" len="med"/>
-                      <a:tailEnd type="none" w="med" len="med"/>
-                    </a:lnR>
-                    <a:lnT w="7620" cap="flat" cmpd="sng" algn="ctr">
-                      <a:solidFill>
-                        <a:srgbClr val="DFE3E8"/>
-                      </a:solidFill>
-                      <a:prstDash val="solid"/>
-                      <a:round/>
-                      <a:headEnd type="none" w="med" len="med"/>
-                      <a:tailEnd type="none" w="med" len="med"/>
-                    </a:lnT>
-                    <a:lnB w="7620" cap="flat" cmpd="sng" algn="ctr">
-                      <a:solidFill>
-                        <a:srgbClr val="DFE3E8"/>
-                      </a:solidFill>
-                      <a:prstDash val="solid"/>
-                      <a:round/>
-                      <a:headEnd type="none" w="med" len="med"/>
-                      <a:tailEnd type="none" w="med" len="med"/>
-                    </a:lnB>
-                  </a:tcPr>
-                </a:tc>
-              </a:tr>
-              <a:tr h="393192">
-                <a:tc>
-                  <a:txBody>
-                    <a:bodyPr/>
-                    <a:lstStyle/>
-                    <a:p>
-                      <a:pPr algn="l" indent="0" marL="0">
-                        <a:buNone/>
-                      </a:pPr>
-                      <a:r>
-                        <a:rPr lang="en-US" sz="1200" dirty="0">
-                          <a:solidFill>
-                            <a:srgbClr val="14181F"/>
-                          </a:solidFill>
-                          <a:latin typeface="Calibri" pitchFamily="34" charset="0"/>
-                          <a:ea typeface="Calibri" pitchFamily="34" charset="-122"/>
-                          <a:cs typeface="Calibri" pitchFamily="34" charset="-120"/>
-                        </a:rPr>
-                        <a:t>SATA 3.0</a:t>
-                      </a:r>
-                      <a:endParaRPr lang="en-US" sz="1200" dirty="0">
-                        <a:latin typeface="Calibri" charset="0"/>
-                        <a:ea typeface="Calibri" charset="0"/>
-                        <a:cs typeface="Calibri" charset="0"/>
-                      </a:endParaRPr>
-                    </a:p>
-                  </a:txBody>
-                  <a:tcPr marL="45720" marR="45720" marT="45720" marB="45720" anchor="ctr">
+                  <a:tcPr marL="36576" marR="36576" marT="36576" marB="36576" anchor="ctr">
                     <a:lnL w="7620" cap="flat" cmpd="sng" algn="ctr">
                       <a:solidFill>
                         <a:srgbClr val="DFE3E8"/>
@@ -11250,7 +11427,7 @@
                         <a:buNone/>
                       </a:pPr>
                       <a:r>
-                        <a:rPr lang="en-US" sz="1200" dirty="0">
+                        <a:rPr lang="en-US" sz="1100" dirty="0">
                           <a:solidFill>
                             <a:srgbClr val="14181F"/>
                           </a:solidFill>
@@ -11258,16 +11435,16 @@
                           <a:ea typeface="Calibri" pitchFamily="34" charset="-122"/>
                           <a:cs typeface="Calibri" pitchFamily="34" charset="-120"/>
                         </a:rPr>
-                        <a:t>Serial</a:t>
+                        <a:t>12 m LVD</a:t>
                       </a:r>
-                      <a:endParaRPr lang="en-US" sz="1200" dirty="0">
+                      <a:endParaRPr lang="en-US" sz="1100" dirty="0">
                         <a:latin typeface="Calibri" charset="0"/>
                         <a:ea typeface="Calibri" charset="0"/>
                         <a:cs typeface="Calibri" charset="0"/>
                       </a:endParaRPr>
                     </a:p>
                   </a:txBody>
-                  <a:tcPr marL="45720" marR="45720" marT="45720" marB="45720" anchor="ctr">
+                  <a:tcPr marL="36576" marR="36576" marT="36576" marB="36576" anchor="ctr">
                     <a:lnL w="7620" cap="flat" cmpd="sng" algn="ctr">
                       <a:solidFill>
                         <a:srgbClr val="DFE3E8"/>
@@ -11315,7 +11492,7 @@
                         <a:buNone/>
                       </a:pPr>
                       <a:r>
-                        <a:rPr lang="en-US" sz="1200" dirty="0">
+                        <a:rPr lang="en-US" sz="1100" dirty="0">
                           <a:solidFill>
                             <a:srgbClr val="14181F"/>
                           </a:solidFill>
@@ -11323,16 +11500,83 @@
                           <a:ea typeface="Calibri" pitchFamily="34" charset="-122"/>
                           <a:cs typeface="Calibri" pitchFamily="34" charset="-120"/>
                         </a:rPr>
-                        <a:t>600 MB/s</a:t>
+                        <a:t>Legado</a:t>
                       </a:r>
-                      <a:endParaRPr lang="en-US" sz="1200" dirty="0">
+                      <a:endParaRPr lang="en-US" sz="1100" dirty="0">
                         <a:latin typeface="Calibri" charset="0"/>
                         <a:ea typeface="Calibri" charset="0"/>
                         <a:cs typeface="Calibri" charset="0"/>
                       </a:endParaRPr>
                     </a:p>
                   </a:txBody>
-                  <a:tcPr marL="45720" marR="45720" marT="45720" marB="45720" anchor="ctr">
+                  <a:tcPr marL="36576" marR="36576" marT="36576" marB="36576" anchor="ctr">
+                    <a:lnL w="7620" cap="flat" cmpd="sng" algn="ctr">
+                      <a:solidFill>
+                        <a:srgbClr val="DFE3E8"/>
+                      </a:solidFill>
+                      <a:prstDash val="solid"/>
+                      <a:round/>
+                      <a:headEnd type="none" w="med" len="med"/>
+                      <a:tailEnd type="none" w="med" len="med"/>
+                    </a:lnL>
+                    <a:lnR w="7620" cap="flat" cmpd="sng" algn="ctr">
+                      <a:solidFill>
+                        <a:srgbClr val="DFE3E8"/>
+                      </a:solidFill>
+                      <a:prstDash val="solid"/>
+                      <a:round/>
+                      <a:headEnd type="none" w="med" len="med"/>
+                      <a:tailEnd type="none" w="med" len="med"/>
+                    </a:lnR>
+                    <a:lnT w="7620" cap="flat" cmpd="sng" algn="ctr">
+                      <a:solidFill>
+                        <a:srgbClr val="DFE3E8"/>
+                      </a:solidFill>
+                      <a:prstDash val="solid"/>
+                      <a:round/>
+                      <a:headEnd type="none" w="med" len="med"/>
+                      <a:tailEnd type="none" w="med" len="med"/>
+                    </a:lnT>
+                    <a:lnB w="7620" cap="flat" cmpd="sng" algn="ctr">
+                      <a:solidFill>
+                        <a:srgbClr val="DFE3E8"/>
+                      </a:solidFill>
+                      <a:prstDash val="solid"/>
+                      <a:round/>
+                      <a:headEnd type="none" w="med" len="med"/>
+                      <a:tailEnd type="none" w="med" len="med"/>
+                    </a:lnB>
+                  </a:tcPr>
+                </a:tc>
+              </a:tr>
+              <a:tr h="329184">
+                <a:tc>
+                  <a:txBody>
+                    <a:bodyPr/>
+                    <a:lstStyle/>
+                    <a:p>
+                      <a:pPr algn="l" indent="0" marL="0">
+                        <a:buNone/>
+                      </a:pPr>
+                      <a:r>
+                        <a:rPr lang="en-US" sz="1100" dirty="0">
+                          <a:solidFill>
+                            <a:srgbClr val="14181F"/>
+                          </a:solidFill>
+                          <a:latin typeface="Calibri" pitchFamily="34" charset="0"/>
+                          <a:ea typeface="Calibri" pitchFamily="34" charset="-122"/>
+                          <a:cs typeface="Calibri" pitchFamily="34" charset="-120"/>
+                        </a:rPr>
+                        <a:t>SATA 3.0</a:t>
+                      </a:r>
+                      <a:endParaRPr lang="en-US" sz="1100" dirty="0">
+                        <a:latin typeface="Calibri" charset="0"/>
+                        <a:ea typeface="Calibri" charset="0"/>
+                        <a:cs typeface="Calibri" charset="0"/>
+                      </a:endParaRPr>
+                    </a:p>
+                  </a:txBody>
+                  <a:tcPr marL="36576" marR="36576" marT="36576" marB="36576" anchor="ctr">
                     <a:lnL w="7620" cap="flat" cmpd="sng" algn="ctr">
                       <a:solidFill>
                         <a:srgbClr val="DFE3E8"/>
@@ -11380,7 +11624,7 @@
                         <a:buNone/>
                       </a:pPr>
                       <a:r>
-                        <a:rPr lang="en-US" sz="1200" dirty="0">
+                        <a:rPr lang="en-US" sz="1100" dirty="0">
                           <a:solidFill>
                             <a:srgbClr val="14181F"/>
                           </a:solidFill>
@@ -11388,16 +11632,16 @@
                           <a:ea typeface="Calibri" pitchFamily="34" charset="-122"/>
                           <a:cs typeface="Calibri" pitchFamily="34" charset="-120"/>
                         </a:rPr>
-                        <a:t>1 m</a:t>
+                        <a:t>Serial</a:t>
                       </a:r>
-                      <a:endParaRPr lang="en-US" sz="1200" dirty="0">
+                      <a:endParaRPr lang="en-US" sz="1100" dirty="0">
                         <a:latin typeface="Calibri" charset="0"/>
                         <a:ea typeface="Calibri" charset="0"/>
                         <a:cs typeface="Calibri" charset="0"/>
                       </a:endParaRPr>
                     </a:p>
                   </a:txBody>
-                  <a:tcPr marL="45720" marR="45720" marT="45720" marB="45720" anchor="ctr">
+                  <a:tcPr marL="36576" marR="36576" marT="36576" marB="36576" anchor="ctr">
                     <a:lnL w="7620" cap="flat" cmpd="sng" algn="ctr">
                       <a:solidFill>
                         <a:srgbClr val="DFE3E8"/>
@@ -11445,7 +11689,7 @@
                         <a:buNone/>
                       </a:pPr>
                       <a:r>
-                        <a:rPr lang="en-US" sz="1200" dirty="0">
+                        <a:rPr lang="en-US" sz="1100" dirty="0">
                           <a:solidFill>
                             <a:srgbClr val="14181F"/>
                           </a:solidFill>
@@ -11453,83 +11697,16 @@
                           <a:ea typeface="Calibri" pitchFamily="34" charset="-122"/>
                           <a:cs typeface="Calibri" pitchFamily="34" charset="-120"/>
                         </a:rPr>
-                        <a:t>Disco e SSD SATA</a:t>
+                        <a:t>600 MB/s</a:t>
                       </a:r>
-                      <a:endParaRPr lang="en-US" sz="1200" dirty="0">
+                      <a:endParaRPr lang="en-US" sz="1100" dirty="0">
                         <a:latin typeface="Calibri" charset="0"/>
                         <a:ea typeface="Calibri" charset="0"/>
                         <a:cs typeface="Calibri" charset="0"/>
                       </a:endParaRPr>
                     </a:p>
                   </a:txBody>
-                  <a:tcPr marL="45720" marR="45720" marT="45720" marB="45720" anchor="ctr">
-                    <a:lnL w="7620" cap="flat" cmpd="sng" algn="ctr">
-                      <a:solidFill>
-                        <a:srgbClr val="DFE3E8"/>
-                      </a:solidFill>
-                      <a:prstDash val="solid"/>
-                      <a:round/>
-                      <a:headEnd type="none" w="med" len="med"/>
-                      <a:tailEnd type="none" w="med" len="med"/>
-                    </a:lnL>
-                    <a:lnR w="7620" cap="flat" cmpd="sng" algn="ctr">
-                      <a:solidFill>
-                        <a:srgbClr val="DFE3E8"/>
-                      </a:solidFill>
-                      <a:prstDash val="solid"/>
-                      <a:round/>
-                      <a:headEnd type="none" w="med" len="med"/>
-                      <a:tailEnd type="none" w="med" len="med"/>
-                    </a:lnR>
-                    <a:lnT w="7620" cap="flat" cmpd="sng" algn="ctr">
-                      <a:solidFill>
-                        <a:srgbClr val="DFE3E8"/>
-                      </a:solidFill>
-                      <a:prstDash val="solid"/>
-                      <a:round/>
-                      <a:headEnd type="none" w="med" len="med"/>
-                      <a:tailEnd type="none" w="med" len="med"/>
-                    </a:lnT>
-                    <a:lnB w="7620" cap="flat" cmpd="sng" algn="ctr">
-                      <a:solidFill>
-                        <a:srgbClr val="DFE3E8"/>
-                      </a:solidFill>
-                      <a:prstDash val="solid"/>
-                      <a:round/>
-                      <a:headEnd type="none" w="med" len="med"/>
-                      <a:tailEnd type="none" w="med" len="med"/>
-                    </a:lnB>
-                  </a:tcPr>
-                </a:tc>
-              </a:tr>
-              <a:tr h="393192">
-                <a:tc>
-                  <a:txBody>
-                    <a:bodyPr/>
-                    <a:lstStyle/>
-                    <a:p>
-                      <a:pPr algn="l" indent="0" marL="0">
-                        <a:buNone/>
-                      </a:pPr>
-                      <a:r>
-                        <a:rPr lang="en-US" sz="1200" dirty="0">
-                          <a:solidFill>
-                            <a:srgbClr val="14181F"/>
-                          </a:solidFill>
-                          <a:latin typeface="Calibri" pitchFamily="34" charset="0"/>
-                          <a:ea typeface="Calibri" pitchFamily="34" charset="-122"/>
-                          <a:cs typeface="Calibri" pitchFamily="34" charset="-120"/>
-                        </a:rPr>
-                        <a:t>SAS-4 (24G)</a:t>
-                      </a:r>
-                      <a:endParaRPr lang="en-US" sz="1200" dirty="0">
-                        <a:latin typeface="Calibri" charset="0"/>
-                        <a:ea typeface="Calibri" charset="0"/>
-                        <a:cs typeface="Calibri" charset="0"/>
-                      </a:endParaRPr>
-                    </a:p>
-                  </a:txBody>
-                  <a:tcPr marL="45720" marR="45720" marT="45720" marB="45720" anchor="ctr">
+                  <a:tcPr marL="36576" marR="36576" marT="36576" marB="36576" anchor="ctr">
                     <a:lnL w="7620" cap="flat" cmpd="sng" algn="ctr">
                       <a:solidFill>
                         <a:srgbClr val="DFE3E8"/>
@@ -11577,7 +11754,7 @@
                         <a:buNone/>
                       </a:pPr>
                       <a:r>
-                        <a:rPr lang="en-US" sz="1200" dirty="0">
+                        <a:rPr lang="en-US" sz="1100" dirty="0">
                           <a:solidFill>
                             <a:srgbClr val="14181F"/>
                           </a:solidFill>
@@ -11585,16 +11762,16 @@
                           <a:ea typeface="Calibri" pitchFamily="34" charset="-122"/>
                           <a:cs typeface="Calibri" pitchFamily="34" charset="-120"/>
                         </a:rPr>
-                        <a:t>Serial</a:t>
+                        <a:t>100–200 µs (SSD)</a:t>
                       </a:r>
-                      <a:endParaRPr lang="en-US" sz="1200" dirty="0">
+                      <a:endParaRPr lang="en-US" sz="1100" dirty="0">
                         <a:latin typeface="Calibri" charset="0"/>
                         <a:ea typeface="Calibri" charset="0"/>
                         <a:cs typeface="Calibri" charset="0"/>
                       </a:endParaRPr>
                     </a:p>
                   </a:txBody>
-                  <a:tcPr marL="45720" marR="45720" marT="45720" marB="45720" anchor="ctr">
+                  <a:tcPr marL="36576" marR="36576" marT="36576" marB="36576" anchor="ctr">
                     <a:lnL w="7620" cap="flat" cmpd="sng" algn="ctr">
                       <a:solidFill>
                         <a:srgbClr val="DFE3E8"/>
@@ -11642,7 +11819,7 @@
                         <a:buNone/>
                       </a:pPr>
                       <a:r>
-                        <a:rPr lang="en-US" sz="1200" dirty="0">
+                        <a:rPr lang="en-US" sz="1100" dirty="0">
                           <a:solidFill>
                             <a:srgbClr val="14181F"/>
                           </a:solidFill>
@@ -11650,16 +11827,16 @@
                           <a:ea typeface="Calibri" pitchFamily="34" charset="-122"/>
                           <a:cs typeface="Calibri" pitchFamily="34" charset="-120"/>
                         </a:rPr>
-                        <a:t>2.400 MB/s</a:t>
+                        <a:t>1 m</a:t>
                       </a:r>
-                      <a:endParaRPr lang="en-US" sz="1200" dirty="0">
+                      <a:endParaRPr lang="en-US" sz="1100" dirty="0">
                         <a:latin typeface="Calibri" charset="0"/>
                         <a:ea typeface="Calibri" charset="0"/>
                         <a:cs typeface="Calibri" charset="0"/>
                       </a:endParaRPr>
                     </a:p>
                   </a:txBody>
-                  <a:tcPr marL="45720" marR="45720" marT="45720" marB="45720" anchor="ctr">
+                  <a:tcPr marL="36576" marR="36576" marT="36576" marB="36576" anchor="ctr">
                     <a:lnL w="7620" cap="flat" cmpd="sng" algn="ctr">
                       <a:solidFill>
                         <a:srgbClr val="DFE3E8"/>
@@ -11707,7 +11884,7 @@
                         <a:buNone/>
                       </a:pPr>
                       <a:r>
-                        <a:rPr lang="en-US" sz="1200" dirty="0">
+                        <a:rPr lang="en-US" sz="1100" dirty="0">
                           <a:solidFill>
                             <a:srgbClr val="14181F"/>
                           </a:solidFill>
@@ -11715,16 +11892,83 @@
                           <a:ea typeface="Calibri" pitchFamily="34" charset="-122"/>
                           <a:cs typeface="Calibri" pitchFamily="34" charset="-120"/>
                         </a:rPr>
-                        <a:t>10 m</a:t>
+                        <a:t>Capacidade, backup, dev</a:t>
                       </a:r>
-                      <a:endParaRPr lang="en-US" sz="1200" dirty="0">
+                      <a:endParaRPr lang="en-US" sz="1100" dirty="0">
                         <a:latin typeface="Calibri" charset="0"/>
                         <a:ea typeface="Calibri" charset="0"/>
                         <a:cs typeface="Calibri" charset="0"/>
                       </a:endParaRPr>
                     </a:p>
                   </a:txBody>
-                  <a:tcPr marL="45720" marR="45720" marT="45720" marB="45720" anchor="ctr">
+                  <a:tcPr marL="36576" marR="36576" marT="36576" marB="36576" anchor="ctr">
+                    <a:lnL w="7620" cap="flat" cmpd="sng" algn="ctr">
+                      <a:solidFill>
+                        <a:srgbClr val="DFE3E8"/>
+                      </a:solidFill>
+                      <a:prstDash val="solid"/>
+                      <a:round/>
+                      <a:headEnd type="none" w="med" len="med"/>
+                      <a:tailEnd type="none" w="med" len="med"/>
+                    </a:lnL>
+                    <a:lnR w="7620" cap="flat" cmpd="sng" algn="ctr">
+                      <a:solidFill>
+                        <a:srgbClr val="DFE3E8"/>
+                      </a:solidFill>
+                      <a:prstDash val="solid"/>
+                      <a:round/>
+                      <a:headEnd type="none" w="med" len="med"/>
+                      <a:tailEnd type="none" w="med" len="med"/>
+                    </a:lnR>
+                    <a:lnT w="7620" cap="flat" cmpd="sng" algn="ctr">
+                      <a:solidFill>
+                        <a:srgbClr val="DFE3E8"/>
+                      </a:solidFill>
+                      <a:prstDash val="solid"/>
+                      <a:round/>
+                      <a:headEnd type="none" w="med" len="med"/>
+                      <a:tailEnd type="none" w="med" len="med"/>
+                    </a:lnT>
+                    <a:lnB w="7620" cap="flat" cmpd="sng" algn="ctr">
+                      <a:solidFill>
+                        <a:srgbClr val="DFE3E8"/>
+                      </a:solidFill>
+                      <a:prstDash val="solid"/>
+                      <a:round/>
+                      <a:headEnd type="none" w="med" len="med"/>
+                      <a:tailEnd type="none" w="med" len="med"/>
+                    </a:lnB>
+                  </a:tcPr>
+                </a:tc>
+              </a:tr>
+              <a:tr h="329184">
+                <a:tc>
+                  <a:txBody>
+                    <a:bodyPr/>
+                    <a:lstStyle/>
+                    <a:p>
+                      <a:pPr algn="l" indent="0" marL="0">
+                        <a:buNone/>
+                      </a:pPr>
+                      <a:r>
+                        <a:rPr lang="en-US" sz="1100" dirty="0">
+                          <a:solidFill>
+                            <a:srgbClr val="14181F"/>
+                          </a:solidFill>
+                          <a:latin typeface="Calibri" pitchFamily="34" charset="0"/>
+                          <a:ea typeface="Calibri" pitchFamily="34" charset="-122"/>
+                          <a:cs typeface="Calibri" pitchFamily="34" charset="-120"/>
+                        </a:rPr>
+                        <a:t>SAS-4 (24G)</a:t>
+                      </a:r>
+                      <a:endParaRPr lang="en-US" sz="1100" dirty="0">
+                        <a:latin typeface="Calibri" charset="0"/>
+                        <a:ea typeface="Calibri" charset="0"/>
+                        <a:cs typeface="Calibri" charset="0"/>
+                      </a:endParaRPr>
+                    </a:p>
+                  </a:txBody>
+                  <a:tcPr marL="36576" marR="36576" marT="36576" marB="36576" anchor="ctr">
                     <a:lnL w="7620" cap="flat" cmpd="sng" algn="ctr">
                       <a:solidFill>
                         <a:srgbClr val="DFE3E8"/>
@@ -11772,7 +12016,7 @@
                         <a:buNone/>
                       </a:pPr>
                       <a:r>
-                        <a:rPr lang="en-US" sz="1200" dirty="0">
+                        <a:rPr lang="en-US" sz="1100" dirty="0">
                           <a:solidFill>
                             <a:srgbClr val="14181F"/>
                           </a:solidFill>
@@ -11780,83 +12024,16 @@
                           <a:ea typeface="Calibri" pitchFamily="34" charset="-122"/>
                           <a:cs typeface="Calibri" pitchFamily="34" charset="-120"/>
                         </a:rPr>
-                        <a:t>Backplane e discos SAS</a:t>
+                        <a:t>Serial</a:t>
                       </a:r>
-                      <a:endParaRPr lang="en-US" sz="1200" dirty="0">
+                      <a:endParaRPr lang="en-US" sz="1100" dirty="0">
                         <a:latin typeface="Calibri" charset="0"/>
                         <a:ea typeface="Calibri" charset="0"/>
                         <a:cs typeface="Calibri" charset="0"/>
                       </a:endParaRPr>
                     </a:p>
                   </a:txBody>
-                  <a:tcPr marL="45720" marR="45720" marT="45720" marB="45720" anchor="ctr">
-                    <a:lnL w="7620" cap="flat" cmpd="sng" algn="ctr">
-                      <a:solidFill>
-                        <a:srgbClr val="DFE3E8"/>
-                      </a:solidFill>
-                      <a:prstDash val="solid"/>
-                      <a:round/>
-                      <a:headEnd type="none" w="med" len="med"/>
-                      <a:tailEnd type="none" w="med" len="med"/>
-                    </a:lnL>
-                    <a:lnR w="7620" cap="flat" cmpd="sng" algn="ctr">
-                      <a:solidFill>
-                        <a:srgbClr val="DFE3E8"/>
-                      </a:solidFill>
-                      <a:prstDash val="solid"/>
-                      <a:round/>
-                      <a:headEnd type="none" w="med" len="med"/>
-                      <a:tailEnd type="none" w="med" len="med"/>
-                    </a:lnR>
-                    <a:lnT w="7620" cap="flat" cmpd="sng" algn="ctr">
-                      <a:solidFill>
-                        <a:srgbClr val="DFE3E8"/>
-                      </a:solidFill>
-                      <a:prstDash val="solid"/>
-                      <a:round/>
-                      <a:headEnd type="none" w="med" len="med"/>
-                      <a:tailEnd type="none" w="med" len="med"/>
-                    </a:lnT>
-                    <a:lnB w="7620" cap="flat" cmpd="sng" algn="ctr">
-                      <a:solidFill>
-                        <a:srgbClr val="DFE3E8"/>
-                      </a:solidFill>
-                      <a:prstDash val="solid"/>
-                      <a:round/>
-                      <a:headEnd type="none" w="med" len="med"/>
-                      <a:tailEnd type="none" w="med" len="med"/>
-                    </a:lnB>
-                  </a:tcPr>
-                </a:tc>
-              </a:tr>
-              <a:tr h="393192">
-                <a:tc>
-                  <a:txBody>
-                    <a:bodyPr/>
-                    <a:lstStyle/>
-                    <a:p>
-                      <a:pPr algn="l" indent="0" marL="0">
-                        <a:buNone/>
-                      </a:pPr>
-                      <a:r>
-                        <a:rPr lang="en-US" sz="1200" dirty="0">
-                          <a:solidFill>
-                            <a:srgbClr val="14181F"/>
-                          </a:solidFill>
-                          <a:latin typeface="Calibri" pitchFamily="34" charset="0"/>
-                          <a:ea typeface="Calibri" pitchFamily="34" charset="-122"/>
-                          <a:cs typeface="Calibri" pitchFamily="34" charset="-120"/>
-                        </a:rPr>
-                        <a:t>PCIe 5.0 ×4 / NVMe</a:t>
-                      </a:r>
-                      <a:endParaRPr lang="en-US" sz="1200" dirty="0">
-                        <a:latin typeface="Calibri" charset="0"/>
-                        <a:ea typeface="Calibri" charset="0"/>
-                        <a:cs typeface="Calibri" charset="0"/>
-                      </a:endParaRPr>
-                    </a:p>
-                  </a:txBody>
-                  <a:tcPr marL="45720" marR="45720" marT="45720" marB="45720" anchor="ctr">
+                  <a:tcPr marL="36576" marR="36576" marT="36576" marB="36576" anchor="ctr">
                     <a:lnL w="7620" cap="flat" cmpd="sng" algn="ctr">
                       <a:solidFill>
                         <a:srgbClr val="DFE3E8"/>
@@ -11904,7 +12081,7 @@
                         <a:buNone/>
                       </a:pPr>
                       <a:r>
-                        <a:rPr lang="en-US" sz="1200" dirty="0">
+                        <a:rPr lang="en-US" sz="1100" dirty="0">
                           <a:solidFill>
                             <a:srgbClr val="14181F"/>
                           </a:solidFill>
@@ -11912,16 +12089,16 @@
                           <a:ea typeface="Calibri" pitchFamily="34" charset="-122"/>
                           <a:cs typeface="Calibri" pitchFamily="34" charset="-120"/>
                         </a:rPr>
-                        <a:t>Serial / protocolo</a:t>
+                        <a:t>2.400 MB/s</a:t>
                       </a:r>
-                      <a:endParaRPr lang="en-US" sz="1200" dirty="0">
+                      <a:endParaRPr lang="en-US" sz="1100" dirty="0">
                         <a:latin typeface="Calibri" charset="0"/>
                         <a:ea typeface="Calibri" charset="0"/>
                         <a:cs typeface="Calibri" charset="0"/>
                       </a:endParaRPr>
                     </a:p>
                   </a:txBody>
-                  <a:tcPr marL="45720" marR="45720" marT="45720" marB="45720" anchor="ctr">
+                  <a:tcPr marL="36576" marR="36576" marT="36576" marB="36576" anchor="ctr">
                     <a:lnL w="7620" cap="flat" cmpd="sng" algn="ctr">
                       <a:solidFill>
                         <a:srgbClr val="DFE3E8"/>
@@ -11969,7 +12146,7 @@
                         <a:buNone/>
                       </a:pPr>
                       <a:r>
-                        <a:rPr lang="en-US" sz="1200" dirty="0">
+                        <a:rPr lang="en-US" sz="1100" dirty="0">
                           <a:solidFill>
                             <a:srgbClr val="14181F"/>
                           </a:solidFill>
@@ -11977,16 +12154,16 @@
                           <a:ea typeface="Calibri" pitchFamily="34" charset="-122"/>
                           <a:cs typeface="Calibri" pitchFamily="34" charset="-120"/>
                         </a:rPr>
-                        <a:t>15,75 GB/s</a:t>
+                        <a:t>100–200 µs</a:t>
                       </a:r>
-                      <a:endParaRPr lang="en-US" sz="1200" dirty="0">
+                      <a:endParaRPr lang="en-US" sz="1100" dirty="0">
                         <a:latin typeface="Calibri" charset="0"/>
                         <a:ea typeface="Calibri" charset="0"/>
                         <a:cs typeface="Calibri" charset="0"/>
                       </a:endParaRPr>
                     </a:p>
                   </a:txBody>
-                  <a:tcPr marL="45720" marR="45720" marT="45720" marB="45720" anchor="ctr">
+                  <a:tcPr marL="36576" marR="36576" marT="36576" marB="36576" anchor="ctr">
                     <a:lnL w="7620" cap="flat" cmpd="sng" algn="ctr">
                       <a:solidFill>
                         <a:srgbClr val="DFE3E8"/>
@@ -12034,7 +12211,7 @@
                         <a:buNone/>
                       </a:pPr>
                       <a:r>
-                        <a:rPr lang="en-US" sz="1200" dirty="0">
+                        <a:rPr lang="en-US" sz="1100" dirty="0">
                           <a:solidFill>
                             <a:srgbClr val="14181F"/>
                           </a:solidFill>
@@ -12042,16 +12219,16 @@
                           <a:ea typeface="Calibri" pitchFamily="34" charset="-122"/>
                           <a:cs typeface="Calibri" pitchFamily="34" charset="-120"/>
                         </a:rPr>
-                        <a:t>Placa/backplane</a:t>
+                        <a:t>10 m</a:t>
                       </a:r>
-                      <a:endParaRPr lang="en-US" sz="1200" dirty="0">
+                      <a:endParaRPr lang="en-US" sz="1100" dirty="0">
                         <a:latin typeface="Calibri" charset="0"/>
                         <a:ea typeface="Calibri" charset="0"/>
                         <a:cs typeface="Calibri" charset="0"/>
                       </a:endParaRPr>
                     </a:p>
                   </a:txBody>
-                  <a:tcPr marL="45720" marR="45720" marT="45720" marB="45720" anchor="ctr">
+                  <a:tcPr marL="36576" marR="36576" marT="36576" marB="36576" anchor="ctr">
                     <a:lnL w="7620" cap="flat" cmpd="sng" algn="ctr">
                       <a:solidFill>
                         <a:srgbClr val="DFE3E8"/>
@@ -12099,7 +12276,7 @@
                         <a:buNone/>
                       </a:pPr>
                       <a:r>
-                        <a:rPr lang="en-US" sz="1200" dirty="0">
+                        <a:rPr lang="en-US" sz="1100" dirty="0">
                           <a:solidFill>
                             <a:srgbClr val="14181F"/>
                           </a:solidFill>
@@ -12107,16 +12284,16 @@
                           <a:ea typeface="Calibri" pitchFamily="34" charset="-122"/>
                           <a:cs typeface="Calibri" pitchFamily="34" charset="-120"/>
                         </a:rPr>
-                        <a:t>SSD local</a:t>
+                        <a:t>Backplane tri-modo</a:t>
                       </a:r>
-                      <a:endParaRPr lang="en-US" sz="1200" dirty="0">
+                      <a:endParaRPr lang="en-US" sz="1100" dirty="0">
                         <a:latin typeface="Calibri" charset="0"/>
                         <a:ea typeface="Calibri" charset="0"/>
                         <a:cs typeface="Calibri" charset="0"/>
                       </a:endParaRPr>
                     </a:p>
                   </a:txBody>
-                  <a:tcPr marL="45720" marR="45720" marT="45720" marB="45720" anchor="ctr">
+                  <a:tcPr marL="36576" marR="36576" marT="36576" marB="36576" anchor="ctr">
                     <a:lnL w="7620" cap="flat" cmpd="sng" algn="ctr">
                       <a:solidFill>
                         <a:srgbClr val="DFE3E8"/>
@@ -12156,7 +12333,7 @@
                   </a:tcPr>
                 </a:tc>
               </a:tr>
-              <a:tr h="393192">
+              <a:tr h="329184">
                 <a:tc>
                   <a:txBody>
                     <a:bodyPr/>
@@ -12166,24 +12343,24 @@
                         <a:buNone/>
                       </a:pPr>
                       <a:r>
-                        <a:rPr lang="en-US" sz="1200" dirty="0">
+                        <a:rPr lang="en-US" sz="1100" b="1" dirty="0">
                           <a:solidFill>
-                            <a:srgbClr val="14181F"/>
+                            <a:srgbClr val="EB6834"/>
                           </a:solidFill>
                           <a:latin typeface="Calibri" pitchFamily="34" charset="0"/>
                           <a:ea typeface="Calibri" pitchFamily="34" charset="-122"/>
                           <a:cs typeface="Calibri" pitchFamily="34" charset="-120"/>
                         </a:rPr>
-                        <a:t>FC 64GFC</a:t>
+                        <a:t>PCIe 5.0 ×4 / NVMe</a:t>
                       </a:r>
-                      <a:endParaRPr lang="en-US" sz="1200" dirty="0">
+                      <a:endParaRPr lang="en-US" sz="1100" dirty="0">
                         <a:latin typeface="Calibri" charset="0"/>
                         <a:ea typeface="Calibri" charset="0"/>
                         <a:cs typeface="Calibri" charset="0"/>
                       </a:endParaRPr>
                     </a:p>
                   </a:txBody>
-                  <a:tcPr marL="45720" marR="45720" marT="45720" marB="45720" anchor="ctr">
+                  <a:tcPr marL="36576" marR="36576" marT="36576" marB="36576" anchor="ctr">
                     <a:lnL w="7620" cap="flat" cmpd="sng" algn="ctr">
                       <a:solidFill>
                         <a:srgbClr val="DFE3E8"/>
@@ -12231,7 +12408,7 @@
                         <a:buNone/>
                       </a:pPr>
                       <a:r>
-                        <a:rPr lang="en-US" sz="1200" dirty="0">
+                        <a:rPr lang="en-US" sz="1100" dirty="0">
                           <a:solidFill>
                             <a:srgbClr val="14181F"/>
                           </a:solidFill>
@@ -12239,16 +12416,16 @@
                           <a:ea typeface="Calibri" pitchFamily="34" charset="-122"/>
                           <a:cs typeface="Calibri" pitchFamily="34" charset="-120"/>
                         </a:rPr>
-                        <a:t>Serial</a:t>
+                        <a:t>Enlace / protocolo</a:t>
                       </a:r>
-                      <a:endParaRPr lang="en-US" sz="1200" dirty="0">
+                      <a:endParaRPr lang="en-US" sz="1100" dirty="0">
                         <a:latin typeface="Calibri" charset="0"/>
                         <a:ea typeface="Calibri" charset="0"/>
                         <a:cs typeface="Calibri" charset="0"/>
                       </a:endParaRPr>
                     </a:p>
                   </a:txBody>
-                  <a:tcPr marL="45720" marR="45720" marT="45720" marB="45720" anchor="ctr">
+                  <a:tcPr marL="36576" marR="36576" marT="36576" marB="36576" anchor="ctr">
                     <a:lnL w="7620" cap="flat" cmpd="sng" algn="ctr">
                       <a:solidFill>
                         <a:srgbClr val="DFE3E8"/>
@@ -12296,24 +12473,24 @@
                         <a:buNone/>
                       </a:pPr>
                       <a:r>
-                        <a:rPr lang="en-US" sz="1200" dirty="0">
+                        <a:rPr lang="en-US" sz="1100" b="1" dirty="0">
                           <a:solidFill>
-                            <a:srgbClr val="14181F"/>
+                            <a:srgbClr val="EB6834"/>
                           </a:solidFill>
                           <a:latin typeface="Calibri" pitchFamily="34" charset="0"/>
                           <a:ea typeface="Calibri" pitchFamily="34" charset="-122"/>
                           <a:cs typeface="Calibri" pitchFamily="34" charset="-120"/>
                         </a:rPr>
-                        <a:t>6.400 MB/s por direção</a:t>
+                        <a:t>15,75 GB/s</a:t>
                       </a:r>
-                      <a:endParaRPr lang="en-US" sz="1200" dirty="0">
+                      <a:endParaRPr lang="en-US" sz="1100" dirty="0">
                         <a:latin typeface="Calibri" charset="0"/>
                         <a:ea typeface="Calibri" charset="0"/>
                         <a:cs typeface="Calibri" charset="0"/>
                       </a:endParaRPr>
                     </a:p>
                   </a:txBody>
-                  <a:tcPr marL="45720" marR="45720" marT="45720" marB="45720" anchor="ctr">
+                  <a:tcPr marL="36576" marR="36576" marT="36576" marB="36576" anchor="ctr">
                     <a:lnL w="7620" cap="flat" cmpd="sng" algn="ctr">
                       <a:solidFill>
                         <a:srgbClr val="DFE3E8"/>
@@ -12361,24 +12538,24 @@
                         <a:buNone/>
                       </a:pPr>
                       <a:r>
-                        <a:rPr lang="en-US" sz="1200" dirty="0">
+                        <a:rPr lang="en-US" sz="1100" b="1" dirty="0">
                           <a:solidFill>
-                            <a:srgbClr val="14181F"/>
+                            <a:srgbClr val="EB6834"/>
                           </a:solidFill>
                           <a:latin typeface="Calibri" pitchFamily="34" charset="0"/>
                           <a:ea typeface="Calibri" pitchFamily="34" charset="-122"/>
                           <a:cs typeface="Calibri" pitchFamily="34" charset="-120"/>
                         </a:rPr>
-                        <a:t>Óptica adequada</a:t>
+                        <a:t>20–70 µs</a:t>
                       </a:r>
-                      <a:endParaRPr lang="en-US" sz="1200" dirty="0">
+                      <a:endParaRPr lang="en-US" sz="1100" dirty="0">
                         <a:latin typeface="Calibri" charset="0"/>
                         <a:ea typeface="Calibri" charset="0"/>
                         <a:cs typeface="Calibri" charset="0"/>
                       </a:endParaRPr>
                     </a:p>
                   </a:txBody>
-                  <a:tcPr marL="45720" marR="45720" marT="45720" marB="45720" anchor="ctr">
+                  <a:tcPr marL="36576" marR="36576" marT="36576" marB="36576" anchor="ctr">
                     <a:lnL w="7620" cap="flat" cmpd="sng" algn="ctr">
                       <a:solidFill>
                         <a:srgbClr val="DFE3E8"/>
@@ -12426,7 +12603,7 @@
                         <a:buNone/>
                       </a:pPr>
                       <a:r>
-                        <a:rPr lang="en-US" sz="1200" dirty="0">
+                        <a:rPr lang="en-US" sz="1100" dirty="0">
                           <a:solidFill>
                             <a:srgbClr val="14181F"/>
                           </a:solidFill>
@@ -12434,83 +12611,16 @@
                           <a:ea typeface="Calibri" pitchFamily="34" charset="-122"/>
                           <a:cs typeface="Calibri" pitchFamily="34" charset="-120"/>
                         </a:rPr>
-                        <a:t>SAN FC</a:t>
+                        <a:t>≈0,25 m</a:t>
                       </a:r>
-                      <a:endParaRPr lang="en-US" sz="1200" dirty="0">
+                      <a:endParaRPr lang="en-US" sz="1100" dirty="0">
                         <a:latin typeface="Calibri" charset="0"/>
                         <a:ea typeface="Calibri" charset="0"/>
                         <a:cs typeface="Calibri" charset="0"/>
                       </a:endParaRPr>
                     </a:p>
                   </a:txBody>
-                  <a:tcPr marL="45720" marR="45720" marT="45720" marB="45720" anchor="ctr">
-                    <a:lnL w="7620" cap="flat" cmpd="sng" algn="ctr">
-                      <a:solidFill>
-                        <a:srgbClr val="DFE3E8"/>
-                      </a:solidFill>
-                      <a:prstDash val="solid"/>
-                      <a:round/>
-                      <a:headEnd type="none" w="med" len="med"/>
-                      <a:tailEnd type="none" w="med" len="med"/>
-                    </a:lnL>
-                    <a:lnR w="7620" cap="flat" cmpd="sng" algn="ctr">
-                      <a:solidFill>
-                        <a:srgbClr val="DFE3E8"/>
-                      </a:solidFill>
-                      <a:prstDash val="solid"/>
-                      <a:round/>
-                      <a:headEnd type="none" w="med" len="med"/>
-                      <a:tailEnd type="none" w="med" len="med"/>
-                    </a:lnR>
-                    <a:lnT w="7620" cap="flat" cmpd="sng" algn="ctr">
-                      <a:solidFill>
-                        <a:srgbClr val="DFE3E8"/>
-                      </a:solidFill>
-                      <a:prstDash val="solid"/>
-                      <a:round/>
-                      <a:headEnd type="none" w="med" len="med"/>
-                      <a:tailEnd type="none" w="med" len="med"/>
-                    </a:lnT>
-                    <a:lnB w="7620" cap="flat" cmpd="sng" algn="ctr">
-                      <a:solidFill>
-                        <a:srgbClr val="DFE3E8"/>
-                      </a:solidFill>
-                      <a:prstDash val="solid"/>
-                      <a:round/>
-                      <a:headEnd type="none" w="med" len="med"/>
-                      <a:tailEnd type="none" w="med" len="med"/>
-                    </a:lnB>
-                  </a:tcPr>
-                </a:tc>
-              </a:tr>
-              <a:tr h="393192">
-                <a:tc>
-                  <a:txBody>
-                    <a:bodyPr/>
-                    <a:lstStyle/>
-                    <a:p>
-                      <a:pPr algn="l" indent="0" marL="0">
-                        <a:buNone/>
-                      </a:pPr>
-                      <a:r>
-                        <a:rPr lang="en-US" sz="1200" dirty="0">
-                          <a:solidFill>
-                            <a:srgbClr val="14181F"/>
-                          </a:solidFill>
-                          <a:latin typeface="Calibri" pitchFamily="34" charset="0"/>
-                          <a:ea typeface="Calibri" pitchFamily="34" charset="-122"/>
-                          <a:cs typeface="Calibri" pitchFamily="34" charset="-120"/>
-                        </a:rPr>
-                        <a:t>iSCSI</a:t>
-                      </a:r>
-                      <a:endParaRPr lang="en-US" sz="1200" dirty="0">
-                        <a:latin typeface="Calibri" charset="0"/>
-                        <a:ea typeface="Calibri" charset="0"/>
-                        <a:cs typeface="Calibri" charset="0"/>
-                      </a:endParaRPr>
-                    </a:p>
-                  </a:txBody>
-                  <a:tcPr marL="45720" marR="45720" marT="45720" marB="45720" anchor="ctr">
+                  <a:tcPr marL="36576" marR="36576" marT="36576" marB="36576" anchor="ctr">
                     <a:lnL w="7620" cap="flat" cmpd="sng" algn="ctr">
                       <a:solidFill>
                         <a:srgbClr val="DFE3E8"/>
@@ -12558,7 +12668,7 @@
                         <a:buNone/>
                       </a:pPr>
                       <a:r>
-                        <a:rPr lang="en-US" sz="1200" dirty="0">
+                        <a:rPr lang="en-US" sz="1100" dirty="0">
                           <a:solidFill>
                             <a:srgbClr val="14181F"/>
                           </a:solidFill>
@@ -12566,16 +12676,83 @@
                           <a:ea typeface="Calibri" pitchFamily="34" charset="-122"/>
                           <a:cs typeface="Calibri" pitchFamily="34" charset="-120"/>
                         </a:rPr>
-                        <a:t>Protocolo IP</a:t>
+                        <a:t>OLTP e redo log</a:t>
                       </a:r>
-                      <a:endParaRPr lang="en-US" sz="1200" dirty="0">
+                      <a:endParaRPr lang="en-US" sz="1100" dirty="0">
                         <a:latin typeface="Calibri" charset="0"/>
                         <a:ea typeface="Calibri" charset="0"/>
                         <a:cs typeface="Calibri" charset="0"/>
                       </a:endParaRPr>
                     </a:p>
                   </a:txBody>
-                  <a:tcPr marL="45720" marR="45720" marT="45720" marB="45720" anchor="ctr">
+                  <a:tcPr marL="36576" marR="36576" marT="36576" marB="36576" anchor="ctr">
+                    <a:lnL w="7620" cap="flat" cmpd="sng" algn="ctr">
+                      <a:solidFill>
+                        <a:srgbClr val="DFE3E8"/>
+                      </a:solidFill>
+                      <a:prstDash val="solid"/>
+                      <a:round/>
+                      <a:headEnd type="none" w="med" len="med"/>
+                      <a:tailEnd type="none" w="med" len="med"/>
+                    </a:lnL>
+                    <a:lnR w="7620" cap="flat" cmpd="sng" algn="ctr">
+                      <a:solidFill>
+                        <a:srgbClr val="DFE3E8"/>
+                      </a:solidFill>
+                      <a:prstDash val="solid"/>
+                      <a:round/>
+                      <a:headEnd type="none" w="med" len="med"/>
+                      <a:tailEnd type="none" w="med" len="med"/>
+                    </a:lnR>
+                    <a:lnT w="7620" cap="flat" cmpd="sng" algn="ctr">
+                      <a:solidFill>
+                        <a:srgbClr val="DFE3E8"/>
+                      </a:solidFill>
+                      <a:prstDash val="solid"/>
+                      <a:round/>
+                      <a:headEnd type="none" w="med" len="med"/>
+                      <a:tailEnd type="none" w="med" len="med"/>
+                    </a:lnT>
+                    <a:lnB w="7620" cap="flat" cmpd="sng" algn="ctr">
+                      <a:solidFill>
+                        <a:srgbClr val="DFE3E8"/>
+                      </a:solidFill>
+                      <a:prstDash val="solid"/>
+                      <a:round/>
+                      <a:headEnd type="none" w="med" len="med"/>
+                      <a:tailEnd type="none" w="med" len="med"/>
+                    </a:lnB>
+                  </a:tcPr>
+                </a:tc>
+              </a:tr>
+              <a:tr h="329184">
+                <a:tc>
+                  <a:txBody>
+                    <a:bodyPr/>
+                    <a:lstStyle/>
+                    <a:p>
+                      <a:pPr algn="l" indent="0" marL="0">
+                        <a:buNone/>
+                      </a:pPr>
+                      <a:r>
+                        <a:rPr lang="en-US" sz="1100" dirty="0">
+                          <a:solidFill>
+                            <a:srgbClr val="14181F"/>
+                          </a:solidFill>
+                          <a:latin typeface="Calibri" pitchFamily="34" charset="0"/>
+                          <a:ea typeface="Calibri" pitchFamily="34" charset="-122"/>
+                          <a:cs typeface="Calibri" pitchFamily="34" charset="-120"/>
+                        </a:rPr>
+                        <a:t>FC 64GFC (Gen 7)</a:t>
+                      </a:r>
+                      <a:endParaRPr lang="en-US" sz="1100" dirty="0">
+                        <a:latin typeface="Calibri" charset="0"/>
+                        <a:ea typeface="Calibri" charset="0"/>
+                        <a:cs typeface="Calibri" charset="0"/>
+                      </a:endParaRPr>
+                    </a:p>
+                  </a:txBody>
+                  <a:tcPr marL="36576" marR="36576" marT="36576" marB="36576" anchor="ctr">
                     <a:lnL w="7620" cap="flat" cmpd="sng" algn="ctr">
                       <a:solidFill>
                         <a:srgbClr val="DFE3E8"/>
@@ -12623,7 +12800,7 @@
                         <a:buNone/>
                       </a:pPr>
                       <a:r>
-                        <a:rPr lang="en-US" sz="1200" dirty="0">
+                        <a:rPr lang="en-US" sz="1100" dirty="0">
                           <a:solidFill>
                             <a:srgbClr val="14181F"/>
                           </a:solidFill>
@@ -12631,16 +12808,16 @@
                           <a:ea typeface="Calibri" pitchFamily="34" charset="-122"/>
                           <a:cs typeface="Calibri" pitchFamily="34" charset="-120"/>
                         </a:rPr>
-                        <a:t>Depende da rede</a:t>
+                        <a:t>Serial PAM4</a:t>
                       </a:r>
-                      <a:endParaRPr lang="en-US" sz="1200" dirty="0">
+                      <a:endParaRPr lang="en-US" sz="1100" dirty="0">
                         <a:latin typeface="Calibri" charset="0"/>
                         <a:ea typeface="Calibri" charset="0"/>
                         <a:cs typeface="Calibri" charset="0"/>
                       </a:endParaRPr>
                     </a:p>
                   </a:txBody>
-                  <a:tcPr marL="45720" marR="45720" marT="45720" marB="45720" anchor="ctr">
+                  <a:tcPr marL="36576" marR="36576" marT="36576" marB="36576" anchor="ctr">
                     <a:lnL w="7620" cap="flat" cmpd="sng" algn="ctr">
                       <a:solidFill>
                         <a:srgbClr val="DFE3E8"/>
@@ -12688,7 +12865,7 @@
                         <a:buNone/>
                       </a:pPr>
                       <a:r>
-                        <a:rPr lang="en-US" sz="1200" dirty="0">
+                        <a:rPr lang="en-US" sz="1100" dirty="0">
                           <a:solidFill>
                             <a:srgbClr val="14181F"/>
                           </a:solidFill>
@@ -12696,16 +12873,16 @@
                           <a:ea typeface="Calibri" pitchFamily="34" charset="-122"/>
                           <a:cs typeface="Calibri" pitchFamily="34" charset="-120"/>
                         </a:rPr>
-                        <a:t>IP roteável</a:t>
+                        <a:t>6.400 MB/s por direção</a:t>
                       </a:r>
-                      <a:endParaRPr lang="en-US" sz="1200" dirty="0">
+                      <a:endParaRPr lang="en-US" sz="1100" dirty="0">
                         <a:latin typeface="Calibri" charset="0"/>
                         <a:ea typeface="Calibri" charset="0"/>
                         <a:cs typeface="Calibri" charset="0"/>
                       </a:endParaRPr>
                     </a:p>
                   </a:txBody>
-                  <a:tcPr marL="45720" marR="45720" marT="45720" marB="45720" anchor="ctr">
+                  <a:tcPr marL="36576" marR="36576" marT="36576" marB="36576" anchor="ctr">
                     <a:lnL w="7620" cap="flat" cmpd="sng" algn="ctr">
                       <a:solidFill>
                         <a:srgbClr val="DFE3E8"/>
@@ -12753,7 +12930,7 @@
                         <a:buNone/>
                       </a:pPr>
                       <a:r>
-                        <a:rPr lang="en-US" sz="1200" dirty="0">
+                        <a:rPr lang="en-US" sz="1100" dirty="0">
                           <a:solidFill>
                             <a:srgbClr val="14181F"/>
                           </a:solidFill>
@@ -12761,83 +12938,16 @@
                           <a:ea typeface="Calibri" pitchFamily="34" charset="-122"/>
                           <a:cs typeface="Calibri" pitchFamily="34" charset="-120"/>
                         </a:rPr>
-                        <a:t>Blocos sobre TCP</a:t>
+                        <a:t>460 ns por switch</a:t>
                       </a:r>
-                      <a:endParaRPr lang="en-US" sz="1200" dirty="0">
+                      <a:endParaRPr lang="en-US" sz="1100" dirty="0">
                         <a:latin typeface="Calibri" charset="0"/>
                         <a:ea typeface="Calibri" charset="0"/>
                         <a:cs typeface="Calibri" charset="0"/>
                       </a:endParaRPr>
                     </a:p>
                   </a:txBody>
-                  <a:tcPr marL="45720" marR="45720" marT="45720" marB="45720" anchor="ctr">
-                    <a:lnL w="7620" cap="flat" cmpd="sng" algn="ctr">
-                      <a:solidFill>
-                        <a:srgbClr val="DFE3E8"/>
-                      </a:solidFill>
-                      <a:prstDash val="solid"/>
-                      <a:round/>
-                      <a:headEnd type="none" w="med" len="med"/>
-                      <a:tailEnd type="none" w="med" len="med"/>
-                    </a:lnL>
-                    <a:lnR w="7620" cap="flat" cmpd="sng" algn="ctr">
-                      <a:solidFill>
-                        <a:srgbClr val="DFE3E8"/>
-                      </a:solidFill>
-                      <a:prstDash val="solid"/>
-                      <a:round/>
-                      <a:headEnd type="none" w="med" len="med"/>
-                      <a:tailEnd type="none" w="med" len="med"/>
-                    </a:lnR>
-                    <a:lnT w="7620" cap="flat" cmpd="sng" algn="ctr">
-                      <a:solidFill>
-                        <a:srgbClr val="DFE3E8"/>
-                      </a:solidFill>
-                      <a:prstDash val="solid"/>
-                      <a:round/>
-                      <a:headEnd type="none" w="med" len="med"/>
-                      <a:tailEnd type="none" w="med" len="med"/>
-                    </a:lnT>
-                    <a:lnB w="7620" cap="flat" cmpd="sng" algn="ctr">
-                      <a:solidFill>
-                        <a:srgbClr val="DFE3E8"/>
-                      </a:solidFill>
-                      <a:prstDash val="solid"/>
-                      <a:round/>
-                      <a:headEnd type="none" w="med" len="med"/>
-                      <a:tailEnd type="none" w="med" len="med"/>
-                    </a:lnB>
-                  </a:tcPr>
-                </a:tc>
-              </a:tr>
-              <a:tr h="393192">
-                <a:tc>
-                  <a:txBody>
-                    <a:bodyPr/>
-                    <a:lstStyle/>
-                    <a:p>
-                      <a:pPr algn="l" indent="0" marL="0">
-                        <a:buNone/>
-                      </a:pPr>
-                      <a:r>
-                        <a:rPr lang="en-US" sz="1200" dirty="0">
-                          <a:solidFill>
-                            <a:srgbClr val="14181F"/>
-                          </a:solidFill>
-                          <a:latin typeface="Calibri" pitchFamily="34" charset="0"/>
-                          <a:ea typeface="Calibri" pitchFamily="34" charset="-122"/>
-                          <a:cs typeface="Calibri" pitchFamily="34" charset="-120"/>
-                        </a:rPr>
-                        <a:t>NVMe/TCP</a:t>
-                      </a:r>
-                      <a:endParaRPr lang="en-US" sz="1200" dirty="0">
-                        <a:latin typeface="Calibri" charset="0"/>
-                        <a:ea typeface="Calibri" charset="0"/>
-                        <a:cs typeface="Calibri" charset="0"/>
-                      </a:endParaRPr>
-                    </a:p>
-                  </a:txBody>
-                  <a:tcPr marL="45720" marR="45720" marT="45720" marB="45720" anchor="ctr">
+                  <a:tcPr marL="36576" marR="36576" marT="36576" marB="36576" anchor="ctr">
                     <a:lnL w="7620" cap="flat" cmpd="sng" algn="ctr">
                       <a:solidFill>
                         <a:srgbClr val="DFE3E8"/>
@@ -12885,7 +12995,7 @@
                         <a:buNone/>
                       </a:pPr>
                       <a:r>
-                        <a:rPr lang="en-US" sz="1200" dirty="0">
+                        <a:rPr lang="en-US" sz="1100" dirty="0">
                           <a:solidFill>
                             <a:srgbClr val="14181F"/>
                           </a:solidFill>
@@ -12893,16 +13003,16 @@
                           <a:ea typeface="Calibri" pitchFamily="34" charset="-122"/>
                           <a:cs typeface="Calibri" pitchFamily="34" charset="-120"/>
                         </a:rPr>
-                        <a:t>Protocolo IP</a:t>
+                        <a:t>100 m OM4 / 10 km</a:t>
                       </a:r>
-                      <a:endParaRPr lang="en-US" sz="1200" dirty="0">
+                      <a:endParaRPr lang="en-US" sz="1100" dirty="0">
                         <a:latin typeface="Calibri" charset="0"/>
                         <a:ea typeface="Calibri" charset="0"/>
                         <a:cs typeface="Calibri" charset="0"/>
                       </a:endParaRPr>
                     </a:p>
                   </a:txBody>
-                  <a:tcPr marL="45720" marR="45720" marT="45720" marB="45720" anchor="ctr">
+                  <a:tcPr marL="36576" marR="36576" marT="36576" marB="36576" anchor="ctr">
                     <a:lnL w="7620" cap="flat" cmpd="sng" algn="ctr">
                       <a:solidFill>
                         <a:srgbClr val="DFE3E8"/>
@@ -12950,7 +13060,7 @@
                         <a:buNone/>
                       </a:pPr>
                       <a:r>
-                        <a:rPr lang="en-US" sz="1200" dirty="0">
+                        <a:rPr lang="en-US" sz="1100" dirty="0">
                           <a:solidFill>
                             <a:srgbClr val="14181F"/>
                           </a:solidFill>
@@ -12958,16 +13068,83 @@
                           <a:ea typeface="Calibri" pitchFamily="34" charset="-122"/>
                           <a:cs typeface="Calibri" pitchFamily="34" charset="-120"/>
                         </a:rPr>
-                        <a:t>Depende da rede</a:t>
+                        <a:t>SAN de alto desempenho</a:t>
                       </a:r>
-                      <a:endParaRPr lang="en-US" sz="1200" dirty="0">
+                      <a:endParaRPr lang="en-US" sz="1100" dirty="0">
                         <a:latin typeface="Calibri" charset="0"/>
                         <a:ea typeface="Calibri" charset="0"/>
                         <a:cs typeface="Calibri" charset="0"/>
                       </a:endParaRPr>
                     </a:p>
                   </a:txBody>
-                  <a:tcPr marL="45720" marR="45720" marT="45720" marB="45720" anchor="ctr">
+                  <a:tcPr marL="36576" marR="36576" marT="36576" marB="36576" anchor="ctr">
+                    <a:lnL w="7620" cap="flat" cmpd="sng" algn="ctr">
+                      <a:solidFill>
+                        <a:srgbClr val="DFE3E8"/>
+                      </a:solidFill>
+                      <a:prstDash val="solid"/>
+                      <a:round/>
+                      <a:headEnd type="none" w="med" len="med"/>
+                      <a:tailEnd type="none" w="med" len="med"/>
+                    </a:lnL>
+                    <a:lnR w="7620" cap="flat" cmpd="sng" algn="ctr">
+                      <a:solidFill>
+                        <a:srgbClr val="DFE3E8"/>
+                      </a:solidFill>
+                      <a:prstDash val="solid"/>
+                      <a:round/>
+                      <a:headEnd type="none" w="med" len="med"/>
+                      <a:tailEnd type="none" w="med" len="med"/>
+                    </a:lnR>
+                    <a:lnT w="7620" cap="flat" cmpd="sng" algn="ctr">
+                      <a:solidFill>
+                        <a:srgbClr val="DFE3E8"/>
+                      </a:solidFill>
+                      <a:prstDash val="solid"/>
+                      <a:round/>
+                      <a:headEnd type="none" w="med" len="med"/>
+                      <a:tailEnd type="none" w="med" len="med"/>
+                    </a:lnT>
+                    <a:lnB w="7620" cap="flat" cmpd="sng" algn="ctr">
+                      <a:solidFill>
+                        <a:srgbClr val="DFE3E8"/>
+                      </a:solidFill>
+                      <a:prstDash val="solid"/>
+                      <a:round/>
+                      <a:headEnd type="none" w="med" len="med"/>
+                      <a:tailEnd type="none" w="med" len="med"/>
+                    </a:lnB>
+                  </a:tcPr>
+                </a:tc>
+              </a:tr>
+              <a:tr h="329184">
+                <a:tc>
+                  <a:txBody>
+                    <a:bodyPr/>
+                    <a:lstStyle/>
+                    <a:p>
+                      <a:pPr algn="l" indent="0" marL="0">
+                        <a:buNone/>
+                      </a:pPr>
+                      <a:r>
+                        <a:rPr lang="en-US" sz="1100" dirty="0">
+                          <a:solidFill>
+                            <a:srgbClr val="14181F"/>
+                          </a:solidFill>
+                          <a:latin typeface="Calibri" pitchFamily="34" charset="0"/>
+                          <a:ea typeface="Calibri" pitchFamily="34" charset="-122"/>
+                          <a:cs typeface="Calibri" pitchFamily="34" charset="-120"/>
+                        </a:rPr>
+                        <a:t>NVMe/RoCE v2</a:t>
+                      </a:r>
+                      <a:endParaRPr lang="en-US" sz="1100" dirty="0">
+                        <a:latin typeface="Calibri" charset="0"/>
+                        <a:ea typeface="Calibri" charset="0"/>
+                        <a:cs typeface="Calibri" charset="0"/>
+                      </a:endParaRPr>
+                    </a:p>
+                  </a:txBody>
+                  <a:tcPr marL="36576" marR="36576" marT="36576" marB="36576" anchor="ctr">
                     <a:lnL w="7620" cap="flat" cmpd="sng" algn="ctr">
                       <a:solidFill>
                         <a:srgbClr val="DFE3E8"/>
@@ -13015,7 +13192,7 @@
                         <a:buNone/>
                       </a:pPr>
                       <a:r>
-                        <a:rPr lang="en-US" sz="1200" dirty="0">
+                        <a:rPr lang="en-US" sz="1100" dirty="0">
                           <a:solidFill>
                             <a:srgbClr val="14181F"/>
                           </a:solidFill>
@@ -13023,16 +13200,16 @@
                           <a:ea typeface="Calibri" pitchFamily="34" charset="-122"/>
                           <a:cs typeface="Calibri" pitchFamily="34" charset="-120"/>
                         </a:rPr>
-                        <a:t>IP roteável</a:t>
+                        <a:t>Fabric Ethernet</a:t>
                       </a:r>
-                      <a:endParaRPr lang="en-US" sz="1200" dirty="0">
+                      <a:endParaRPr lang="en-US" sz="1100" dirty="0">
                         <a:latin typeface="Calibri" charset="0"/>
                         <a:ea typeface="Calibri" charset="0"/>
                         <a:cs typeface="Calibri" charset="0"/>
                       </a:endParaRPr>
                     </a:p>
                   </a:txBody>
-                  <a:tcPr marL="45720" marR="45720" marT="45720" marB="45720" anchor="ctr">
+                  <a:tcPr marL="36576" marR="36576" marT="36576" marB="36576" anchor="ctr">
                     <a:lnL w="7620" cap="flat" cmpd="sng" algn="ctr">
                       <a:solidFill>
                         <a:srgbClr val="DFE3E8"/>
@@ -13080,7 +13257,7 @@
                         <a:buNone/>
                       </a:pPr>
                       <a:r>
-                        <a:rPr lang="en-US" sz="1200" dirty="0">
+                        <a:rPr lang="en-US" sz="1100" dirty="0">
                           <a:solidFill>
                             <a:srgbClr val="14181F"/>
                           </a:solidFill>
@@ -13088,83 +13265,16 @@
                           <a:ea typeface="Calibri" pitchFamily="34" charset="-122"/>
                           <a:cs typeface="Calibri" pitchFamily="34" charset="-120"/>
                         </a:rPr>
-                        <a:t>Comandos NVMe</a:t>
+                        <a:t>≈ Ethernet</a:t>
                       </a:r>
-                      <a:endParaRPr lang="en-US" sz="1200" dirty="0">
+                      <a:endParaRPr lang="en-US" sz="1100" dirty="0">
                         <a:latin typeface="Calibri" charset="0"/>
                         <a:ea typeface="Calibri" charset="0"/>
                         <a:cs typeface="Calibri" charset="0"/>
                       </a:endParaRPr>
                     </a:p>
                   </a:txBody>
-                  <a:tcPr marL="45720" marR="45720" marT="45720" marB="45720" anchor="ctr">
-                    <a:lnL w="7620" cap="flat" cmpd="sng" algn="ctr">
-                      <a:solidFill>
-                        <a:srgbClr val="DFE3E8"/>
-                      </a:solidFill>
-                      <a:prstDash val="solid"/>
-                      <a:round/>
-                      <a:headEnd type="none" w="med" len="med"/>
-                      <a:tailEnd type="none" w="med" len="med"/>
-                    </a:lnL>
-                    <a:lnR w="7620" cap="flat" cmpd="sng" algn="ctr">
-                      <a:solidFill>
-                        <a:srgbClr val="DFE3E8"/>
-                      </a:solidFill>
-                      <a:prstDash val="solid"/>
-                      <a:round/>
-                      <a:headEnd type="none" w="med" len="med"/>
-                      <a:tailEnd type="none" w="med" len="med"/>
-                    </a:lnR>
-                    <a:lnT w="7620" cap="flat" cmpd="sng" algn="ctr">
-                      <a:solidFill>
-                        <a:srgbClr val="DFE3E8"/>
-                      </a:solidFill>
-                      <a:prstDash val="solid"/>
-                      <a:round/>
-                      <a:headEnd type="none" w="med" len="med"/>
-                      <a:tailEnd type="none" w="med" len="med"/>
-                    </a:lnT>
-                    <a:lnB w="7620" cap="flat" cmpd="sng" algn="ctr">
-                      <a:solidFill>
-                        <a:srgbClr val="DFE3E8"/>
-                      </a:solidFill>
-                      <a:prstDash val="solid"/>
-                      <a:round/>
-                      <a:headEnd type="none" w="med" len="med"/>
-                      <a:tailEnd type="none" w="med" len="med"/>
-                    </a:lnB>
-                  </a:tcPr>
-                </a:tc>
-              </a:tr>
-              <a:tr h="393192">
-                <a:tc>
-                  <a:txBody>
-                    <a:bodyPr/>
-                    <a:lstStyle/>
-                    <a:p>
-                      <a:pPr algn="l" indent="0" marL="0">
-                        <a:buNone/>
-                      </a:pPr>
-                      <a:r>
-                        <a:rPr lang="en-US" sz="1200" dirty="0">
-                          <a:solidFill>
-                            <a:srgbClr val="14181F"/>
-                          </a:solidFill>
-                          <a:latin typeface="Calibri" pitchFamily="34" charset="0"/>
-                          <a:ea typeface="Calibri" pitchFamily="34" charset="-122"/>
-                          <a:cs typeface="Calibri" pitchFamily="34" charset="-120"/>
-                        </a:rPr>
-                        <a:t>InfiniBand XDR 4×</a:t>
-                      </a:r>
-                      <a:endParaRPr lang="en-US" sz="1200" dirty="0">
-                        <a:latin typeface="Calibri" charset="0"/>
-                        <a:ea typeface="Calibri" charset="0"/>
-                        <a:cs typeface="Calibri" charset="0"/>
-                      </a:endParaRPr>
-                    </a:p>
-                  </a:txBody>
-                  <a:tcPr marL="45720" marR="45720" marT="45720" marB="45720" anchor="ctr">
+                  <a:tcPr marL="36576" marR="36576" marT="36576" marB="36576" anchor="ctr">
                     <a:lnL w="7620" cap="flat" cmpd="sng" algn="ctr">
                       <a:solidFill>
                         <a:srgbClr val="DFE3E8"/>
@@ -13212,7 +13322,7 @@
                         <a:buNone/>
                       </a:pPr>
                       <a:r>
-                        <a:rPr lang="en-US" sz="1200" dirty="0">
+                        <a:rPr lang="en-US" sz="1100" dirty="0">
                           <a:solidFill>
                             <a:srgbClr val="14181F"/>
                           </a:solidFill>
@@ -13220,16 +13330,16 @@
                           <a:ea typeface="Calibri" pitchFamily="34" charset="-122"/>
                           <a:cs typeface="Calibri" pitchFamily="34" charset="-120"/>
                         </a:rPr>
-                        <a:t>Serial</a:t>
+                        <a:t>41–163 µs (P99,99)</a:t>
                       </a:r>
-                      <a:endParaRPr lang="en-US" sz="1200" dirty="0">
+                      <a:endParaRPr lang="en-US" sz="1100" dirty="0">
                         <a:latin typeface="Calibri" charset="0"/>
                         <a:ea typeface="Calibri" charset="0"/>
                         <a:cs typeface="Calibri" charset="0"/>
                       </a:endParaRPr>
                     </a:p>
                   </a:txBody>
-                  <a:tcPr marL="45720" marR="45720" marT="45720" marB="45720" anchor="ctr">
+                  <a:tcPr marL="36576" marR="36576" marT="36576" marB="36576" anchor="ctr">
                     <a:lnL w="7620" cap="flat" cmpd="sng" algn="ctr">
                       <a:solidFill>
                         <a:srgbClr val="DFE3E8"/>
@@ -13277,7 +13387,7 @@
                         <a:buNone/>
                       </a:pPr>
                       <a:r>
-                        <a:rPr lang="en-US" sz="1200" dirty="0">
+                        <a:rPr lang="en-US" sz="1100" dirty="0">
                           <a:solidFill>
                             <a:srgbClr val="14181F"/>
                           </a:solidFill>
@@ -13285,16 +13395,16 @@
                           <a:ea typeface="Calibri" pitchFamily="34" charset="-122"/>
                           <a:cs typeface="Calibri" pitchFamily="34" charset="-120"/>
                         </a:rPr>
-                        <a:t>800 Gb/s nominal</a:t>
+                        <a:t>≤ 1 km</a:t>
                       </a:r>
-                      <a:endParaRPr lang="en-US" sz="1200" dirty="0">
+                      <a:endParaRPr lang="en-US" sz="1100" dirty="0">
                         <a:latin typeface="Calibri" charset="0"/>
                         <a:ea typeface="Calibri" charset="0"/>
                         <a:cs typeface="Calibri" charset="0"/>
                       </a:endParaRPr>
                     </a:p>
                   </a:txBody>
-                  <a:tcPr marL="45720" marR="45720" marT="45720" marB="45720" anchor="ctr">
+                  <a:tcPr marL="36576" marR="36576" marT="36576" marB="36576" anchor="ctr">
                     <a:lnL w="7620" cap="flat" cmpd="sng" algn="ctr">
                       <a:solidFill>
                         <a:srgbClr val="DFE3E8"/>
@@ -13342,7 +13452,7 @@
                         <a:buNone/>
                       </a:pPr>
                       <a:r>
-                        <a:rPr lang="en-US" sz="1200" dirty="0">
+                        <a:rPr lang="en-US" sz="1100" dirty="0">
                           <a:solidFill>
                             <a:srgbClr val="14181F"/>
                           </a:solidFill>
@@ -13350,16 +13460,83 @@
                           <a:ea typeface="Calibri" pitchFamily="34" charset="-122"/>
                           <a:cs typeface="Calibri" pitchFamily="34" charset="-120"/>
                         </a:rPr>
-                        <a:t>Depende do cabo/óptica</a:t>
+                        <a:t>SAN de baixa latência</a:t>
                       </a:r>
-                      <a:endParaRPr lang="en-US" sz="1200" dirty="0">
+                      <a:endParaRPr lang="en-US" sz="1100" dirty="0">
                         <a:latin typeface="Calibri" charset="0"/>
                         <a:ea typeface="Calibri" charset="0"/>
                         <a:cs typeface="Calibri" charset="0"/>
                       </a:endParaRPr>
                     </a:p>
                   </a:txBody>
-                  <a:tcPr marL="45720" marR="45720" marT="45720" marB="45720" anchor="ctr">
+                  <a:tcPr marL="36576" marR="36576" marT="36576" marB="36576" anchor="ctr">
+                    <a:lnL w="7620" cap="flat" cmpd="sng" algn="ctr">
+                      <a:solidFill>
+                        <a:srgbClr val="DFE3E8"/>
+                      </a:solidFill>
+                      <a:prstDash val="solid"/>
+                      <a:round/>
+                      <a:headEnd type="none" w="med" len="med"/>
+                      <a:tailEnd type="none" w="med" len="med"/>
+                    </a:lnL>
+                    <a:lnR w="7620" cap="flat" cmpd="sng" algn="ctr">
+                      <a:solidFill>
+                        <a:srgbClr val="DFE3E8"/>
+                      </a:solidFill>
+                      <a:prstDash val="solid"/>
+                      <a:round/>
+                      <a:headEnd type="none" w="med" len="med"/>
+                      <a:tailEnd type="none" w="med" len="med"/>
+                    </a:lnR>
+                    <a:lnT w="7620" cap="flat" cmpd="sng" algn="ctr">
+                      <a:solidFill>
+                        <a:srgbClr val="DFE3E8"/>
+                      </a:solidFill>
+                      <a:prstDash val="solid"/>
+                      <a:round/>
+                      <a:headEnd type="none" w="med" len="med"/>
+                      <a:tailEnd type="none" w="med" len="med"/>
+                    </a:lnT>
+                    <a:lnB w="7620" cap="flat" cmpd="sng" algn="ctr">
+                      <a:solidFill>
+                        <a:srgbClr val="DFE3E8"/>
+                      </a:solidFill>
+                      <a:prstDash val="solid"/>
+                      <a:round/>
+                      <a:headEnd type="none" w="med" len="med"/>
+                      <a:tailEnd type="none" w="med" len="med"/>
+                    </a:lnB>
+                  </a:tcPr>
+                </a:tc>
+              </a:tr>
+              <a:tr h="329184">
+                <a:tc>
+                  <a:txBody>
+                    <a:bodyPr/>
+                    <a:lstStyle/>
+                    <a:p>
+                      <a:pPr algn="l" indent="0" marL="0">
+                        <a:buNone/>
+                      </a:pPr>
+                      <a:r>
+                        <a:rPr lang="en-US" sz="1100" dirty="0">
+                          <a:solidFill>
+                            <a:srgbClr val="14181F"/>
+                          </a:solidFill>
+                          <a:latin typeface="Calibri" pitchFamily="34" charset="0"/>
+                          <a:ea typeface="Calibri" pitchFamily="34" charset="-122"/>
+                          <a:cs typeface="Calibri" pitchFamily="34" charset="-120"/>
+                        </a:rPr>
+                        <a:t>NVMe/TCP</a:t>
+                      </a:r>
+                      <a:endParaRPr lang="en-US" sz="1100" dirty="0">
+                        <a:latin typeface="Calibri" charset="0"/>
+                        <a:ea typeface="Calibri" charset="0"/>
+                        <a:cs typeface="Calibri" charset="0"/>
+                      </a:endParaRPr>
+                    </a:p>
+                  </a:txBody>
+                  <a:tcPr marL="36576" marR="36576" marT="36576" marB="36576" anchor="ctr">
                     <a:lnL w="7620" cap="flat" cmpd="sng" algn="ctr">
                       <a:solidFill>
                         <a:srgbClr val="DFE3E8"/>
@@ -13407,7 +13584,7 @@
                         <a:buNone/>
                       </a:pPr>
                       <a:r>
-                        <a:rPr lang="en-US" sz="1200" dirty="0">
+                        <a:rPr lang="en-US" sz="1100" dirty="0">
                           <a:solidFill>
                             <a:srgbClr val="14181F"/>
                           </a:solidFill>
@@ -13415,16 +13592,1060 @@
                           <a:ea typeface="Calibri" pitchFamily="34" charset="-122"/>
                           <a:cs typeface="Calibri" pitchFamily="34" charset="-120"/>
                         </a:rPr>
-                        <a:t>HPC e IA</a:t>
+                        <a:t>Fabric IP</a:t>
                       </a:r>
-                      <a:endParaRPr lang="en-US" sz="1200" dirty="0">
+                      <a:endParaRPr lang="en-US" sz="1100" dirty="0">
                         <a:latin typeface="Calibri" charset="0"/>
                         <a:ea typeface="Calibri" charset="0"/>
                         <a:cs typeface="Calibri" charset="0"/>
                       </a:endParaRPr>
                     </a:p>
                   </a:txBody>
-                  <a:tcPr marL="45720" marR="45720" marT="45720" marB="45720" anchor="ctr">
+                  <a:tcPr marL="36576" marR="36576" marT="36576" marB="36576" anchor="ctr">
+                    <a:lnL w="7620" cap="flat" cmpd="sng" algn="ctr">
+                      <a:solidFill>
+                        <a:srgbClr val="DFE3E8"/>
+                      </a:solidFill>
+                      <a:prstDash val="solid"/>
+                      <a:round/>
+                      <a:headEnd type="none" w="med" len="med"/>
+                      <a:tailEnd type="none" w="med" len="med"/>
+                    </a:lnL>
+                    <a:lnR w="7620" cap="flat" cmpd="sng" algn="ctr">
+                      <a:solidFill>
+                        <a:srgbClr val="DFE3E8"/>
+                      </a:solidFill>
+                      <a:prstDash val="solid"/>
+                      <a:round/>
+                      <a:headEnd type="none" w="med" len="med"/>
+                      <a:tailEnd type="none" w="med" len="med"/>
+                    </a:lnR>
+                    <a:lnT w="7620" cap="flat" cmpd="sng" algn="ctr">
+                      <a:solidFill>
+                        <a:srgbClr val="DFE3E8"/>
+                      </a:solidFill>
+                      <a:prstDash val="solid"/>
+                      <a:round/>
+                      <a:headEnd type="none" w="med" len="med"/>
+                      <a:tailEnd type="none" w="med" len="med"/>
+                    </a:lnT>
+                    <a:lnB w="7620" cap="flat" cmpd="sng" algn="ctr">
+                      <a:solidFill>
+                        <a:srgbClr val="DFE3E8"/>
+                      </a:solidFill>
+                      <a:prstDash val="solid"/>
+                      <a:round/>
+                      <a:headEnd type="none" w="med" len="med"/>
+                      <a:tailEnd type="none" w="med" len="med"/>
+                    </a:lnB>
+                  </a:tcPr>
+                </a:tc>
+                <a:tc>
+                  <a:txBody>
+                    <a:bodyPr/>
+                    <a:lstStyle/>
+                    <a:p>
+                      <a:pPr algn="l" indent="0" marL="0">
+                        <a:buNone/>
+                      </a:pPr>
+                      <a:r>
+                        <a:rPr lang="en-US" sz="1100" dirty="0">
+                          <a:solidFill>
+                            <a:srgbClr val="14181F"/>
+                          </a:solidFill>
+                          <a:latin typeface="Calibri" pitchFamily="34" charset="0"/>
+                          <a:ea typeface="Calibri" pitchFamily="34" charset="-122"/>
+                          <a:cs typeface="Calibri" pitchFamily="34" charset="-120"/>
+                        </a:rPr>
+                        <a:t>≈ Ethernet</a:t>
+                      </a:r>
+                      <a:endParaRPr lang="en-US" sz="1100" dirty="0">
+                        <a:latin typeface="Calibri" charset="0"/>
+                        <a:ea typeface="Calibri" charset="0"/>
+                        <a:cs typeface="Calibri" charset="0"/>
+                      </a:endParaRPr>
+                    </a:p>
+                  </a:txBody>
+                  <a:tcPr marL="36576" marR="36576" marT="36576" marB="36576" anchor="ctr">
+                    <a:lnL w="7620" cap="flat" cmpd="sng" algn="ctr">
+                      <a:solidFill>
+                        <a:srgbClr val="DFE3E8"/>
+                      </a:solidFill>
+                      <a:prstDash val="solid"/>
+                      <a:round/>
+                      <a:headEnd type="none" w="med" len="med"/>
+                      <a:tailEnd type="none" w="med" len="med"/>
+                    </a:lnL>
+                    <a:lnR w="7620" cap="flat" cmpd="sng" algn="ctr">
+                      <a:solidFill>
+                        <a:srgbClr val="DFE3E8"/>
+                      </a:solidFill>
+                      <a:prstDash val="solid"/>
+                      <a:round/>
+                      <a:headEnd type="none" w="med" len="med"/>
+                      <a:tailEnd type="none" w="med" len="med"/>
+                    </a:lnR>
+                    <a:lnT w="7620" cap="flat" cmpd="sng" algn="ctr">
+                      <a:solidFill>
+                        <a:srgbClr val="DFE3E8"/>
+                      </a:solidFill>
+                      <a:prstDash val="solid"/>
+                      <a:round/>
+                      <a:headEnd type="none" w="med" len="med"/>
+                      <a:tailEnd type="none" w="med" len="med"/>
+                    </a:lnT>
+                    <a:lnB w="7620" cap="flat" cmpd="sng" algn="ctr">
+                      <a:solidFill>
+                        <a:srgbClr val="DFE3E8"/>
+                      </a:solidFill>
+                      <a:prstDash val="solid"/>
+                      <a:round/>
+                      <a:headEnd type="none" w="med" len="med"/>
+                      <a:tailEnd type="none" w="med" len="med"/>
+                    </a:lnB>
+                  </a:tcPr>
+                </a:tc>
+                <a:tc>
+                  <a:txBody>
+                    <a:bodyPr/>
+                    <a:lstStyle/>
+                    <a:p>
+                      <a:pPr algn="l" indent="0" marL="0">
+                        <a:buNone/>
+                      </a:pPr>
+                      <a:r>
+                        <a:rPr lang="en-US" sz="1100" dirty="0">
+                          <a:solidFill>
+                            <a:srgbClr val="14181F"/>
+                          </a:solidFill>
+                          <a:latin typeface="Calibri" pitchFamily="34" charset="0"/>
+                          <a:ea typeface="Calibri" pitchFamily="34" charset="-122"/>
+                          <a:cs typeface="Calibri" pitchFamily="34" charset="-120"/>
+                        </a:rPr>
+                        <a:t>122–177 µs (P99,99)</a:t>
+                      </a:r>
+                      <a:endParaRPr lang="en-US" sz="1100" dirty="0">
+                        <a:latin typeface="Calibri" charset="0"/>
+                        <a:ea typeface="Calibri" charset="0"/>
+                        <a:cs typeface="Calibri" charset="0"/>
+                      </a:endParaRPr>
+                    </a:p>
+                  </a:txBody>
+                  <a:tcPr marL="36576" marR="36576" marT="36576" marB="36576" anchor="ctr">
+                    <a:lnL w="7620" cap="flat" cmpd="sng" algn="ctr">
+                      <a:solidFill>
+                        <a:srgbClr val="DFE3E8"/>
+                      </a:solidFill>
+                      <a:prstDash val="solid"/>
+                      <a:round/>
+                      <a:headEnd type="none" w="med" len="med"/>
+                      <a:tailEnd type="none" w="med" len="med"/>
+                    </a:lnL>
+                    <a:lnR w="7620" cap="flat" cmpd="sng" algn="ctr">
+                      <a:solidFill>
+                        <a:srgbClr val="DFE3E8"/>
+                      </a:solidFill>
+                      <a:prstDash val="solid"/>
+                      <a:round/>
+                      <a:headEnd type="none" w="med" len="med"/>
+                      <a:tailEnd type="none" w="med" len="med"/>
+                    </a:lnR>
+                    <a:lnT w="7620" cap="flat" cmpd="sng" algn="ctr">
+                      <a:solidFill>
+                        <a:srgbClr val="DFE3E8"/>
+                      </a:solidFill>
+                      <a:prstDash val="solid"/>
+                      <a:round/>
+                      <a:headEnd type="none" w="med" len="med"/>
+                      <a:tailEnd type="none" w="med" len="med"/>
+                    </a:lnT>
+                    <a:lnB w="7620" cap="flat" cmpd="sng" algn="ctr">
+                      <a:solidFill>
+                        <a:srgbClr val="DFE3E8"/>
+                      </a:solidFill>
+                      <a:prstDash val="solid"/>
+                      <a:round/>
+                      <a:headEnd type="none" w="med" len="med"/>
+                      <a:tailEnd type="none" w="med" len="med"/>
+                    </a:lnB>
+                  </a:tcPr>
+                </a:tc>
+                <a:tc>
+                  <a:txBody>
+                    <a:bodyPr/>
+                    <a:lstStyle/>
+                    <a:p>
+                      <a:pPr algn="l" indent="0" marL="0">
+                        <a:buNone/>
+                      </a:pPr>
+                      <a:r>
+                        <a:rPr lang="en-US" sz="1100" dirty="0">
+                          <a:solidFill>
+                            <a:srgbClr val="14181F"/>
+                          </a:solidFill>
+                          <a:latin typeface="Calibri" pitchFamily="34" charset="0"/>
+                          <a:ea typeface="Calibri" pitchFamily="34" charset="-122"/>
+                          <a:cs typeface="Calibri" pitchFamily="34" charset="-120"/>
+                        </a:rPr>
+                        <a:t>Roteável</a:t>
+                      </a:r>
+                      <a:endParaRPr lang="en-US" sz="1100" dirty="0">
+                        <a:latin typeface="Calibri" charset="0"/>
+                        <a:ea typeface="Calibri" charset="0"/>
+                        <a:cs typeface="Calibri" charset="0"/>
+                      </a:endParaRPr>
+                    </a:p>
+                  </a:txBody>
+                  <a:tcPr marL="36576" marR="36576" marT="36576" marB="36576" anchor="ctr">
+                    <a:lnL w="7620" cap="flat" cmpd="sng" algn="ctr">
+                      <a:solidFill>
+                        <a:srgbClr val="DFE3E8"/>
+                      </a:solidFill>
+                      <a:prstDash val="solid"/>
+                      <a:round/>
+                      <a:headEnd type="none" w="med" len="med"/>
+                      <a:tailEnd type="none" w="med" len="med"/>
+                    </a:lnL>
+                    <a:lnR w="7620" cap="flat" cmpd="sng" algn="ctr">
+                      <a:solidFill>
+                        <a:srgbClr val="DFE3E8"/>
+                      </a:solidFill>
+                      <a:prstDash val="solid"/>
+                      <a:round/>
+                      <a:headEnd type="none" w="med" len="med"/>
+                      <a:tailEnd type="none" w="med" len="med"/>
+                    </a:lnR>
+                    <a:lnT w="7620" cap="flat" cmpd="sng" algn="ctr">
+                      <a:solidFill>
+                        <a:srgbClr val="DFE3E8"/>
+                      </a:solidFill>
+                      <a:prstDash val="solid"/>
+                      <a:round/>
+                      <a:headEnd type="none" w="med" len="med"/>
+                      <a:tailEnd type="none" w="med" len="med"/>
+                    </a:lnT>
+                    <a:lnB w="7620" cap="flat" cmpd="sng" algn="ctr">
+                      <a:solidFill>
+                        <a:srgbClr val="DFE3E8"/>
+                      </a:solidFill>
+                      <a:prstDash val="solid"/>
+                      <a:round/>
+                      <a:headEnd type="none" w="med" len="med"/>
+                      <a:tailEnd type="none" w="med" len="med"/>
+                    </a:lnB>
+                  </a:tcPr>
+                </a:tc>
+                <a:tc>
+                  <a:txBody>
+                    <a:bodyPr/>
+                    <a:lstStyle/>
+                    <a:p>
+                      <a:pPr algn="l" indent="0" marL="0">
+                        <a:buNone/>
+                      </a:pPr>
+                      <a:r>
+                        <a:rPr lang="en-US" sz="1100" dirty="0">
+                          <a:solidFill>
+                            <a:srgbClr val="14181F"/>
+                          </a:solidFill>
+                          <a:latin typeface="Calibri" pitchFamily="34" charset="0"/>
+                          <a:ea typeface="Calibri" pitchFamily="34" charset="-122"/>
+                          <a:cs typeface="Calibri" pitchFamily="34" charset="-120"/>
+                        </a:rPr>
+                        <a:t>Alternativa moderna ao iSCSI</a:t>
+                      </a:r>
+                      <a:endParaRPr lang="en-US" sz="1100" dirty="0">
+                        <a:latin typeface="Calibri" charset="0"/>
+                        <a:ea typeface="Calibri" charset="0"/>
+                        <a:cs typeface="Calibri" charset="0"/>
+                      </a:endParaRPr>
+                    </a:p>
+                  </a:txBody>
+                  <a:tcPr marL="36576" marR="36576" marT="36576" marB="36576" anchor="ctr">
+                    <a:lnL w="7620" cap="flat" cmpd="sng" algn="ctr">
+                      <a:solidFill>
+                        <a:srgbClr val="DFE3E8"/>
+                      </a:solidFill>
+                      <a:prstDash val="solid"/>
+                      <a:round/>
+                      <a:headEnd type="none" w="med" len="med"/>
+                      <a:tailEnd type="none" w="med" len="med"/>
+                    </a:lnL>
+                    <a:lnR w="7620" cap="flat" cmpd="sng" algn="ctr">
+                      <a:solidFill>
+                        <a:srgbClr val="DFE3E8"/>
+                      </a:solidFill>
+                      <a:prstDash val="solid"/>
+                      <a:round/>
+                      <a:headEnd type="none" w="med" len="med"/>
+                      <a:tailEnd type="none" w="med" len="med"/>
+                    </a:lnR>
+                    <a:lnT w="7620" cap="flat" cmpd="sng" algn="ctr">
+                      <a:solidFill>
+                        <a:srgbClr val="DFE3E8"/>
+                      </a:solidFill>
+                      <a:prstDash val="solid"/>
+                      <a:round/>
+                      <a:headEnd type="none" w="med" len="med"/>
+                      <a:tailEnd type="none" w="med" len="med"/>
+                    </a:lnT>
+                    <a:lnB w="7620" cap="flat" cmpd="sng" algn="ctr">
+                      <a:solidFill>
+                        <a:srgbClr val="DFE3E8"/>
+                      </a:solidFill>
+                      <a:prstDash val="solid"/>
+                      <a:round/>
+                      <a:headEnd type="none" w="med" len="med"/>
+                      <a:tailEnd type="none" w="med" len="med"/>
+                    </a:lnB>
+                  </a:tcPr>
+                </a:tc>
+              </a:tr>
+              <a:tr h="329184">
+                <a:tc>
+                  <a:txBody>
+                    <a:bodyPr/>
+                    <a:lstStyle/>
+                    <a:p>
+                      <a:pPr algn="l" indent="0" marL="0">
+                        <a:buNone/>
+                      </a:pPr>
+                      <a:r>
+                        <a:rPr lang="en-US" sz="1100" dirty="0">
+                          <a:solidFill>
+                            <a:srgbClr val="14181F"/>
+                          </a:solidFill>
+                          <a:latin typeface="Calibri" pitchFamily="34" charset="0"/>
+                          <a:ea typeface="Calibri" pitchFamily="34" charset="-122"/>
+                          <a:cs typeface="Calibri" pitchFamily="34" charset="-120"/>
+                        </a:rPr>
+                        <a:t>iSCSI</a:t>
+                      </a:r>
+                      <a:endParaRPr lang="en-US" sz="1100" dirty="0">
+                        <a:latin typeface="Calibri" charset="0"/>
+                        <a:ea typeface="Calibri" charset="0"/>
+                        <a:cs typeface="Calibri" charset="0"/>
+                      </a:endParaRPr>
+                    </a:p>
+                  </a:txBody>
+                  <a:tcPr marL="36576" marR="36576" marT="36576" marB="36576" anchor="ctr">
+                    <a:lnL w="7620" cap="flat" cmpd="sng" algn="ctr">
+                      <a:solidFill>
+                        <a:srgbClr val="DFE3E8"/>
+                      </a:solidFill>
+                      <a:prstDash val="solid"/>
+                      <a:round/>
+                      <a:headEnd type="none" w="med" len="med"/>
+                      <a:tailEnd type="none" w="med" len="med"/>
+                    </a:lnL>
+                    <a:lnR w="7620" cap="flat" cmpd="sng" algn="ctr">
+                      <a:solidFill>
+                        <a:srgbClr val="DFE3E8"/>
+                      </a:solidFill>
+                      <a:prstDash val="solid"/>
+                      <a:round/>
+                      <a:headEnd type="none" w="med" len="med"/>
+                      <a:tailEnd type="none" w="med" len="med"/>
+                    </a:lnR>
+                    <a:lnT w="7620" cap="flat" cmpd="sng" algn="ctr">
+                      <a:solidFill>
+                        <a:srgbClr val="DFE3E8"/>
+                      </a:solidFill>
+                      <a:prstDash val="solid"/>
+                      <a:round/>
+                      <a:headEnd type="none" w="med" len="med"/>
+                      <a:tailEnd type="none" w="med" len="med"/>
+                    </a:lnT>
+                    <a:lnB w="7620" cap="flat" cmpd="sng" algn="ctr">
+                      <a:solidFill>
+                        <a:srgbClr val="DFE3E8"/>
+                      </a:solidFill>
+                      <a:prstDash val="solid"/>
+                      <a:round/>
+                      <a:headEnd type="none" w="med" len="med"/>
+                      <a:tailEnd type="none" w="med" len="med"/>
+                    </a:lnB>
+                  </a:tcPr>
+                </a:tc>
+                <a:tc>
+                  <a:txBody>
+                    <a:bodyPr/>
+                    <a:lstStyle/>
+                    <a:p>
+                      <a:pPr algn="l" indent="0" marL="0">
+                        <a:buNone/>
+                      </a:pPr>
+                      <a:r>
+                        <a:rPr lang="en-US" sz="1100" dirty="0">
+                          <a:solidFill>
+                            <a:srgbClr val="14181F"/>
+                          </a:solidFill>
+                          <a:latin typeface="Calibri" pitchFamily="34" charset="0"/>
+                          <a:ea typeface="Calibri" pitchFamily="34" charset="-122"/>
+                          <a:cs typeface="Calibri" pitchFamily="34" charset="-120"/>
+                        </a:rPr>
+                        <a:t>Protocolo sobre IP</a:t>
+                      </a:r>
+                      <a:endParaRPr lang="en-US" sz="1100" dirty="0">
+                        <a:latin typeface="Calibri" charset="0"/>
+                        <a:ea typeface="Calibri" charset="0"/>
+                        <a:cs typeface="Calibri" charset="0"/>
+                      </a:endParaRPr>
+                    </a:p>
+                  </a:txBody>
+                  <a:tcPr marL="36576" marR="36576" marT="36576" marB="36576" anchor="ctr">
+                    <a:lnL w="7620" cap="flat" cmpd="sng" algn="ctr">
+                      <a:solidFill>
+                        <a:srgbClr val="DFE3E8"/>
+                      </a:solidFill>
+                      <a:prstDash val="solid"/>
+                      <a:round/>
+                      <a:headEnd type="none" w="med" len="med"/>
+                      <a:tailEnd type="none" w="med" len="med"/>
+                    </a:lnL>
+                    <a:lnR w="7620" cap="flat" cmpd="sng" algn="ctr">
+                      <a:solidFill>
+                        <a:srgbClr val="DFE3E8"/>
+                      </a:solidFill>
+                      <a:prstDash val="solid"/>
+                      <a:round/>
+                      <a:headEnd type="none" w="med" len="med"/>
+                      <a:tailEnd type="none" w="med" len="med"/>
+                    </a:lnR>
+                    <a:lnT w="7620" cap="flat" cmpd="sng" algn="ctr">
+                      <a:solidFill>
+                        <a:srgbClr val="DFE3E8"/>
+                      </a:solidFill>
+                      <a:prstDash val="solid"/>
+                      <a:round/>
+                      <a:headEnd type="none" w="med" len="med"/>
+                      <a:tailEnd type="none" w="med" len="med"/>
+                    </a:lnT>
+                    <a:lnB w="7620" cap="flat" cmpd="sng" algn="ctr">
+                      <a:solidFill>
+                        <a:srgbClr val="DFE3E8"/>
+                      </a:solidFill>
+                      <a:prstDash val="solid"/>
+                      <a:round/>
+                      <a:headEnd type="none" w="med" len="med"/>
+                      <a:tailEnd type="none" w="med" len="med"/>
+                    </a:lnB>
+                  </a:tcPr>
+                </a:tc>
+                <a:tc>
+                  <a:txBody>
+                    <a:bodyPr/>
+                    <a:lstStyle/>
+                    <a:p>
+                      <a:pPr algn="l" indent="0" marL="0">
+                        <a:buNone/>
+                      </a:pPr>
+                      <a:r>
+                        <a:rPr lang="en-US" sz="1100" dirty="0">
+                          <a:solidFill>
+                            <a:srgbClr val="14181F"/>
+                          </a:solidFill>
+                          <a:latin typeface="Calibri" pitchFamily="34" charset="0"/>
+                          <a:ea typeface="Calibri" pitchFamily="34" charset="-122"/>
+                          <a:cs typeface="Calibri" pitchFamily="34" charset="-120"/>
+                        </a:rPr>
+                        <a:t>110 MB/s a 11 GB/s</a:t>
+                      </a:r>
+                      <a:endParaRPr lang="en-US" sz="1100" dirty="0">
+                        <a:latin typeface="Calibri" charset="0"/>
+                        <a:ea typeface="Calibri" charset="0"/>
+                        <a:cs typeface="Calibri" charset="0"/>
+                      </a:endParaRPr>
+                    </a:p>
+                  </a:txBody>
+                  <a:tcPr marL="36576" marR="36576" marT="36576" marB="36576" anchor="ctr">
+                    <a:lnL w="7620" cap="flat" cmpd="sng" algn="ctr">
+                      <a:solidFill>
+                        <a:srgbClr val="DFE3E8"/>
+                      </a:solidFill>
+                      <a:prstDash val="solid"/>
+                      <a:round/>
+                      <a:headEnd type="none" w="med" len="med"/>
+                      <a:tailEnd type="none" w="med" len="med"/>
+                    </a:lnL>
+                    <a:lnR w="7620" cap="flat" cmpd="sng" algn="ctr">
+                      <a:solidFill>
+                        <a:srgbClr val="DFE3E8"/>
+                      </a:solidFill>
+                      <a:prstDash val="solid"/>
+                      <a:round/>
+                      <a:headEnd type="none" w="med" len="med"/>
+                      <a:tailEnd type="none" w="med" len="med"/>
+                    </a:lnR>
+                    <a:lnT w="7620" cap="flat" cmpd="sng" algn="ctr">
+                      <a:solidFill>
+                        <a:srgbClr val="DFE3E8"/>
+                      </a:solidFill>
+                      <a:prstDash val="solid"/>
+                      <a:round/>
+                      <a:headEnd type="none" w="med" len="med"/>
+                      <a:tailEnd type="none" w="med" len="med"/>
+                    </a:lnT>
+                    <a:lnB w="7620" cap="flat" cmpd="sng" algn="ctr">
+                      <a:solidFill>
+                        <a:srgbClr val="DFE3E8"/>
+                      </a:solidFill>
+                      <a:prstDash val="solid"/>
+                      <a:round/>
+                      <a:headEnd type="none" w="med" len="med"/>
+                      <a:tailEnd type="none" w="med" len="med"/>
+                    </a:lnB>
+                  </a:tcPr>
+                </a:tc>
+                <a:tc>
+                  <a:txBody>
+                    <a:bodyPr/>
+                    <a:lstStyle/>
+                    <a:p>
+                      <a:pPr algn="l" indent="0" marL="0">
+                        <a:buNone/>
+                      </a:pPr>
+                      <a:r>
+                        <a:rPr lang="en-US" sz="1100" dirty="0">
+                          <a:solidFill>
+                            <a:srgbClr val="14181F"/>
+                          </a:solidFill>
+                          <a:latin typeface="Calibri" pitchFamily="34" charset="0"/>
+                          <a:ea typeface="Calibri" pitchFamily="34" charset="-122"/>
+                          <a:cs typeface="Calibri" pitchFamily="34" charset="-120"/>
+                        </a:rPr>
+                        <a:t>500–800 µs</a:t>
+                      </a:r>
+                      <a:endParaRPr lang="en-US" sz="1100" dirty="0">
+                        <a:latin typeface="Calibri" charset="0"/>
+                        <a:ea typeface="Calibri" charset="0"/>
+                        <a:cs typeface="Calibri" charset="0"/>
+                      </a:endParaRPr>
+                    </a:p>
+                  </a:txBody>
+                  <a:tcPr marL="36576" marR="36576" marT="36576" marB="36576" anchor="ctr">
+                    <a:lnL w="7620" cap="flat" cmpd="sng" algn="ctr">
+                      <a:solidFill>
+                        <a:srgbClr val="DFE3E8"/>
+                      </a:solidFill>
+                      <a:prstDash val="solid"/>
+                      <a:round/>
+                      <a:headEnd type="none" w="med" len="med"/>
+                      <a:tailEnd type="none" w="med" len="med"/>
+                    </a:lnL>
+                    <a:lnR w="7620" cap="flat" cmpd="sng" algn="ctr">
+                      <a:solidFill>
+                        <a:srgbClr val="DFE3E8"/>
+                      </a:solidFill>
+                      <a:prstDash val="solid"/>
+                      <a:round/>
+                      <a:headEnd type="none" w="med" len="med"/>
+                      <a:tailEnd type="none" w="med" len="med"/>
+                    </a:lnR>
+                    <a:lnT w="7620" cap="flat" cmpd="sng" algn="ctr">
+                      <a:solidFill>
+                        <a:srgbClr val="DFE3E8"/>
+                      </a:solidFill>
+                      <a:prstDash val="solid"/>
+                      <a:round/>
+                      <a:headEnd type="none" w="med" len="med"/>
+                      <a:tailEnd type="none" w="med" len="med"/>
+                    </a:lnT>
+                    <a:lnB w="7620" cap="flat" cmpd="sng" algn="ctr">
+                      <a:solidFill>
+                        <a:srgbClr val="DFE3E8"/>
+                      </a:solidFill>
+                      <a:prstDash val="solid"/>
+                      <a:round/>
+                      <a:headEnd type="none" w="med" len="med"/>
+                      <a:tailEnd type="none" w="med" len="med"/>
+                    </a:lnB>
+                  </a:tcPr>
+                </a:tc>
+                <a:tc>
+                  <a:txBody>
+                    <a:bodyPr/>
+                    <a:lstStyle/>
+                    <a:p>
+                      <a:pPr algn="l" indent="0" marL="0">
+                        <a:buNone/>
+                      </a:pPr>
+                      <a:r>
+                        <a:rPr lang="en-US" sz="1100" dirty="0">
+                          <a:solidFill>
+                            <a:srgbClr val="14181F"/>
+                          </a:solidFill>
+                          <a:latin typeface="Calibri" pitchFamily="34" charset="0"/>
+                          <a:ea typeface="Calibri" pitchFamily="34" charset="-122"/>
+                          <a:cs typeface="Calibri" pitchFamily="34" charset="-120"/>
+                        </a:rPr>
+                        <a:t>Ilimitada (IP)</a:t>
+                      </a:r>
+                      <a:endParaRPr lang="en-US" sz="1100" dirty="0">
+                        <a:latin typeface="Calibri" charset="0"/>
+                        <a:ea typeface="Calibri" charset="0"/>
+                        <a:cs typeface="Calibri" charset="0"/>
+                      </a:endParaRPr>
+                    </a:p>
+                  </a:txBody>
+                  <a:tcPr marL="36576" marR="36576" marT="36576" marB="36576" anchor="ctr">
+                    <a:lnL w="7620" cap="flat" cmpd="sng" algn="ctr">
+                      <a:solidFill>
+                        <a:srgbClr val="DFE3E8"/>
+                      </a:solidFill>
+                      <a:prstDash val="solid"/>
+                      <a:round/>
+                      <a:headEnd type="none" w="med" len="med"/>
+                      <a:tailEnd type="none" w="med" len="med"/>
+                    </a:lnL>
+                    <a:lnR w="7620" cap="flat" cmpd="sng" algn="ctr">
+                      <a:solidFill>
+                        <a:srgbClr val="DFE3E8"/>
+                      </a:solidFill>
+                      <a:prstDash val="solid"/>
+                      <a:round/>
+                      <a:headEnd type="none" w="med" len="med"/>
+                      <a:tailEnd type="none" w="med" len="med"/>
+                    </a:lnR>
+                    <a:lnT w="7620" cap="flat" cmpd="sng" algn="ctr">
+                      <a:solidFill>
+                        <a:srgbClr val="DFE3E8"/>
+                      </a:solidFill>
+                      <a:prstDash val="solid"/>
+                      <a:round/>
+                      <a:headEnd type="none" w="med" len="med"/>
+                      <a:tailEnd type="none" w="med" len="med"/>
+                    </a:lnT>
+                    <a:lnB w="7620" cap="flat" cmpd="sng" algn="ctr">
+                      <a:solidFill>
+                        <a:srgbClr val="DFE3E8"/>
+                      </a:solidFill>
+                      <a:prstDash val="solid"/>
+                      <a:round/>
+                      <a:headEnd type="none" w="med" len="med"/>
+                      <a:tailEnd type="none" w="med" len="med"/>
+                    </a:lnB>
+                  </a:tcPr>
+                </a:tc>
+                <a:tc>
+                  <a:txBody>
+                    <a:bodyPr/>
+                    <a:lstStyle/>
+                    <a:p>
+                      <a:pPr algn="l" indent="0" marL="0">
+                        <a:buNone/>
+                      </a:pPr>
+                      <a:r>
+                        <a:rPr lang="en-US" sz="1100" dirty="0">
+                          <a:solidFill>
+                            <a:srgbClr val="14181F"/>
+                          </a:solidFill>
+                          <a:latin typeface="Calibri" pitchFamily="34" charset="0"/>
+                          <a:ea typeface="Calibri" pitchFamily="34" charset="-122"/>
+                          <a:cs typeface="Calibri" pitchFamily="34" charset="-120"/>
+                        </a:rPr>
+                        <a:t>PME, virtualização</a:t>
+                      </a:r>
+                      <a:endParaRPr lang="en-US" sz="1100" dirty="0">
+                        <a:latin typeface="Calibri" charset="0"/>
+                        <a:ea typeface="Calibri" charset="0"/>
+                        <a:cs typeface="Calibri" charset="0"/>
+                      </a:endParaRPr>
+                    </a:p>
+                  </a:txBody>
+                  <a:tcPr marL="36576" marR="36576" marT="36576" marB="36576" anchor="ctr">
+                    <a:lnL w="7620" cap="flat" cmpd="sng" algn="ctr">
+                      <a:solidFill>
+                        <a:srgbClr val="DFE3E8"/>
+                      </a:solidFill>
+                      <a:prstDash val="solid"/>
+                      <a:round/>
+                      <a:headEnd type="none" w="med" len="med"/>
+                      <a:tailEnd type="none" w="med" len="med"/>
+                    </a:lnL>
+                    <a:lnR w="7620" cap="flat" cmpd="sng" algn="ctr">
+                      <a:solidFill>
+                        <a:srgbClr val="DFE3E8"/>
+                      </a:solidFill>
+                      <a:prstDash val="solid"/>
+                      <a:round/>
+                      <a:headEnd type="none" w="med" len="med"/>
+                      <a:tailEnd type="none" w="med" len="med"/>
+                    </a:lnR>
+                    <a:lnT w="7620" cap="flat" cmpd="sng" algn="ctr">
+                      <a:solidFill>
+                        <a:srgbClr val="DFE3E8"/>
+                      </a:solidFill>
+                      <a:prstDash val="solid"/>
+                      <a:round/>
+                      <a:headEnd type="none" w="med" len="med"/>
+                      <a:tailEnd type="none" w="med" len="med"/>
+                    </a:lnT>
+                    <a:lnB w="7620" cap="flat" cmpd="sng" algn="ctr">
+                      <a:solidFill>
+                        <a:srgbClr val="DFE3E8"/>
+                      </a:solidFill>
+                      <a:prstDash val="solid"/>
+                      <a:round/>
+                      <a:headEnd type="none" w="med" len="med"/>
+                      <a:tailEnd type="none" w="med" len="med"/>
+                    </a:lnB>
+                  </a:tcPr>
+                </a:tc>
+              </a:tr>
+              <a:tr h="329184">
+                <a:tc>
+                  <a:txBody>
+                    <a:bodyPr/>
+                    <a:lstStyle/>
+                    <a:p>
+                      <a:pPr algn="l" indent="0" marL="0">
+                        <a:buNone/>
+                      </a:pPr>
+                      <a:r>
+                        <a:rPr lang="en-US" sz="1100" dirty="0">
+                          <a:solidFill>
+                            <a:srgbClr val="14181F"/>
+                          </a:solidFill>
+                          <a:latin typeface="Calibri" pitchFamily="34" charset="0"/>
+                          <a:ea typeface="Calibri" pitchFamily="34" charset="-122"/>
+                          <a:cs typeface="Calibri" pitchFamily="34" charset="-120"/>
+                        </a:rPr>
+                        <a:t>InfiniBand XDR 4×</a:t>
+                      </a:r>
+                      <a:endParaRPr lang="en-US" sz="1100" dirty="0">
+                        <a:latin typeface="Calibri" charset="0"/>
+                        <a:ea typeface="Calibri" charset="0"/>
+                        <a:cs typeface="Calibri" charset="0"/>
+                      </a:endParaRPr>
+                    </a:p>
+                  </a:txBody>
+                  <a:tcPr marL="36576" marR="36576" marT="36576" marB="36576" anchor="ctr">
+                    <a:lnL w="7620" cap="flat" cmpd="sng" algn="ctr">
+                      <a:solidFill>
+                        <a:srgbClr val="DFE3E8"/>
+                      </a:solidFill>
+                      <a:prstDash val="solid"/>
+                      <a:round/>
+                      <a:headEnd type="none" w="med" len="med"/>
+                      <a:tailEnd type="none" w="med" len="med"/>
+                    </a:lnL>
+                    <a:lnR w="7620" cap="flat" cmpd="sng" algn="ctr">
+                      <a:solidFill>
+                        <a:srgbClr val="DFE3E8"/>
+                      </a:solidFill>
+                      <a:prstDash val="solid"/>
+                      <a:round/>
+                      <a:headEnd type="none" w="med" len="med"/>
+                      <a:tailEnd type="none" w="med" len="med"/>
+                    </a:lnR>
+                    <a:lnT w="7620" cap="flat" cmpd="sng" algn="ctr">
+                      <a:solidFill>
+                        <a:srgbClr val="DFE3E8"/>
+                      </a:solidFill>
+                      <a:prstDash val="solid"/>
+                      <a:round/>
+                      <a:headEnd type="none" w="med" len="med"/>
+                      <a:tailEnd type="none" w="med" len="med"/>
+                    </a:lnT>
+                    <a:lnB w="7620" cap="flat" cmpd="sng" algn="ctr">
+                      <a:solidFill>
+                        <a:srgbClr val="DFE3E8"/>
+                      </a:solidFill>
+                      <a:prstDash val="solid"/>
+                      <a:round/>
+                      <a:headEnd type="none" w="med" len="med"/>
+                      <a:tailEnd type="none" w="med" len="med"/>
+                    </a:lnB>
+                  </a:tcPr>
+                </a:tc>
+                <a:tc>
+                  <a:txBody>
+                    <a:bodyPr/>
+                    <a:lstStyle/>
+                    <a:p>
+                      <a:pPr algn="l" indent="0" marL="0">
+                        <a:buNone/>
+                      </a:pPr>
+                      <a:r>
+                        <a:rPr lang="en-US" sz="1100" dirty="0">
+                          <a:solidFill>
+                            <a:srgbClr val="14181F"/>
+                          </a:solidFill>
+                          <a:latin typeface="Calibri" pitchFamily="34" charset="0"/>
+                          <a:ea typeface="Calibri" pitchFamily="34" charset="-122"/>
+                          <a:cs typeface="Calibri" pitchFamily="34" charset="-120"/>
+                        </a:rPr>
+                        <a:t>Serial PAM4</a:t>
+                      </a:r>
+                      <a:endParaRPr lang="en-US" sz="1100" dirty="0">
+                        <a:latin typeface="Calibri" charset="0"/>
+                        <a:ea typeface="Calibri" charset="0"/>
+                        <a:cs typeface="Calibri" charset="0"/>
+                      </a:endParaRPr>
+                    </a:p>
+                  </a:txBody>
+                  <a:tcPr marL="36576" marR="36576" marT="36576" marB="36576" anchor="ctr">
+                    <a:lnL w="7620" cap="flat" cmpd="sng" algn="ctr">
+                      <a:solidFill>
+                        <a:srgbClr val="DFE3E8"/>
+                      </a:solidFill>
+                      <a:prstDash val="solid"/>
+                      <a:round/>
+                      <a:headEnd type="none" w="med" len="med"/>
+                      <a:tailEnd type="none" w="med" len="med"/>
+                    </a:lnL>
+                    <a:lnR w="7620" cap="flat" cmpd="sng" algn="ctr">
+                      <a:solidFill>
+                        <a:srgbClr val="DFE3E8"/>
+                      </a:solidFill>
+                      <a:prstDash val="solid"/>
+                      <a:round/>
+                      <a:headEnd type="none" w="med" len="med"/>
+                      <a:tailEnd type="none" w="med" len="med"/>
+                    </a:lnR>
+                    <a:lnT w="7620" cap="flat" cmpd="sng" algn="ctr">
+                      <a:solidFill>
+                        <a:srgbClr val="DFE3E8"/>
+                      </a:solidFill>
+                      <a:prstDash val="solid"/>
+                      <a:round/>
+                      <a:headEnd type="none" w="med" len="med"/>
+                      <a:tailEnd type="none" w="med" len="med"/>
+                    </a:lnT>
+                    <a:lnB w="7620" cap="flat" cmpd="sng" algn="ctr">
+                      <a:solidFill>
+                        <a:srgbClr val="DFE3E8"/>
+                      </a:solidFill>
+                      <a:prstDash val="solid"/>
+                      <a:round/>
+                      <a:headEnd type="none" w="med" len="med"/>
+                      <a:tailEnd type="none" w="med" len="med"/>
+                    </a:lnB>
+                  </a:tcPr>
+                </a:tc>
+                <a:tc>
+                  <a:txBody>
+                    <a:bodyPr/>
+                    <a:lstStyle/>
+                    <a:p>
+                      <a:pPr algn="l" indent="0" marL="0">
+                        <a:buNone/>
+                      </a:pPr>
+                      <a:r>
+                        <a:rPr lang="en-US" sz="1100" dirty="0">
+                          <a:solidFill>
+                            <a:srgbClr val="14181F"/>
+                          </a:solidFill>
+                          <a:latin typeface="Calibri" pitchFamily="34" charset="0"/>
+                          <a:ea typeface="Calibri" pitchFamily="34" charset="-122"/>
+                          <a:cs typeface="Calibri" pitchFamily="34" charset="-120"/>
+                        </a:rPr>
+                        <a:t>800 Gb/s</a:t>
+                      </a:r>
+                      <a:endParaRPr lang="en-US" sz="1100" dirty="0">
+                        <a:latin typeface="Calibri" charset="0"/>
+                        <a:ea typeface="Calibri" charset="0"/>
+                        <a:cs typeface="Calibri" charset="0"/>
+                      </a:endParaRPr>
+                    </a:p>
+                  </a:txBody>
+                  <a:tcPr marL="36576" marR="36576" marT="36576" marB="36576" anchor="ctr">
+                    <a:lnL w="7620" cap="flat" cmpd="sng" algn="ctr">
+                      <a:solidFill>
+                        <a:srgbClr val="DFE3E8"/>
+                      </a:solidFill>
+                      <a:prstDash val="solid"/>
+                      <a:round/>
+                      <a:headEnd type="none" w="med" len="med"/>
+                      <a:tailEnd type="none" w="med" len="med"/>
+                    </a:lnL>
+                    <a:lnR w="7620" cap="flat" cmpd="sng" algn="ctr">
+                      <a:solidFill>
+                        <a:srgbClr val="DFE3E8"/>
+                      </a:solidFill>
+                      <a:prstDash val="solid"/>
+                      <a:round/>
+                      <a:headEnd type="none" w="med" len="med"/>
+                      <a:tailEnd type="none" w="med" len="med"/>
+                    </a:lnR>
+                    <a:lnT w="7620" cap="flat" cmpd="sng" algn="ctr">
+                      <a:solidFill>
+                        <a:srgbClr val="DFE3E8"/>
+                      </a:solidFill>
+                      <a:prstDash val="solid"/>
+                      <a:round/>
+                      <a:headEnd type="none" w="med" len="med"/>
+                      <a:tailEnd type="none" w="med" len="med"/>
+                    </a:lnT>
+                    <a:lnB w="7620" cap="flat" cmpd="sng" algn="ctr">
+                      <a:solidFill>
+                        <a:srgbClr val="DFE3E8"/>
+                      </a:solidFill>
+                      <a:prstDash val="solid"/>
+                      <a:round/>
+                      <a:headEnd type="none" w="med" len="med"/>
+                      <a:tailEnd type="none" w="med" len="med"/>
+                    </a:lnB>
+                  </a:tcPr>
+                </a:tc>
+                <a:tc>
+                  <a:txBody>
+                    <a:bodyPr/>
+                    <a:lstStyle/>
+                    <a:p>
+                      <a:pPr algn="l" indent="0" marL="0">
+                        <a:buNone/>
+                      </a:pPr>
+                      <a:r>
+                        <a:rPr lang="en-US" sz="1100" dirty="0">
+                          <a:solidFill>
+                            <a:srgbClr val="14181F"/>
+                          </a:solidFill>
+                          <a:latin typeface="Calibri" pitchFamily="34" charset="0"/>
+                          <a:ea typeface="Calibri" pitchFamily="34" charset="-122"/>
+                          <a:cs typeface="Calibri" pitchFamily="34" charset="-120"/>
+                        </a:rPr>
+                        <a:t>sub-µs</a:t>
+                      </a:r>
+                      <a:endParaRPr lang="en-US" sz="1100" dirty="0">
+                        <a:latin typeface="Calibri" charset="0"/>
+                        <a:ea typeface="Calibri" charset="0"/>
+                        <a:cs typeface="Calibri" charset="0"/>
+                      </a:endParaRPr>
+                    </a:p>
+                  </a:txBody>
+                  <a:tcPr marL="36576" marR="36576" marT="36576" marB="36576" anchor="ctr">
+                    <a:lnL w="7620" cap="flat" cmpd="sng" algn="ctr">
+                      <a:solidFill>
+                        <a:srgbClr val="DFE3E8"/>
+                      </a:solidFill>
+                      <a:prstDash val="solid"/>
+                      <a:round/>
+                      <a:headEnd type="none" w="med" len="med"/>
+                      <a:tailEnd type="none" w="med" len="med"/>
+                    </a:lnL>
+                    <a:lnR w="7620" cap="flat" cmpd="sng" algn="ctr">
+                      <a:solidFill>
+                        <a:srgbClr val="DFE3E8"/>
+                      </a:solidFill>
+                      <a:prstDash val="solid"/>
+                      <a:round/>
+                      <a:headEnd type="none" w="med" len="med"/>
+                      <a:tailEnd type="none" w="med" len="med"/>
+                    </a:lnR>
+                    <a:lnT w="7620" cap="flat" cmpd="sng" algn="ctr">
+                      <a:solidFill>
+                        <a:srgbClr val="DFE3E8"/>
+                      </a:solidFill>
+                      <a:prstDash val="solid"/>
+                      <a:round/>
+                      <a:headEnd type="none" w="med" len="med"/>
+                      <a:tailEnd type="none" w="med" len="med"/>
+                    </a:lnT>
+                    <a:lnB w="7620" cap="flat" cmpd="sng" algn="ctr">
+                      <a:solidFill>
+                        <a:srgbClr val="DFE3E8"/>
+                      </a:solidFill>
+                      <a:prstDash val="solid"/>
+                      <a:round/>
+                      <a:headEnd type="none" w="med" len="med"/>
+                      <a:tailEnd type="none" w="med" len="med"/>
+                    </a:lnB>
+                  </a:tcPr>
+                </a:tc>
+                <a:tc>
+                  <a:txBody>
+                    <a:bodyPr/>
+                    <a:lstStyle/>
+                    <a:p>
+                      <a:pPr algn="l" indent="0" marL="0">
+                        <a:buNone/>
+                      </a:pPr>
+                      <a:r>
+                        <a:rPr lang="en-US" sz="1100" dirty="0">
+                          <a:solidFill>
+                            <a:srgbClr val="14181F"/>
+                          </a:solidFill>
+                          <a:latin typeface="Calibri" pitchFamily="34" charset="0"/>
+                          <a:ea typeface="Calibri" pitchFamily="34" charset="-122"/>
+                          <a:cs typeface="Calibri" pitchFamily="34" charset="-120"/>
+                        </a:rPr>
+                        <a:t>100 m AOC / 10 km</a:t>
+                      </a:r>
+                      <a:endParaRPr lang="en-US" sz="1100" dirty="0">
+                        <a:latin typeface="Calibri" charset="0"/>
+                        <a:ea typeface="Calibri" charset="0"/>
+                        <a:cs typeface="Calibri" charset="0"/>
+                      </a:endParaRPr>
+                    </a:p>
+                  </a:txBody>
+                  <a:tcPr marL="36576" marR="36576" marT="36576" marB="36576" anchor="ctr">
+                    <a:lnL w="7620" cap="flat" cmpd="sng" algn="ctr">
+                      <a:solidFill>
+                        <a:srgbClr val="DFE3E8"/>
+                      </a:solidFill>
+                      <a:prstDash val="solid"/>
+                      <a:round/>
+                      <a:headEnd type="none" w="med" len="med"/>
+                      <a:tailEnd type="none" w="med" len="med"/>
+                    </a:lnL>
+                    <a:lnR w="7620" cap="flat" cmpd="sng" algn="ctr">
+                      <a:solidFill>
+                        <a:srgbClr val="DFE3E8"/>
+                      </a:solidFill>
+                      <a:prstDash val="solid"/>
+                      <a:round/>
+                      <a:headEnd type="none" w="med" len="med"/>
+                      <a:tailEnd type="none" w="med" len="med"/>
+                    </a:lnR>
+                    <a:lnT w="7620" cap="flat" cmpd="sng" algn="ctr">
+                      <a:solidFill>
+                        <a:srgbClr val="DFE3E8"/>
+                      </a:solidFill>
+                      <a:prstDash val="solid"/>
+                      <a:round/>
+                      <a:headEnd type="none" w="med" len="med"/>
+                      <a:tailEnd type="none" w="med" len="med"/>
+                    </a:lnT>
+                    <a:lnB w="7620" cap="flat" cmpd="sng" algn="ctr">
+                      <a:solidFill>
+                        <a:srgbClr val="DFE3E8"/>
+                      </a:solidFill>
+                      <a:prstDash val="solid"/>
+                      <a:round/>
+                      <a:headEnd type="none" w="med" len="med"/>
+                      <a:tailEnd type="none" w="med" len="med"/>
+                    </a:lnB>
+                  </a:tcPr>
+                </a:tc>
+                <a:tc>
+                  <a:txBody>
+                    <a:bodyPr/>
+                    <a:lstStyle/>
+                    <a:p>
+                      <a:pPr algn="l" indent="0" marL="0">
+                        <a:buNone/>
+                      </a:pPr>
+                      <a:r>
+                        <a:rPr lang="en-US" sz="1100" dirty="0">
+                          <a:solidFill>
+                            <a:srgbClr val="14181F"/>
+                          </a:solidFill>
+                          <a:latin typeface="Calibri" pitchFamily="34" charset="0"/>
+                          <a:ea typeface="Calibri" pitchFamily="34" charset="-122"/>
+                          <a:cs typeface="Calibri" pitchFamily="34" charset="-120"/>
+                        </a:rPr>
+                        <a:t>HPC e clusters de IA</a:t>
+                      </a:r>
+                      <a:endParaRPr lang="en-US" sz="1100" dirty="0">
+                        <a:latin typeface="Calibri" charset="0"/>
+                        <a:ea typeface="Calibri" charset="0"/>
+                        <a:cs typeface="Calibri" charset="0"/>
+                      </a:endParaRPr>
+                    </a:p>
+                  </a:txBody>
+                  <a:tcPr marL="36576" marR="36576" marT="36576" marB="36576" anchor="ctr">
                     <a:lnL w="7620" cap="flat" cmpd="sng" algn="ctr">
                       <a:solidFill>
                         <a:srgbClr val="DFE3E8"/>
@@ -13476,8 +14697,8 @@
         </p:nvSpPr>
         <p:spPr>
           <a:xfrm>
-            <a:off x="658368" y="5760720"/>
-            <a:ext cx="10874959" cy="502920"/>
+            <a:off x="658368" y="5376672"/>
+            <a:ext cx="10874959" cy="566928"/>
           </a:xfrm>
           <a:prstGeom prst="rect">
             <a:avLst/>
@@ -13490,10 +14711,13 @@
           <a:lstStyle/>
           <a:p>
             <a:pPr indent="0" marL="0">
+              <a:lnSpc>
+                <a:spcPts val="1500"/>
+              </a:lnSpc>
               <a:buNone/>
             </a:pPr>
             <a:r>
-              <a:rPr lang="en-US" sz="1200" dirty="0">
+              <a:rPr lang="en-US" sz="1150" dirty="0">
                 <a:solidFill>
                   <a:srgbClr val="55606E"/>
                 </a:solidFill>
@@ -13501,15 +14725,57 @@
                 <a:ea typeface="Calibri" pitchFamily="34" charset="-122"/>
                 <a:cs typeface="Calibri" pitchFamily="34" charset="-120"/>
               </a:rPr>
-              <a:t>Extrato. O relatório contém todas as interfaces exigidas, suas variantes e as condições de latência. M.2/U.2/EDSFF são fatores de forma; HBA é adaptador. Hot-plug depende da plataforma.</a:t>
+              <a:t>Extrato de uma tabela de 53 linhas. O relatório traz todas as variantes exigidas pelo enunciado, mais taxa bruta, ano, hot-plug, topologia e número de dispositivos. As latências marcadas com ∗ são estimativas de ordem de grandeza, sem publicação de organismo normatizador. M.2, U.2, U.3 e EDSFF são fatores de forma e HBA e CNA são adaptadores, de modo que nenhum tem taxa própria e todos aparecem na tabela com “= PCIe”.</a:t>
             </a:r>
-            <a:endParaRPr lang="en-US" sz="1200" dirty="0"/>
+            <a:endParaRPr lang="en-US" sz="1150" dirty="0"/>
           </a:p>
         </p:txBody>
       </p:sp>
       <p:sp>
         <p:nvSpPr>
           <p:cNvPr id="6" name="Text 3"/>
+          <p:cNvSpPr txBox="1"/>
+          <p:nvPr/>
+        </p:nvSpPr>
+        <p:spPr>
+          <a:xfrm>
+            <a:off x="658368" y="5961888"/>
+            <a:ext cx="10874959" cy="310896"/>
+          </a:xfrm>
+          <a:prstGeom prst="rect">
+            <a:avLst/>
+          </a:prstGeom>
+          <a:noFill/>
+          <a:ln/>
+        </p:spPr>
+        <p:txBody>
+          <a:bodyPr wrap="square" lIns="0" tIns="0" rIns="0" bIns="0" rtlCol="0" anchor="ctr"/>
+          <a:lstStyle/>
+          <a:p>
+            <a:pPr indent="0" marL="0">
+              <a:lnSpc>
+                <a:spcPts val="1200"/>
+              </a:lnSpc>
+              <a:buNone/>
+            </a:pPr>
+            <a:r>
+              <a:rPr lang="en-US" sz="950" i="1" dirty="0">
+                <a:solidFill>
+                  <a:srgbClr val="55606E"/>
+                </a:solidFill>
+                <a:latin typeface="Calibri" pitchFamily="34" charset="0"/>
+                <a:ea typeface="Calibri" pitchFamily="34" charset="-122"/>
+                <a:cs typeface="Calibri" pitchFamily="34" charset="-120"/>
+              </a:rPr>
+              <a:t>Fonte: Seção 4.2 do relatório. Taxas de Fibre Channel segundo o roadmap da FCIA, por direção, e a FCIA publica também o valor full-duplex, que é o dobro. Latências de NVMe/RoCE e NVMe/TCP são medição P99,99 publicada pela Western Digital.</a:t>
+            </a:r>
+            <a:endParaRPr lang="en-US" sz="950" dirty="0"/>
+          </a:p>
+        </p:txBody>
+      </p:sp>
+      <p:sp>
+        <p:nvSpPr>
+          <p:cNvPr id="7" name="Text 4"/>
           <p:cNvSpPr txBox="1"/>
           <p:nvPr/>
         </p:nvSpPr>
@@ -26754,7 +28020,7 @@
                 <a:ea typeface="Calibri" pitchFamily="34" charset="-122"/>
                 <a:cs typeface="Calibri" pitchFamily="34" charset="-120"/>
               </a:rPr>
-              <a:t>ENCERRAMENTO</a:t>
+              <a:t>7. DÚVIDAS, CONSIDERAÇÕES E PONTOS PARA O DEBATE</a:t>
             </a:r>
             <a:endParaRPr lang="en-US" sz="1100" dirty="0"/>
           </a:p>
@@ -26807,8 +28073,8 @@
         </p:nvSpPr>
         <p:spPr>
           <a:xfrm>
-            <a:off x="658368" y="1746504"/>
-            <a:ext cx="457200" cy="457200"/>
+            <a:off x="658368" y="1554480"/>
+            <a:ext cx="402336" cy="402336"/>
           </a:xfrm>
           <a:prstGeom prst="ellipse">
             <a:avLst/>
@@ -26832,8 +28098,8 @@
         </p:nvSpPr>
         <p:spPr>
           <a:xfrm>
-            <a:off x="658368" y="1746504"/>
-            <a:ext cx="457200" cy="457200"/>
+            <a:off x="658368" y="1554480"/>
+            <a:ext cx="402336" cy="402336"/>
           </a:xfrm>
           <a:prstGeom prst="rect">
             <a:avLst/>
@@ -26871,8 +28137,8 @@
         </p:nvSpPr>
         <p:spPr>
           <a:xfrm>
-            <a:off x="1316736" y="1691640"/>
-            <a:ext cx="10241280" cy="731520"/>
+            <a:off x="1207008" y="1536192"/>
+            <a:ext cx="4800600" cy="1005840"/>
           </a:xfrm>
           <a:prstGeom prst="rect">
             <a:avLst/>
@@ -26886,12 +28152,12 @@
           <a:p>
             <a:pPr indent="0" marL="0">
               <a:lnSpc>
-                <a:spcPts val="2000"/>
+                <a:spcPts val="1500"/>
               </a:lnSpc>
               <a:buNone/>
             </a:pPr>
             <a:r>
-              <a:rPr lang="en-US" sz="1400" dirty="0">
+              <a:rPr lang="en-US" sz="1150" dirty="0">
                 <a:solidFill>
                   <a:srgbClr val="FFFFFF"/>
                 </a:solidFill>
@@ -26899,9 +28165,9 @@
                 <a:ea typeface="Calibri" pitchFamily="34" charset="-122"/>
                 <a:cs typeface="Calibri" pitchFamily="34" charset="-120"/>
               </a:rPr>
-              <a:t>O modelo de custo do otimizador deveria ser calibrado automaticamente, em vez de depender de um administrador que talvez não saiba que random_page_cost existe?</a:t>
+              <a:t>Se o random_page_cost precisa mudar de 4,0 para 1,1 conforme o meio, por que o SGBD não mede essa razão empiricamente na inicialização, em vez de depender de um administrador que talvez nem saiba que o parâmetro existe?</a:t>
             </a:r>
-            <a:endParaRPr lang="en-US" sz="1400" dirty="0"/>
+            <a:endParaRPr lang="en-US" sz="1150" dirty="0"/>
           </a:p>
         </p:txBody>
       </p:sp>
@@ -26913,8 +28179,8 @@
         </p:nvSpPr>
         <p:spPr>
           <a:xfrm>
-            <a:off x="658368" y="2606040"/>
-            <a:ext cx="457200" cy="457200"/>
+            <a:off x="658368" y="2642616"/>
+            <a:ext cx="402336" cy="402336"/>
           </a:xfrm>
           <a:prstGeom prst="ellipse">
             <a:avLst/>
@@ -26938,8 +28204,8 @@
         </p:nvSpPr>
         <p:spPr>
           <a:xfrm>
-            <a:off x="658368" y="2606040"/>
-            <a:ext cx="457200" cy="457200"/>
+            <a:off x="658368" y="2642616"/>
+            <a:ext cx="402336" cy="402336"/>
           </a:xfrm>
           <a:prstGeom prst="rect">
             <a:avLst/>
@@ -26977,8 +28243,8 @@
         </p:nvSpPr>
         <p:spPr>
           <a:xfrm>
-            <a:off x="1316736" y="2551176"/>
-            <a:ext cx="10241280" cy="731520"/>
+            <a:off x="1207008" y="2624328"/>
+            <a:ext cx="4800600" cy="1005840"/>
           </a:xfrm>
           <a:prstGeom prst="rect">
             <a:avLst/>
@@ -26992,12 +28258,12 @@
           <a:p>
             <a:pPr indent="0" marL="0">
               <a:lnSpc>
-                <a:spcPts val="2000"/>
+                <a:spcPts val="1500"/>
               </a:lnSpc>
               <a:buNone/>
             </a:pPr>
             <a:r>
-              <a:rPr lang="en-US" sz="1400" dirty="0">
+              <a:rPr lang="en-US" sz="1150" dirty="0">
                 <a:solidFill>
                   <a:srgbClr val="FFFFFF"/>
                 </a:solidFill>
@@ -27005,9 +28271,9 @@
                 <a:ea typeface="Calibri" pitchFamily="34" charset="-122"/>
                 <a:cs typeface="Calibri" pitchFamily="34" charset="-120"/>
               </a:rPr>
-              <a:t>Faz sentido continuar ensinando o modelo de I/O por contagem de blocos, ou o modelo de 2026 seria latência × profundidade de fila?</a:t>
+              <a:t>Faz sentido continuar ensinando o modelo de I/O por contagem de blocos, ou o modelo correto para o hardware de 2026 seria latência × paralelismo, contabilizando a profundidade de fila explicitamente?</a:t>
             </a:r>
-            <a:endParaRPr lang="en-US" sz="1400" dirty="0"/>
+            <a:endParaRPr lang="en-US" sz="1150" dirty="0"/>
           </a:p>
         </p:txBody>
       </p:sp>
@@ -27019,8 +28285,8 @@
         </p:nvSpPr>
         <p:spPr>
           <a:xfrm>
-            <a:off x="658368" y="3465576"/>
-            <a:ext cx="457200" cy="457200"/>
+            <a:off x="658368" y="3730752"/>
+            <a:ext cx="402336" cy="402336"/>
           </a:xfrm>
           <a:prstGeom prst="ellipse">
             <a:avLst/>
@@ -27044,8 +28310,8 @@
         </p:nvSpPr>
         <p:spPr>
           <a:xfrm>
-            <a:off x="658368" y="3465576"/>
-            <a:ext cx="457200" cy="457200"/>
+            <a:off x="658368" y="3730752"/>
+            <a:ext cx="402336" cy="402336"/>
           </a:xfrm>
           <a:prstGeom prst="rect">
             <a:avLst/>
@@ -27083,8 +28349,8 @@
         </p:nvSpPr>
         <p:spPr>
           <a:xfrm>
-            <a:off x="1316736" y="3410712"/>
-            <a:ext cx="10241280" cy="731520"/>
+            <a:off x="1207008" y="3712464"/>
+            <a:ext cx="4800600" cy="1005840"/>
           </a:xfrm>
           <a:prstGeom prst="rect">
             <a:avLst/>
@@ -27098,12 +28364,12 @@
           <a:p>
             <a:pPr indent="0" marL="0">
               <a:lnSpc>
-                <a:spcPts val="2000"/>
+                <a:spcPts val="1500"/>
               </a:lnSpc>
               <a:buNone/>
             </a:pPr>
             <a:r>
-              <a:rPr lang="en-US" sz="1400" dirty="0">
+              <a:rPr lang="en-US" sz="1150" dirty="0">
                 <a:solidFill>
                   <a:srgbClr val="FFFFFF"/>
                 </a:solidFill>
@@ -27111,9 +28377,9 @@
                 <a:ea typeface="Calibri" pitchFamily="34" charset="-122"/>
                 <a:cs typeface="Calibri" pitchFamily="34" charset="-120"/>
               </a:rPr>
-              <a:t>A morte do Optane foi falha de mercado ou de tecnologia — e o que impede que a lacuna seja reaberta indefinidamente?</a:t>
+              <a:t>A descontinuação do Optane foi falha de mercado ou de tecnologia? O 3D XPoint funcionava e ocupava um degrau real da hierarquia, e se a razão foi custo de fabricação, o que impede que a mesma lacuna se reabra indefinidamente?</a:t>
             </a:r>
-            <a:endParaRPr lang="en-US" sz="1400" dirty="0"/>
+            <a:endParaRPr lang="en-US" sz="1150" dirty="0"/>
           </a:p>
         </p:txBody>
       </p:sp>
@@ -27125,8 +28391,8 @@
         </p:nvSpPr>
         <p:spPr>
           <a:xfrm>
-            <a:off x="658368" y="4325112"/>
-            <a:ext cx="457200" cy="457200"/>
+            <a:off x="658368" y="4818888"/>
+            <a:ext cx="402336" cy="402336"/>
           </a:xfrm>
           <a:prstGeom prst="ellipse">
             <a:avLst/>
@@ -27150,8 +28416,8 @@
         </p:nvSpPr>
         <p:spPr>
           <a:xfrm>
-            <a:off x="658368" y="4325112"/>
-            <a:ext cx="457200" cy="457200"/>
+            <a:off x="658368" y="4818888"/>
+            <a:ext cx="402336" cy="402336"/>
           </a:xfrm>
           <a:prstGeom prst="rect">
             <a:avLst/>
@@ -27189,8 +28455,8 @@
         </p:nvSpPr>
         <p:spPr>
           <a:xfrm>
-            <a:off x="1316736" y="4270248"/>
-            <a:ext cx="10241280" cy="731520"/>
+            <a:off x="1207008" y="4800600"/>
+            <a:ext cx="4800600" cy="1005840"/>
           </a:xfrm>
           <a:prstGeom prst="rect">
             <a:avLst/>
@@ -27204,12 +28470,12 @@
           <a:p>
             <a:pPr indent="0" marL="0">
               <a:lnSpc>
-                <a:spcPts val="2000"/>
+                <a:spcPts val="1500"/>
               </a:lnSpc>
               <a:buNone/>
             </a:pPr>
             <a:r>
-              <a:rPr lang="en-US" sz="1400" dirty="0">
+              <a:rPr lang="en-US" sz="1150" dirty="0">
                 <a:solidFill>
                   <a:srgbClr val="FFFFFF"/>
                 </a:solidFill>
@@ -27217,9 +28483,9 @@
                 <a:ea typeface="Calibri" pitchFamily="34" charset="-122"/>
                 <a:cs typeface="Calibri" pitchFamily="34" charset="-120"/>
               </a:rPr>
-              <a:t>Se o CXL viabilizar buffer pools de dezenas de terabytes, o que muda num SGBD que hoje assume que os dados não cabem na memória?</a:t>
+              <a:t>Se a memória barata escalar via CXL, bancos in-memory de dezenas de terabytes ficam viáveis. O que muda no projeto de um SGBD que hoje assume que os dados não cabem na memória?</a:t>
             </a:r>
-            <a:endParaRPr lang="en-US" sz="1400" dirty="0"/>
+            <a:endParaRPr lang="en-US" sz="1150" dirty="0"/>
           </a:p>
         </p:txBody>
       </p:sp>
@@ -27231,8 +28497,8 @@
         </p:nvSpPr>
         <p:spPr>
           <a:xfrm>
-            <a:off x="658368" y="5184648"/>
-            <a:ext cx="457200" cy="457200"/>
+            <a:off x="6281928" y="1554480"/>
+            <a:ext cx="402336" cy="402336"/>
           </a:xfrm>
           <a:prstGeom prst="ellipse">
             <a:avLst/>
@@ -27256,8 +28522,8 @@
         </p:nvSpPr>
         <p:spPr>
           <a:xfrm>
-            <a:off x="658368" y="5184648"/>
-            <a:ext cx="457200" cy="457200"/>
+            <a:off x="6281928" y="1554480"/>
+            <a:ext cx="402336" cy="402336"/>
           </a:xfrm>
           <a:prstGeom prst="rect">
             <a:avLst/>
@@ -27295,8 +28561,8 @@
         </p:nvSpPr>
         <p:spPr>
           <a:xfrm>
-            <a:off x="1316736" y="5129784"/>
-            <a:ext cx="10241280" cy="731520"/>
+            <a:off x="6830568" y="1536192"/>
+            <a:ext cx="4800600" cy="1005840"/>
           </a:xfrm>
           <a:prstGeom prst="rect">
             <a:avLst/>
@@ -27310,12 +28576,12 @@
           <a:p>
             <a:pPr indent="0" marL="0">
               <a:lnSpc>
-                <a:spcPts val="2000"/>
+                <a:spcPts val="1500"/>
               </a:lnSpc>
               <a:buNone/>
             </a:pPr>
             <a:r>
-              <a:rPr lang="en-US" sz="1400" dirty="0">
+              <a:rPr lang="en-US" sz="1150" dirty="0">
                 <a:solidFill>
                   <a:srgbClr val="FFFFFF"/>
                 </a:solidFill>
@@ -27323,9 +28589,9 @@
                 <a:ea typeface="Calibri" pitchFamily="34" charset="-122"/>
                 <a:cs typeface="Calibri" pitchFamily="34" charset="-120"/>
               </a:rPr>
-              <a:t>Existe formalismo de otimização de consultas que otimize percentil (P99) em vez de custo esperado?</a:t>
+              <a:t>Toda a literatura de otimização usa custo esperado, isto é, média, enquanto os SLAs reais são escritos em P99 e P99,9. Existe formalismo de otimização de consultas que otimize percentil em vez de média?</a:t>
             </a:r>
-            <a:endParaRPr lang="en-US" sz="1400" dirty="0"/>
+            <a:endParaRPr lang="en-US" sz="1150" dirty="0"/>
           </a:p>
         </p:txBody>
       </p:sp>
@@ -27337,12 +28603,224 @@
         </p:nvSpPr>
         <p:spPr>
           <a:xfrm>
-            <a:off x="658368" y="5943600"/>
-            <a:ext cx="10874959" cy="566928"/>
+            <a:off x="6281928" y="2642616"/>
+            <a:ext cx="402336" cy="402336"/>
+          </a:xfrm>
+          <a:prstGeom prst="ellipse">
+            <a:avLst/>
+          </a:prstGeom>
+          <a:solidFill>
+            <a:srgbClr val="2A78D6"/>
+          </a:solidFill>
+          <a:ln w="12700">
+            <a:solidFill>
+              <a:srgbClr val="2A78D6"/>
+            </a:solidFill>
+            <a:prstDash val="solid"/>
+          </a:ln>
+        </p:spPr>
+      </p:sp>
+      <p:sp>
+        <p:nvSpPr>
+          <p:cNvPr id="20" name="Text 18"/>
+          <p:cNvSpPr txBox="1"/>
+          <p:nvPr/>
+        </p:nvSpPr>
+        <p:spPr>
+          <a:xfrm>
+            <a:off x="6281928" y="2642616"/>
+            <a:ext cx="402336" cy="402336"/>
+          </a:xfrm>
+          <a:prstGeom prst="rect">
+            <a:avLst/>
+          </a:prstGeom>
+          <a:noFill/>
+          <a:ln/>
+        </p:spPr>
+        <p:txBody>
+          <a:bodyPr wrap="square" lIns="0" tIns="0" rIns="0" bIns="0" rtlCol="0" anchor="ctr"/>
+          <a:lstStyle/>
+          <a:p>
+            <a:pPr algn="ctr" indent="0" marL="0">
+              <a:buNone/>
+            </a:pPr>
+            <a:r>
+              <a:rPr lang="en-US" sz="1300" b="1" dirty="0">
+                <a:solidFill>
+                  <a:srgbClr val="FFFFFF"/>
+                </a:solidFill>
+                <a:latin typeface="Calibri" pitchFamily="34" charset="0"/>
+                <a:ea typeface="Calibri" pitchFamily="34" charset="-122"/>
+                <a:cs typeface="Calibri" pitchFamily="34" charset="-120"/>
+              </a:rPr>
+              <a:t>Q6</a:t>
+            </a:r>
+            <a:endParaRPr lang="en-US" sz="1300" dirty="0"/>
+          </a:p>
+        </p:txBody>
+      </p:sp>
+      <p:sp>
+        <p:nvSpPr>
+          <p:cNvPr id="21" name="Text 19"/>
+          <p:cNvSpPr txBox="1"/>
+          <p:nvPr/>
+        </p:nvSpPr>
+        <p:spPr>
+          <a:xfrm>
+            <a:off x="6830568" y="2624328"/>
+            <a:ext cx="4800600" cy="1005840"/>
+          </a:xfrm>
+          <a:prstGeom prst="rect">
+            <a:avLst/>
+          </a:prstGeom>
+          <a:noFill/>
+          <a:ln/>
+        </p:spPr>
+        <p:txBody>
+          <a:bodyPr wrap="square" lIns="0" tIns="0" rIns="0" bIns="0" rtlCol="0" anchor="ctr"/>
+          <a:lstStyle/>
+          <a:p>
+            <a:pPr indent="0" marL="0">
+              <a:lnSpc>
+                <a:spcPts val="1500"/>
+              </a:lnSpc>
+              <a:buNone/>
+            </a:pPr>
+            <a:r>
+              <a:rPr lang="en-US" sz="1150" dirty="0">
+                <a:solidFill>
+                  <a:srgbClr val="FFFFFF"/>
+                </a:solidFill>
+                <a:latin typeface="Calibri" pitchFamily="34" charset="0"/>
+                <a:ea typeface="Calibri" pitchFamily="34" charset="-122"/>
+                <a:cs typeface="Calibri" pitchFamily="34" charset="-120"/>
+              </a:rPr>
+              <a:t>Silberschatz observa que a nuvem tem latência de dezenas a centenas de milissegundos quando os dados não são colocalizados, e os dados de TPC-C que reunimos confirmam degradação de 4,6×. Esse limite é físico ou de arquitetura?</a:t>
+            </a:r>
+            <a:endParaRPr lang="en-US" sz="1150" dirty="0"/>
+          </a:p>
+        </p:txBody>
+      </p:sp>
+      <p:sp>
+        <p:nvSpPr>
+          <p:cNvPr id="22" name="Shape 20"/>
+          <p:cNvSpPr/>
+          <p:nvPr/>
+        </p:nvSpPr>
+        <p:spPr>
+          <a:xfrm>
+            <a:off x="6281928" y="3730752"/>
+            <a:ext cx="402336" cy="402336"/>
+          </a:xfrm>
+          <a:prstGeom prst="ellipse">
+            <a:avLst/>
+          </a:prstGeom>
+          <a:solidFill>
+            <a:srgbClr val="EB6834"/>
+          </a:solidFill>
+          <a:ln w="12700">
+            <a:solidFill>
+              <a:srgbClr val="EB6834"/>
+            </a:solidFill>
+            <a:prstDash val="solid"/>
+          </a:ln>
+        </p:spPr>
+      </p:sp>
+      <p:sp>
+        <p:nvSpPr>
+          <p:cNvPr id="23" name="Text 21"/>
+          <p:cNvSpPr txBox="1"/>
+          <p:nvPr/>
+        </p:nvSpPr>
+        <p:spPr>
+          <a:xfrm>
+            <a:off x="6281928" y="3730752"/>
+            <a:ext cx="402336" cy="402336"/>
+          </a:xfrm>
+          <a:prstGeom prst="rect">
+            <a:avLst/>
+          </a:prstGeom>
+          <a:noFill/>
+          <a:ln/>
+        </p:spPr>
+        <p:txBody>
+          <a:bodyPr wrap="square" lIns="0" tIns="0" rIns="0" bIns="0" rtlCol="0" anchor="ctr"/>
+          <a:lstStyle/>
+          <a:p>
+            <a:pPr algn="ctr" indent="0" marL="0">
+              <a:buNone/>
+            </a:pPr>
+            <a:r>
+              <a:rPr lang="en-US" sz="1300" b="1" dirty="0">
+                <a:solidFill>
+                  <a:srgbClr val="FFFFFF"/>
+                </a:solidFill>
+                <a:latin typeface="Calibri" pitchFamily="34" charset="0"/>
+                <a:ea typeface="Calibri" pitchFamily="34" charset="-122"/>
+                <a:cs typeface="Calibri" pitchFamily="34" charset="-120"/>
+              </a:rPr>
+              <a:t>Q7</a:t>
+            </a:r>
+            <a:endParaRPr lang="en-US" sz="1300" dirty="0"/>
+          </a:p>
+        </p:txBody>
+      </p:sp>
+      <p:sp>
+        <p:nvSpPr>
+          <p:cNvPr id="24" name="Text 22"/>
+          <p:cNvSpPr txBox="1"/>
+          <p:nvPr/>
+        </p:nvSpPr>
+        <p:spPr>
+          <a:xfrm>
+            <a:off x="6830568" y="3712464"/>
+            <a:ext cx="4800600" cy="1005840"/>
+          </a:xfrm>
+          <a:prstGeom prst="rect">
+            <a:avLst/>
+          </a:prstGeom>
+          <a:noFill/>
+          <a:ln/>
+        </p:spPr>
+        <p:txBody>
+          <a:bodyPr wrap="square" lIns="0" tIns="0" rIns="0" bIns="0" rtlCol="0" anchor="ctr"/>
+          <a:lstStyle/>
+          <a:p>
+            <a:pPr indent="0" marL="0">
+              <a:lnSpc>
+                <a:spcPts val="1500"/>
+              </a:lnSpc>
+              <a:buNone/>
+            </a:pPr>
+            <a:r>
+              <a:rPr lang="en-US" sz="1150" dirty="0">
+                <a:solidFill>
+                  <a:srgbClr val="FFFFFF"/>
+                </a:solidFill>
+                <a:latin typeface="Calibri" pitchFamily="34" charset="0"/>
+                <a:ea typeface="Calibri" pitchFamily="34" charset="-122"/>
+                <a:cs typeface="Calibri" pitchFamily="34" charset="-120"/>
+              </a:rPr>
+              <a:t>O enunciado da tarefa afirma que “SATA também é conhecida como NL-SAS”, afirmação que vem do próprio Elmasri &amp; Navathe (§16.2.1). O grupo optou por documentar a correção em vez de reproduzi-la. Foi a conduta correta em um trabalho avaliativo?</a:t>
+            </a:r>
+            <a:endParaRPr lang="en-US" sz="1150" dirty="0"/>
+          </a:p>
+        </p:txBody>
+      </p:sp>
+      <p:sp>
+        <p:nvSpPr>
+          <p:cNvPr id="25" name="Shape 23"/>
+          <p:cNvSpPr/>
+          <p:nvPr/>
+        </p:nvSpPr>
+        <p:spPr>
+          <a:xfrm>
+            <a:off x="6281928" y="4800600"/>
+            <a:ext cx="5349240" cy="1234440"/>
           </a:xfrm>
           <a:prstGeom prst="roundRect">
             <a:avLst>
-              <a:gd name="adj" fmla="val 9677"/>
+              <a:gd name="adj" fmla="val 4444"/>
             </a:avLst>
           </a:prstGeom>
           <a:solidFill>
@@ -27358,14 +28836,56 @@
       </p:sp>
       <p:sp>
         <p:nvSpPr>
-          <p:cNvPr id="20" name="Text 18"/>
+          <p:cNvPr id="26" name="Text 24"/>
           <p:cNvSpPr txBox="1"/>
           <p:nvPr/>
         </p:nvSpPr>
         <p:spPr>
           <a:xfrm>
-            <a:off x="1024128" y="6053328"/>
-            <a:ext cx="10607040" cy="365760"/>
+            <a:off x="6601968" y="4983480"/>
+            <a:ext cx="4754880" cy="822960"/>
+          </a:xfrm>
+          <a:prstGeom prst="rect">
+            <a:avLst/>
+          </a:prstGeom>
+          <a:noFill/>
+          <a:ln/>
+        </p:spPr>
+        <p:txBody>
+          <a:bodyPr wrap="square" lIns="0" tIns="0" rIns="0" bIns="0" rtlCol="0" anchor="ctr"/>
+          <a:lstStyle/>
+          <a:p>
+            <a:pPr indent="0" marL="0">
+              <a:lnSpc>
+                <a:spcPts val="1600"/>
+              </a:lnSpc>
+              <a:buNone/>
+            </a:pPr>
+            <a:r>
+              <a:rPr lang="en-US" sz="1200" dirty="0">
+                <a:solidFill>
+                  <a:srgbClr val="C3CAD4"/>
+                </a:solidFill>
+                <a:latin typeface="Calibri" pitchFamily="34" charset="0"/>
+                <a:ea typeface="Calibri" pitchFamily="34" charset="-122"/>
+                <a:cs typeface="Calibri" pitchFamily="34" charset="-120"/>
+              </a:rPr>
+              <a:t>As sete questões estão na Seção 7 do documento, com a redação integral. O relatório completo, com as tabelas na íntegra, as referências e o Post-Mortem exigido pelo enunciado, foi entregue em PDF.</a:t>
+            </a:r>
+            <a:endParaRPr lang="en-US" sz="1200" dirty="0"/>
+          </a:p>
+        </p:txBody>
+      </p:sp>
+      <p:sp>
+        <p:nvSpPr>
+          <p:cNvPr id="27" name="Text 25"/>
+          <p:cNvSpPr txBox="1"/>
+          <p:nvPr/>
+        </p:nvSpPr>
+        <p:spPr>
+          <a:xfrm>
+            <a:off x="6601968" y="6108192"/>
+            <a:ext cx="4754880" cy="365760"/>
           </a:xfrm>
           <a:prstGeom prst="rect">
             <a:avLst/>
@@ -27381,23 +28901,23 @@
               <a:buNone/>
             </a:pPr>
             <a:r>
-              <a:rPr lang="en-US" sz="1300" dirty="0">
+              <a:rPr lang="en-US" sz="2000" b="1" dirty="0">
                 <a:solidFill>
-                  <a:srgbClr val="C3CAD4"/>
+                  <a:srgbClr val="FFFFFF"/>
                 </a:solidFill>
-                <a:latin typeface="Calibri" pitchFamily="34" charset="0"/>
-                <a:ea typeface="Calibri" pitchFamily="34" charset="-122"/>
-                <a:cs typeface="Calibri" pitchFamily="34" charset="-120"/>
+                <a:latin typeface="Cambria" pitchFamily="34" charset="0"/>
+                <a:ea typeface="Cambria" pitchFamily="34" charset="-122"/>
+                <a:cs typeface="Cambria" pitchFamily="34" charset="-120"/>
               </a:rPr>
-              <a:t>Obrigado.  ·  Documento completo, com as tabelas integrais e o Post-Mortem, entregue em PDF.</a:t>
+              <a:t>Obrigado.</a:t>
             </a:r>
-            <a:endParaRPr lang="en-US" sz="1300" dirty="0"/>
+            <a:endParaRPr lang="en-US" sz="2000" dirty="0"/>
           </a:p>
         </p:txBody>
       </p:sp>
       <p:sp>
         <p:nvSpPr>
-          <p:cNvPr id="21" name="Text 19"/>
+          <p:cNvPr id="28" name="Text 26"/>
           <p:cNvSpPr txBox="1"/>
           <p:nvPr/>
         </p:nvSpPr>
@@ -28035,7 +29555,7 @@
                           <a:ea typeface="Calibri" pitchFamily="34" charset="-122"/>
                           <a:cs typeface="Calibri" pitchFamily="34" charset="-120"/>
                         </a:rPr>
-                        <a:t>Capacidades e taxas do 9100 PRO, 870 EVO, D5-P5336, 9550 PRO, DT Max, Exos M; latência rotacional de 4,16 ms; taxas nativas do LTO-9 e LTO-10</a:t>
+                        <a:t>Capacidades e taxas do 9100 PRO, 870 EVO, D5-P5336, 9550 PRO, DT Max e Exos M; latência rotacional de 4,16 ms; taxas nativas do LTO-9 e do LTO-10</a:t>
                       </a:r>
                       <a:endParaRPr lang="en-US" sz="1000" dirty="0">
                         <a:latin typeface="Calibri" charset="0"/>
@@ -28232,7 +29752,7 @@
                           <a:ea typeface="Calibri" pitchFamily="34" charset="-122"/>
                           <a:cs typeface="Calibri" pitchFamily="34" charset="-120"/>
                         </a:rPr>
-                        <a:t>1,4 TB/s de L3 do Zen 5 (Chips and Cheese); 214–271 ns do CXL 2.0 (ASPLOS); 41–177 µs do NVMe-oF (Western Digital)</a:t>
+                        <a:t>1,4 TB/s de L3 do Zen 5 (Chips and Cheese); 214–271 ns do CXL 2.0; 41–177 µs do NVMe-oF (Western Digital); razão SSD/HDD (VDURA)</a:t>
                       </a:r>
                       <a:endParaRPr lang="en-US" sz="1000" dirty="0">
                         <a:latin typeface="Calibri" charset="0"/>
@@ -28429,7 +29949,7 @@
                           <a:ea typeface="Calibri" pitchFamily="34" charset="-122"/>
                           <a:cs typeface="Calibri" pitchFamily="34" charset="-120"/>
                         </a:rPr>
-                        <a:t>Preço/KB; 51,2 GB/s por módulo DDR5-6400; 51,2 GB/s da library; 926,8 PB (23.170 × 40 TB); 2,317 EB só no cenário 2,5:1</a:t>
+                        <a:t>Preço por KB; 51,2 GB/s por módulo DDR5-6400; 51,2 GB/s da library; 926,8 PB (23.170 × 40 TB); 2,317 EB só no cenário 2,5:1</a:t>
                       </a:r>
                       <a:endParaRPr lang="en-US" sz="1000" dirty="0">
                         <a:latin typeface="Calibri" charset="0"/>
@@ -28626,7 +30146,7 @@
                           <a:ea typeface="Calibri" pitchFamily="34" charset="-122"/>
                           <a:cs typeface="Calibri" pitchFamily="34" charset="-120"/>
                         </a:rPr>
-                        <a:t>Referências da Tabela 16.1: SSD 50 µs, HDD 10 ms, USB 100 µs, óptico 180 ms</a:t>
+                        <a:t>Tempos de acesso da Tabela 16.1 original: SSD 50 µs, HDD 10 ms, pen drive USB 100 µs e óptico 180 ms</a:t>
                       </a:r>
                       <a:endParaRPr lang="en-US" sz="1000" dirty="0">
                         <a:latin typeface="Calibri" charset="0"/>
@@ -28693,7 +30213,7 @@
                           <a:ea typeface="Calibri" pitchFamily="34" charset="-122"/>
                           <a:cs typeface="Calibri" pitchFamily="34" charset="-120"/>
                         </a:rPr>
-                        <a:t>Não encontrado</a:t>
+                        <a:t>Lacuna declarada</a:t>
                       </a:r>
                       <a:endParaRPr lang="en-US" sz="1000" dirty="0">
                         <a:latin typeface="Calibri" charset="0"/>
@@ -28823,7 +30343,7 @@
                           <a:ea typeface="Calibri" pitchFamily="34" charset="-122"/>
                           <a:cs typeface="Calibri" pitchFamily="34" charset="-120"/>
                         </a:rPr>
-                        <a:t>Preço de módulo CXL e de tape library (só sob cotação); banda agregada do MD220; velocidade de leitura do M-DISC</a:t>
+                        <a:t>Preço de módulo CXL e de tape library, disponíveis só sob cotação; banda agregada do MD220; velocidade de leitura do M-DISC</a:t>
                       </a:r>
                       <a:endParaRPr lang="en-US" sz="1000" dirty="0">
                         <a:latin typeface="Calibri" charset="0"/>
@@ -28884,8 +30404,8 @@
         </p:nvSpPr>
         <p:spPr>
           <a:xfrm>
-            <a:off x="658368" y="5541264"/>
-            <a:ext cx="10874959" cy="548640"/>
+            <a:off x="658368" y="5431536"/>
+            <a:ext cx="10874959" cy="384048"/>
           </a:xfrm>
           <a:prstGeom prst="rect">
             <a:avLst/>
@@ -28904,7 +30424,7 @@
               <a:buNone/>
             </a:pPr>
             <a:r>
-              <a:rPr lang="en-US" sz="1150" i="1" dirty="0">
+              <a:rPr lang="en-US" sz="1150" dirty="0">
                 <a:solidFill>
                   <a:srgbClr val="55606E"/>
                 </a:solidFill>
@@ -28912,7 +30432,7 @@
                 <a:ea typeface="Calibri" pitchFamily="34" charset="-122"/>
                 <a:cs typeface="Calibri" pitchFamily="34" charset="-120"/>
               </a:rPr>
-              <a:t>Limites: MSRP histórico não é cotação atual. CXL e biblioteca de fita não têm preço confirmado e não entram na comparação de custo. Ver notas metodológicas do relatório.</a:t>
+              <a:t>Limites que o grupo assume: MSRP histórico não é cotação atual; CXL e biblioteca de fita não têm preço confirmado e ficaram fora da comparação de custo, de modo que “n/d” não deve ser lido como custo zero.</a:t>
             </a:r>
             <a:endParaRPr lang="en-US" sz="1150" dirty="0"/>
           </a:p>
@@ -28921,6 +30441,48 @@
       <p:sp>
         <p:nvSpPr>
           <p:cNvPr id="6" name="Text 3"/>
+          <p:cNvSpPr txBox="1"/>
+          <p:nvPr/>
+        </p:nvSpPr>
+        <p:spPr>
+          <a:xfrm>
+            <a:off x="658368" y="5815584"/>
+            <a:ext cx="10874959" cy="310896"/>
+          </a:xfrm>
+          <a:prstGeom prst="rect">
+            <a:avLst/>
+          </a:prstGeom>
+          <a:noFill/>
+          <a:ln/>
+        </p:spPr>
+        <p:txBody>
+          <a:bodyPr wrap="square" lIns="0" tIns="0" rIns="0" bIns="0" rtlCol="0" anchor="ctr"/>
+          <a:lstStyle/>
+          <a:p>
+            <a:pPr indent="0" marL="0">
+              <a:lnSpc>
+                <a:spcPts val="1200"/>
+              </a:lnSpc>
+              <a:buNone/>
+            </a:pPr>
+            <a:r>
+              <a:rPr lang="en-US" sz="950" i="1" dirty="0">
+                <a:solidFill>
+                  <a:srgbClr val="55606E"/>
+                </a:solidFill>
+                <a:latin typeface="Calibri" pitchFamily="34" charset="0"/>
+                <a:ea typeface="Calibri" pitchFamily="34" charset="-122"/>
+                <a:cs typeface="Calibri" pitchFamily="34" charset="-120"/>
+              </a:rPr>
+              <a:t>Fonte: Seções 3.3 e 3.4 do relatório, e a lista de referências da Seção 8, que separa livros-texto, organismos normatizadores, documentação de fabricante e medições de terceiros. Os 214–271 ns do CXL vêm de medição revisada por pares que este trabalho não chegou a fixar com autor e ano, e devem ser lidos como ordem de grandeza.</a:t>
+            </a:r>
+            <a:endParaRPr lang="en-US" sz="950" dirty="0"/>
+          </a:p>
+        </p:txBody>
+      </p:sp>
+      <p:sp>
+        <p:nvSpPr>
+          <p:cNvPr id="7" name="Text 4"/>
           <p:cNvSpPr txBox="1"/>
           <p:nvPr/>
         </p:nvSpPr>
@@ -29119,7 +30681,7 @@
               <a:buNone/>
             </a:pPr>
             <a:r>
-              <a:rPr lang="en-US" sz="1150" b="1" dirty="0">
+              <a:rPr lang="en-US" sz="1100" b="1" dirty="0">
                 <a:solidFill>
                   <a:srgbClr val="14181F"/>
                 </a:solidFill>
@@ -29129,7 +30691,7 @@
               </a:rPr>
               <a:t>Preço por KB (SRAM)</a:t>
             </a:r>
-            <a:endParaRPr lang="en-US" sz="1150" dirty="0"/>
+            <a:endParaRPr lang="en-US" sz="1100" dirty="0"/>
           </a:p>
         </p:txBody>
       </p:sp>
@@ -29208,7 +30770,7 @@
                 <a:ea typeface="Calibri" pitchFamily="34" charset="-122"/>
                 <a:cs typeface="Calibri" pitchFamily="34" charset="-120"/>
               </a:rPr>
-              <a:t>Delta entre 9950X3D2 (192 MB L3, US$ 899) e 9950X3D (128 MB, US$ 700)</a:t>
+              <a:t>Delta entre o 9950X3D2 (192 MB de L3, US$ 899) e o 9950X3D (128 MB, US$ 700)</a:t>
             </a:r>
             <a:endParaRPr lang="en-US" sz="1000" dirty="0"/>
           </a:p>
@@ -29266,7 +30828,7 @@
               <a:buNone/>
             </a:pPr>
             <a:r>
-              <a:rPr lang="en-US" sz="1150" b="1" dirty="0">
+              <a:rPr lang="en-US" sz="1100" b="1" dirty="0">
                 <a:solidFill>
                   <a:srgbClr val="14181F"/>
                 </a:solidFill>
@@ -29276,7 +30838,7 @@
               </a:rPr>
               <a:t>Razão topo/base</a:t>
             </a:r>
-            <a:endParaRPr lang="en-US" sz="1150" dirty="0"/>
+            <a:endParaRPr lang="en-US" sz="1100" dirty="0"/>
           </a:p>
         </p:txBody>
       </p:sp>
@@ -29355,7 +30917,7 @@
                 <a:ea typeface="Calibri" pitchFamily="34" charset="-122"/>
                 <a:cs typeface="Calibri" pitchFamily="34" charset="-120"/>
               </a:rPr>
-              <a:t>SRAM contra cartucho LTO-9 (US$ 87,99 ÷ 1,8×10¹⁰ KB)</a:t>
+              <a:t>SRAM contra cartucho LTO-9, este a US$ 87,99 ÷ 1,8×10¹⁰ KB</a:t>
             </a:r>
             <a:endParaRPr lang="en-US" sz="1000" dirty="0"/>
           </a:p>
@@ -29413,7 +30975,7 @@
               <a:buNone/>
             </a:pPr>
             <a:r>
-              <a:rPr lang="en-US" sz="1150" b="1" dirty="0">
+              <a:rPr lang="en-US" sz="1100" b="1" dirty="0">
                 <a:solidFill>
                   <a:srgbClr val="14181F"/>
                 </a:solidFill>
@@ -29423,7 +30985,7 @@
               </a:rPr>
               <a:t>Latência rotacional</a:t>
             </a:r>
-            <a:endParaRPr lang="en-US" sz="1150" dirty="0"/>
+            <a:endParaRPr lang="en-US" sz="1100" dirty="0"/>
           </a:p>
         </p:txBody>
       </p:sp>
@@ -29502,7 +31064,7 @@
                 <a:ea typeface="Calibri" pitchFamily="34" charset="-122"/>
                 <a:cs typeface="Calibri" pitchFamily="34" charset="-120"/>
               </a:rPr>
-              <a:t>Meia rotação a 7.200 rpm — publicado pela Seagate</a:t>
+              <a:t>Meia rotação a 7.200 rpm, valor que a Seagate publica no datasheet</a:t>
             </a:r>
             <a:endParaRPr lang="en-US" sz="1000" dirty="0"/>
           </a:p>
@@ -29560,7 +31122,7 @@
               <a:buNone/>
             </a:pPr>
             <a:r>
-              <a:rPr lang="en-US" sz="1150" b="1" dirty="0">
+              <a:rPr lang="en-US" sz="1100" b="1" dirty="0">
                 <a:solidFill>
                   <a:srgbClr val="14181F"/>
                 </a:solidFill>
@@ -29570,7 +31132,7 @@
               </a:rPr>
               <a:t>Varredura de disco</a:t>
             </a:r>
-            <a:endParaRPr lang="en-US" sz="1150" dirty="0"/>
+            <a:endParaRPr lang="en-US" sz="1100" dirty="0"/>
           </a:p>
         </p:txBody>
       </p:sp>
@@ -29649,7 +31211,7 @@
                 <a:ea typeface="Calibri" pitchFamily="34" charset="-122"/>
                 <a:cs typeface="Calibri" pitchFamily="34" charset="-120"/>
               </a:rPr>
-              <a:t>Contra 8 TB ÷ 200 MB/s = 11,1 h em 2014</a:t>
+              <a:t>Contra 8 TB ÷ 200 MB/s = 11,1 h em 2014: a capacidade subiu mais que a banda</a:t>
             </a:r>
             <a:endParaRPr lang="en-US" sz="1000" dirty="0"/>
           </a:p>
@@ -29707,7 +31269,7 @@
               <a:buNone/>
             </a:pPr>
             <a:r>
-              <a:rPr lang="en-US" sz="1150" b="1" dirty="0">
+              <a:rPr lang="en-US" sz="1100" b="1" dirty="0">
                 <a:solidFill>
                   <a:srgbClr val="14181F"/>
                 </a:solidFill>
@@ -29717,7 +31279,7 @@
               </a:rPr>
               <a:t>SATA 3.0 útil</a:t>
             </a:r>
-            <a:endParaRPr lang="en-US" sz="1150" dirty="0"/>
+            <a:endParaRPr lang="en-US" sz="1100" dirty="0"/>
           </a:p>
         </p:txBody>
       </p:sp>
@@ -29854,7 +31416,7 @@
               <a:buNone/>
             </a:pPr>
             <a:r>
-              <a:rPr lang="en-US" sz="1150" b="1" dirty="0">
+              <a:rPr lang="en-US" sz="1100" b="1" dirty="0">
                 <a:solidFill>
                   <a:srgbClr val="14181F"/>
                 </a:solidFill>
@@ -29864,7 +31426,7 @@
               </a:rPr>
               <a:t>PCIe 5.0 ×4</a:t>
             </a:r>
-            <a:endParaRPr lang="en-US" sz="1150" dirty="0"/>
+            <a:endParaRPr lang="en-US" sz="1100" dirty="0"/>
           </a:p>
         </p:txBody>
       </p:sp>
@@ -29943,7 +31505,7 @@
                 <a:ea typeface="Calibri" pitchFamily="34" charset="-122"/>
                 <a:cs typeface="Calibri" pitchFamily="34" charset="-120"/>
               </a:rPr>
-              <a:t>Codificação 128b/130b, 98,46%</a:t>
+              <a:t>Codificação 128b/130b, 98,46% de eficiência</a:t>
             </a:r>
             <a:endParaRPr lang="en-US" sz="1000" dirty="0"/>
           </a:p>
@@ -30001,7 +31563,7 @@
               <a:buNone/>
             </a:pPr>
             <a:r>
-              <a:rPr lang="en-US" sz="1150" b="1" dirty="0">
+              <a:rPr lang="en-US" sz="1100" b="1" dirty="0">
                 <a:solidFill>
                   <a:srgbClr val="14181F"/>
                 </a:solidFill>
@@ -30011,7 +31573,7 @@
               </a:rPr>
               <a:t>SAS-4 útil</a:t>
             </a:r>
-            <a:endParaRPr lang="en-US" sz="1150" dirty="0"/>
+            <a:endParaRPr lang="en-US" sz="1100" dirty="0"/>
           </a:p>
         </p:txBody>
       </p:sp>
@@ -30090,7 +31652,7 @@
                 <a:ea typeface="Calibri" pitchFamily="34" charset="-122"/>
                 <a:cs typeface="Calibri" pitchFamily="34" charset="-120"/>
               </a:rPr>
-              <a:t>“24G” é marca; a taxa é 22,5 Gb/s</a:t>
+              <a:t>“24G” é nome comercial; a taxa de sinalização é 22,5 Gb/s</a:t>
             </a:r>
             <a:endParaRPr lang="en-US" sz="1000" dirty="0"/>
           </a:p>
@@ -30148,7 +31710,7 @@
               <a:buNone/>
             </a:pPr>
             <a:r>
-              <a:rPr lang="en-US" sz="1150" b="1" dirty="0">
+              <a:rPr lang="en-US" sz="1100" b="1" dirty="0">
                 <a:solidFill>
                   <a:srgbClr val="14181F"/>
                 </a:solidFill>
@@ -30156,9 +31718,9 @@
                 <a:ea typeface="Calibri" pitchFamily="34" charset="-122"/>
                 <a:cs typeface="Calibri" pitchFamily="34" charset="-120"/>
               </a:rPr>
-              <a:t>Limite ilustrativo</a:t>
+              <a:t>Limite ilustrativo de commits</a:t>
             </a:r>
-            <a:endParaRPr lang="en-US" sz="1150" dirty="0"/>
+            <a:endParaRPr lang="en-US" sz="1100" dirty="0"/>
           </a:p>
         </p:txBody>
       </p:sp>
@@ -30237,7 +31799,7 @@
                 <a:ea typeface="Calibri" pitchFamily="34" charset="-122"/>
                 <a:cs typeface="Calibri" pitchFamily="34" charset="-120"/>
               </a:rPr>
-              <a:t>Sem group commit, cache protegido, fila e CPU; não é throughput previsto do SGBD</a:t>
+              <a:t>Ignora group commit, cache protegido, fila e CPU, então não é throughput previsto do SGBD</a:t>
             </a:r>
             <a:endParaRPr lang="en-US" sz="1000" dirty="0"/>
           </a:p>
@@ -30295,7 +31857,7 @@
               <a:buNone/>
             </a:pPr>
             <a:r>
-              <a:rPr lang="en-US" sz="1150" b="1" dirty="0">
+              <a:rPr lang="en-US" sz="1100" b="1" dirty="0">
                 <a:solidFill>
                   <a:srgbClr val="14181F"/>
                 </a:solidFill>
@@ -30305,7 +31867,7 @@
               </a:rPr>
               <a:t>Banda DDR5-6000</a:t>
             </a:r>
-            <a:endParaRPr lang="en-US" sz="1150" dirty="0"/>
+            <a:endParaRPr lang="en-US" sz="1100" dirty="0"/>
           </a:p>
         </p:txBody>
       </p:sp>
@@ -30384,7 +31946,7 @@
                 <a:ea typeface="Calibri" pitchFamily="34" charset="-122"/>
                 <a:cs typeface="Calibri" pitchFamily="34" charset="-120"/>
               </a:rPr>
-              <a:t>Dois canais no kit de desktop</a:t>
+              <a:t>Dois canais, que é a configuração do kit de desktop da tabela</a:t>
             </a:r>
             <a:endParaRPr lang="en-US" sz="1000" dirty="0"/>
           </a:p>
@@ -30442,7 +32004,7 @@
               <a:buNone/>
             </a:pPr>
             <a:r>
-              <a:rPr lang="en-US" sz="1150" b="1" dirty="0">
+              <a:rPr lang="en-US" sz="1100" b="1" dirty="0">
                 <a:solidFill>
                   <a:srgbClr val="14181F"/>
                 </a:solidFill>
@@ -30452,7 +32014,7 @@
               </a:rPr>
               <a:t>Latência L3 do Zen 5</a:t>
             </a:r>
-            <a:endParaRPr lang="en-US" sz="1150" dirty="0"/>
+            <a:endParaRPr lang="en-US" sz="1100" dirty="0"/>
           </a:p>
         </p:txBody>
       </p:sp>
@@ -30531,7 +32093,7 @@
                 <a:ea typeface="Calibri" pitchFamily="34" charset="-122"/>
                 <a:cs typeface="Calibri" pitchFamily="34" charset="-120"/>
               </a:rPr>
-              <a:t>5,6 GHz é o boost oficial; ciclos continuam sendo derivação, não especificação</a:t>
+              <a:t>5,6 GHz é o boost oficial, mas a contagem de ciclos é derivação nossa e não especificação</a:t>
             </a:r>
             <a:endParaRPr lang="en-US" sz="1000" dirty="0"/>
           </a:p>
@@ -30540,6 +32102,48 @@
       <p:sp>
         <p:nvSpPr>
           <p:cNvPr id="44" name="Text 42"/>
+          <p:cNvSpPr txBox="1"/>
+          <p:nvPr/>
+        </p:nvSpPr>
+        <p:spPr>
+          <a:xfrm>
+            <a:off x="658368" y="6181344"/>
+            <a:ext cx="10874959" cy="310896"/>
+          </a:xfrm>
+          <a:prstGeom prst="rect">
+            <a:avLst/>
+          </a:prstGeom>
+          <a:noFill/>
+          <a:ln/>
+        </p:spPr>
+        <p:txBody>
+          <a:bodyPr wrap="square" lIns="0" tIns="0" rIns="0" bIns="0" rtlCol="0" anchor="ctr"/>
+          <a:lstStyle/>
+          <a:p>
+            <a:pPr indent="0" marL="0">
+              <a:lnSpc>
+                <a:spcPts val="1200"/>
+              </a:lnSpc>
+              <a:buNone/>
+            </a:pPr>
+            <a:r>
+              <a:rPr lang="en-US" sz="950" i="1" dirty="0">
+                <a:solidFill>
+                  <a:srgbClr val="55606E"/>
+                </a:solidFill>
+                <a:latin typeface="Calibri" pitchFamily="34" charset="0"/>
+                <a:ea typeface="Calibri" pitchFamily="34" charset="-122"/>
+                <a:cs typeface="Calibri" pitchFamily="34" charset="-120"/>
+              </a:rPr>
+              <a:t>Fonte: notas de rodapé da Tabela 16.1 e Seção 4.1 do relatório. Todas as contas acima são reproduzidas pelo script verificar.py, que acompanha a entrega e falha se algum número do texto divergir.</a:t>
+            </a:r>
+            <a:endParaRPr lang="en-US" sz="950" dirty="0"/>
+          </a:p>
+        </p:txBody>
+      </p:sp>
+      <p:sp>
+        <p:nvSpPr>
+          <p:cNvPr id="45" name="Text 43"/>
           <p:cNvSpPr txBox="1"/>
           <p:nvPr/>
         </p:nvSpPr>
